--- a/deliverables/Si_Te_Initial_Dataset_5slides.pptx
+++ b/deliverables/Si_Te_Initial_Dataset_5slides.pptx
@@ -506,12 +506,12 @@
           <a:lstStyle/>
           <a:p>
             <a:r>
-              <a:t>来源与口径：依据：数据集构建策略，第1–3页；激光组会10.7，第3–4页。</a:t>
-            </a:r>
-          </a:p>
-          <a:p>
-            <a:r>
-              <a:t>图表建议：表格左侧配“结构空间 × Tₑ”采样矩阵；晶格温度 Tᵢ 与 Tₑ 分别记录。</a:t>
+              <a:t>来源与口径：沿用 HfO₂/ZrO₂ 多相分类范式；Si 相类别为补充建议，需结合可靠相图与 DFT 验证。</a:t>
+            </a:r>
+          </a:p>
+          <a:p>
+            <a:r>
+              <a:t>图表建议：Si 多晶型结构拼图 + 条件相图区示意；不将预测相或高压相标成常压稳定相。</a:t>
             </a:r>
           </a:p>
           <a:p>
@@ -586,12 +586,12 @@
           <a:lstStyle/>
           <a:p>
             <a:r>
-              <a:t>来源与口径：仿照数据集构建策略，第2页；本页 Si 构型数量为方案建议。</a:t>
-            </a:r>
-          </a:p>
-          <a:p>
-            <a:r>
-              <a:t>图表建议：采用本页统计表；可加构型占比条形图。锚点为 1 000 个候选的子集，不另加数量。</a:t>
+              <a:t>来源与口径：仿照数据集构建策略，第2页；扩充组会材料的位错、非晶与液态类别；数值均为建议。</a:t>
+            </a:r>
+          </a:p>
+          <a:p>
+            <a:r>
+              <a:t>图表建议：统计表配晶型、位错、非晶、液态、空位五类缩略图；端点与跨类重复结构仅计一次。</a:t>
             </a:r>
           </a:p>
           <a:p>
@@ -666,12 +666,12 @@
           <a:lstStyle/>
           <a:p>
             <a:r>
-              <a:t>来源与口径：依据：数据集构建策略，第3页；激光组会10.7，第4页；数值为起始建议。</a:t>
-            </a:r>
-          </a:p>
-          <a:p>
-            <a:r>
-              <a:t>图表建议：配完美 Si、空位、非晶三个结构缩略图，以及一条 NEB 路径能量曲线示意。</a:t>
+              <a:t>来源与口径：数据集构建策略，第3页；激光组会10.7，第4页；新增 Si 相变与缺陷生成策略。</a:t>
+            </a:r>
+          </a:p>
+          <a:p>
+            <a:r>
+              <a:t>图表建议：位错滑移、熔化—淬火与空位诱导局域熔化的三条采样路线图；一步 AIMD 不算热采样。</a:t>
             </a:r>
           </a:p>
           <a:p>
@@ -746,12 +746,12 @@
           <a:lstStyle/>
           <a:p>
             <a:r>
-              <a:t>来源与口径：依据：数据集构建策略，第4页；按 Si 任务重新选型，正式方案需经基准测试。</a:t>
-            </a:r>
-          </a:p>
-          <a:p>
-            <a:r>
-              <a:t>图表建议：使用四列表格，高亮 PBE 主标签与高阶泛函校验角色；不标固定耗时倍数。</a:t>
+              <a:t>来源与口径：数据集构建策略，第4页；Si 多相与缺陷的具体准确性须经基准测试。</a:t>
+            </a:r>
+          </a:p>
+          <a:p>
+            <a:r>
+              <a:t>图表建议：泛函选型表 + 代表晶相相对能 / 体积曲线示意；不套用氧化物计算耗时。</a:t>
             </a:r>
           </a:p>
           <a:p>
@@ -826,12 +826,12 @@
           <a:lstStyle/>
           <a:p>
             <a:r>
-              <a:t>来源与口径：依据：激光组会10.7，第3–4页；参数、数量及验收阈值均为待试算确认的建议。</a:t>
-            </a:r>
-          </a:p>
-          <a:p>
-            <a:r>
-              <a:t>图表建议：配“生成 → 去重 → DFT → 质控 → 分组 → 初训”流程；缺陷能比较统一原子化学势。</a:t>
+              <a:t>来源与口径：激光组会10.7，第3–4页；参数与数量均待试算确认；模型适用范围须明确。</a:t>
+            </a:r>
+          </a:p>
+          <a:p>
+            <a:r>
+              <a:t>图表建议：验收矩阵：晶相排序、缺陷 / 位错、非晶 / 熔体；势垒与晶相可达性作为主动学习补点依据。</a:t>
             </a:r>
           </a:p>
           <a:p>
@@ -3927,7 +3927,7 @@
               </a:defRPr>
             </a:pPr>
             <a:r>
-              <a:t>单晶硅 Tₑ 依赖势｜初始数据集构建思路</a:t>
+              <a:t>初始构型设计｜金刚石相 + 高压相 + 亚稳相</a:t>
             </a:r>
           </a:p>
         </p:txBody>
@@ -4005,7 +4005,7 @@
               </a:defRPr>
             </a:pPr>
             <a:r>
-              <a:t>• 沿用 HfO₂/ZrO₂ 的“任务—构型分类—数量—生成策略”范式。</a:t>
+              <a:t>• 各相按压力、温度与制备路径筛选，不视为常压下均稳定。</a:t>
             </a:r>
           </a:p>
           <a:p>
@@ -4021,7 +4021,7 @@
               </a:defRPr>
             </a:pPr>
             <a:r>
-              <a:t>• 结构 R × Tₑ 联合采样；标签统一为 Mermin 自由能 A、原子力和应力。</a:t>
+              <a:t>• 覆盖结构 R × 体积 / 应变 × Tₑ；高压相权重按激光可达压力调整。</a:t>
             </a:r>
           </a:p>
         </p:txBody>
@@ -4049,28 +4049,28 @@
                 <a:gridCol w="3581400"/>
                 <a:gridCol w="3581400"/>
               </a:tblGrid>
-              <a:tr h="594360">
-                <a:tc>
-                  <a:txBody>
-                    <a:bodyPr/>
-                    <a:lstStyle/>
-                    <a:p>
-                      <a:pPr>
-                        <a:lnSpc>
-                          <a:spcPct val="100000"/>
-                        </a:lnSpc>
-                        <a:spcAft>
-                          <a:spcPts val="0"/>
-                        </a:spcAft>
-                        <a:defRPr sz="1500" b="1">
-                          <a:solidFill>
-                            <a:srgbClr val="F4F7FC"/>
-                          </a:solidFill>
-                          <a:latin typeface="Noto Sans CJK SC"/>
-                        </a:defRPr>
-                      </a:pPr>
-                      <a:r>
-                        <a:t>研究任务</a:t>
+              <a:tr h="495300">
+                <a:tc>
+                  <a:txBody>
+                    <a:bodyPr/>
+                    <a:lstStyle/>
+                    <a:p>
+                      <a:pPr>
+                        <a:lnSpc>
+                          <a:spcPct val="100000"/>
+                        </a:lnSpc>
+                        <a:spcAft>
+                          <a:spcPts val="0"/>
+                        </a:spcAft>
+                        <a:defRPr sz="1450" b="1">
+                          <a:solidFill>
+                            <a:srgbClr val="F4F7FC"/>
+                          </a:solidFill>
+                          <a:latin typeface="Noto Sans CJK SC"/>
+                        </a:defRPr>
+                      </a:pPr>
+                      <a:r>
+                        <a:t>晶体类型</a:t>
                       </a:r>
                     </a:p>
                   </a:txBody>
@@ -4092,15 +4092,15 @@
                         <a:spcAft>
                           <a:spcPts val="0"/>
                         </a:spcAft>
-                        <a:defRPr sz="1500" b="1">
-                          <a:solidFill>
-                            <a:srgbClr val="F4F7FC"/>
-                          </a:solidFill>
-                          <a:latin typeface="Noto Sans CJK SC"/>
-                        </a:defRPr>
-                      </a:pPr>
-                      <a:r>
-                        <a:t>构型覆盖</a:t>
+                        <a:defRPr sz="1450" b="1">
+                          <a:solidFill>
+                            <a:srgbClr val="F4F7FC"/>
+                          </a:solidFill>
+                          <a:latin typeface="Noto Sans CJK SC"/>
+                        </a:defRPr>
+                      </a:pPr>
+                      <a:r>
+                        <a:t>物理地位 / 采样条件</a:t>
                       </a:r>
                     </a:p>
                   </a:txBody>
@@ -4122,15 +4122,15 @@
                         <a:spcAft>
                           <a:spcPts val="0"/>
                         </a:spcAft>
-                        <a:defRPr sz="1500" b="1">
-                          <a:solidFill>
-                            <a:srgbClr val="F4F7FC"/>
-                          </a:solidFill>
-                          <a:latin typeface="Noto Sans CJK SC"/>
-                        </a:defRPr>
-                      </a:pPr>
-                      <a:r>
-                        <a:t>验证指标</a:t>
+                        <a:defRPr sz="1450" b="1">
+                          <a:solidFill>
+                            <a:srgbClr val="F4F7FC"/>
+                          </a:solidFill>
+                          <a:latin typeface="Noto Sans CJK SC"/>
+                        </a:defRPr>
+                      </a:pPr>
+                      <a:r>
+                        <a:t>构型目标</a:t>
                       </a:r>
                     </a:p>
                   </a:txBody>
@@ -4141,28 +4141,28 @@
                   </a:tcPr>
                 </a:tc>
               </a:tr>
-              <a:tr h="594360">
-                <a:tc>
-                  <a:txBody>
-                    <a:bodyPr/>
-                    <a:lstStyle/>
-                    <a:p>
-                      <a:pPr>
-                        <a:lnSpc>
-                          <a:spcPct val="100000"/>
-                        </a:lnSpc>
-                        <a:spcAft>
-                          <a:spcPts val="0"/>
-                        </a:spcAft>
-                        <a:defRPr sz="1500" b="0">
-                          <a:solidFill>
-                            <a:srgbClr val="F4F7FC"/>
-                          </a:solidFill>
-                          <a:latin typeface="Noto Sans CJK SC"/>
-                        </a:defRPr>
-                      </a:pPr>
-                      <a:r>
-                        <a:t>电子激发改变成键</a:t>
+              <a:tr h="495300">
+                <a:tc>
+                  <a:txBody>
+                    <a:bodyPr/>
+                    <a:lstStyle/>
+                    <a:p>
+                      <a:pPr>
+                        <a:lnSpc>
+                          <a:spcPct val="100000"/>
+                        </a:lnSpc>
+                        <a:spcAft>
+                          <a:spcPts val="0"/>
+                        </a:spcAft>
+                        <a:defRPr sz="1450" b="0">
+                          <a:solidFill>
+                            <a:srgbClr val="F4F7FC"/>
+                          </a:solidFill>
+                          <a:latin typeface="Noto Sans CJK SC"/>
+                        </a:defRPr>
+                      </a:pPr>
+                      <a:r>
+                        <a:t>立方金刚石 Si</a:t>
                       </a:r>
                     </a:p>
                   </a:txBody>
@@ -4184,15 +4184,15 @@
                         <a:spcAft>
                           <a:spcPts val="0"/>
                         </a:spcAft>
-                        <a:defRPr sz="1500" b="0">
-                          <a:solidFill>
-                            <a:srgbClr val="F4F7FC"/>
-                          </a:solidFill>
-                          <a:latin typeface="Noto Sans CJK SC"/>
-                        </a:defRPr>
-                      </a:pPr>
-                      <a:r>
-                        <a:t>晶体、扰动、应变；固定 R 多 Tₑ</a:t>
+                        <a:defRPr sz="1450" b="0">
+                          <a:solidFill>
+                            <a:srgbClr val="F4F7FC"/>
+                          </a:solidFill>
+                          <a:latin typeface="Noto Sans CJK SC"/>
+                        </a:defRPr>
+                      </a:pPr>
+                      <a:r>
+                        <a:t>常压平衡晶相；含扰动与应变</a:t>
                       </a:r>
                     </a:p>
                   </a:txBody>
@@ -4214,15 +4214,15 @@
                         <a:spcAft>
                           <a:spcPts val="0"/>
                         </a:spcAft>
-                        <a:defRPr sz="1500" b="0">
-                          <a:solidFill>
-                            <a:srgbClr val="F4F7FC"/>
-                          </a:solidFill>
-                          <a:latin typeface="Noto Sans CJK SC"/>
-                        </a:defRPr>
-                      </a:pPr>
-                      <a:r>
-                        <a:t>A(Tₑ)、力与应力响应</a:t>
+                        <a:defRPr sz="1450" b="0">
+                          <a:solidFill>
+                            <a:srgbClr val="F4F7FC"/>
+                          </a:solidFill>
+                          <a:latin typeface="Noto Sans CJK SC"/>
+                        </a:defRPr>
+                      </a:pPr>
+                      <a:r>
+                        <a:t>140</a:t>
                       </a:r>
                     </a:p>
                   </a:txBody>
@@ -4233,28 +4233,28 @@
                   </a:tcPr>
                 </a:tc>
               </a:tr>
-              <a:tr h="594360">
-                <a:tc>
-                  <a:txBody>
-                    <a:bodyPr/>
-                    <a:lstStyle/>
-                    <a:p>
-                      <a:pPr>
-                        <a:lnSpc>
-                          <a:spcPct val="100000"/>
-                        </a:lnSpc>
-                        <a:spcAft>
-                          <a:spcPts val="0"/>
-                        </a:spcAft>
-                        <a:defRPr sz="1500" b="0">
-                          <a:solidFill>
-                            <a:srgbClr val="F4F7FC"/>
-                          </a:solidFill>
-                          <a:latin typeface="Noto Sans CJK SC"/>
-                        </a:defRPr>
-                      </a:pPr>
-                      <a:r>
-                        <a:t>缺陷形成与迁移</a:t>
+              <a:tr h="495300">
+                <a:tc>
+                  <a:txBody>
+                    <a:bodyPr/>
+                    <a:lstStyle/>
+                    <a:p>
+                      <a:pPr>
+                        <a:lnSpc>
+                          <a:spcPct val="100000"/>
+                        </a:lnSpc>
+                        <a:spcAft>
+                          <a:spcPts val="0"/>
+                        </a:spcAft>
+                        <a:defRPr sz="1450" b="0">
+                          <a:solidFill>
+                            <a:srgbClr val="F4F7FC"/>
+                          </a:solidFill>
+                          <a:latin typeface="Noto Sans CJK SC"/>
+                        </a:defRPr>
+                      </a:pPr>
+                      <a:r>
+                        <a:t>β-Sn 型 Si</a:t>
                       </a:r>
                     </a:p>
                   </a:txBody>
@@ -4276,15 +4276,15 @@
                         <a:spcAft>
                           <a:spcPts val="0"/>
                         </a:spcAft>
-                        <a:defRPr sz="1500" b="0">
-                          <a:solidFill>
-                            <a:srgbClr val="F4F7FC"/>
-                          </a:solidFill>
-                          <a:latin typeface="Noto Sans CJK SC"/>
-                        </a:defRPr>
-                      </a:pPr>
-                      <a:r>
-                        <a:t>空位、间隙、团簇、路径中间态</a:t>
+                        <a:defRPr sz="1450" b="0">
+                          <a:solidFill>
+                            <a:srgbClr val="F4F7FC"/>
+                          </a:solidFill>
+                          <a:latin typeface="Noto Sans CJK SC"/>
+                        </a:defRPr>
+                      </a:pPr>
+                      <a:r>
+                        <a:t>高压相；压缩与卸压采样</a:t>
                       </a:r>
                     </a:p>
                   </a:txBody>
@@ -4306,15 +4306,15 @@
                         <a:spcAft>
                           <a:spcPts val="0"/>
                         </a:spcAft>
-                        <a:defRPr sz="1500" b="0">
-                          <a:solidFill>
-                            <a:srgbClr val="F4F7FC"/>
-                          </a:solidFill>
-                          <a:latin typeface="Noto Sans CJK SC"/>
-                        </a:defRPr>
-                      </a:pPr>
-                      <a:r>
-                        <a:t>形成自由能、迁移势垒</a:t>
+                        <a:defRPr sz="1450" b="0">
+                          <a:solidFill>
+                            <a:srgbClr val="F4F7FC"/>
+                          </a:solidFill>
+                          <a:latin typeface="Noto Sans CJK SC"/>
+                        </a:defRPr>
+                      </a:pPr>
+                      <a:r>
+                        <a:t>40</a:t>
                       </a:r>
                     </a:p>
                   </a:txBody>
@@ -4325,28 +4325,28 @@
                   </a:tcPr>
                 </a:tc>
               </a:tr>
-              <a:tr h="594360">
-                <a:tc>
-                  <a:txBody>
-                    <a:bodyPr/>
-                    <a:lstStyle/>
-                    <a:p>
-                      <a:pPr>
-                        <a:lnSpc>
-                          <a:spcPct val="100000"/>
-                        </a:lnSpc>
-                        <a:spcAft>
-                          <a:spcPts val="0"/>
-                        </a:spcAft>
-                        <a:defRPr sz="1500" b="0">
-                          <a:solidFill>
-                            <a:srgbClr val="F4F7FC"/>
-                          </a:solidFill>
-                          <a:latin typeface="Noto Sans CJK SC"/>
-                        </a:defRPr>
-                      </a:pPr>
-                      <a:r>
-                        <a:t>激光诱导结构演化</a:t>
+              <a:tr h="495300">
+                <a:tc>
+                  <a:txBody>
+                    <a:bodyPr/>
+                    <a:lstStyle/>
+                    <a:p>
+                      <a:pPr>
+                        <a:lnSpc>
+                          <a:spcPct val="100000"/>
+                        </a:lnSpc>
+                        <a:spcAft>
+                          <a:spcPts val="0"/>
+                        </a:spcAft>
+                        <a:defRPr sz="1450" b="0">
+                          <a:solidFill>
+                            <a:srgbClr val="F4F7FC"/>
+                          </a:solidFill>
+                          <a:latin typeface="Noto Sans CJK SC"/>
+                        </a:defRPr>
+                      </a:pPr>
+                      <a:r>
+                        <a:t>简单六方 sh-Si</a:t>
                       </a:r>
                     </a:p>
                   </a:txBody>
@@ -4368,15 +4368,15 @@
                         <a:spcAft>
                           <a:spcPts val="0"/>
                         </a:spcAft>
-                        <a:defRPr sz="1500" b="0">
-                          <a:solidFill>
-                            <a:srgbClr val="F4F7FC"/>
-                          </a:solidFill>
-                          <a:latin typeface="Noto Sans CJK SC"/>
-                        </a:defRPr>
-                      </a:pPr>
-                      <a:r>
-                        <a:t>表面、扩展缺陷、液态 / 非晶</a:t>
+                        <a:defRPr sz="1450" b="0">
+                          <a:solidFill>
+                            <a:srgbClr val="F4F7FC"/>
+                          </a:solidFill>
+                          <a:latin typeface="Noto Sans CJK SC"/>
+                        </a:defRPr>
+                      </a:pPr>
+                      <a:r>
+                        <a:t>更高压区间相；仅在工况需要时保留</a:t>
                       </a:r>
                     </a:p>
                   </a:txBody>
@@ -4398,15 +4398,15 @@
                         <a:spcAft>
                           <a:spcPts val="0"/>
                         </a:spcAft>
-                        <a:defRPr sz="1500" b="0">
-                          <a:solidFill>
-                            <a:srgbClr val="F4F7FC"/>
-                          </a:solidFill>
-                          <a:latin typeface="Noto Sans CJK SC"/>
-                        </a:defRPr>
-                      </a:pPr>
-                      <a:r>
-                        <a:t>局部配位、RDF、动力学稳定性</a:t>
+                        <a:defRPr sz="1450" b="0">
+                          <a:solidFill>
+                            <a:srgbClr val="F4F7FC"/>
+                          </a:solidFill>
+                          <a:latin typeface="Noto Sans CJK SC"/>
+                        </a:defRPr>
+                      </a:pPr>
+                      <a:r>
+                        <a:t>30</a:t>
                       </a:r>
                     </a:p>
                   </a:txBody>
@@ -4417,28 +4417,28 @@
                   </a:tcPr>
                 </a:tc>
               </a:tr>
-              <a:tr h="594360">
-                <a:tc>
-                  <a:txBody>
-                    <a:bodyPr/>
-                    <a:lstStyle/>
-                    <a:p>
-                      <a:pPr>
-                        <a:lnSpc>
-                          <a:spcPct val="100000"/>
-                        </a:lnSpc>
-                        <a:spcAft>
-                          <a:spcPts val="0"/>
-                        </a:spcAft>
-                        <a:defRPr sz="1500" b="0">
-                          <a:solidFill>
-                            <a:srgbClr val="F4F7FC"/>
-                          </a:solidFill>
-                          <a:latin typeface="Noto Sans CJK SC"/>
-                        </a:defRPr>
-                      </a:pPr>
-                      <a:r>
-                        <a:t>Tₑ 起始网格 / K</a:t>
+              <a:tr h="495300">
+                <a:tc>
+                  <a:txBody>
+                    <a:bodyPr/>
+                    <a:lstStyle/>
+                    <a:p>
+                      <a:pPr>
+                        <a:lnSpc>
+                          <a:spcPct val="100000"/>
+                        </a:lnSpc>
+                        <a:spcAft>
+                          <a:spcPts val="0"/>
+                        </a:spcAft>
+                        <a:defRPr sz="1450" b="0">
+                          <a:solidFill>
+                            <a:srgbClr val="F4F7FC"/>
+                          </a:solidFill>
+                          <a:latin typeface="Noto Sans CJK SC"/>
+                        </a:defRPr>
+                      </a:pPr>
+                      <a:r>
+                        <a:t>BC8 / R8</a:t>
                       </a:r>
                     </a:p>
                   </a:txBody>
@@ -4460,15 +4460,15 @@
                         <a:spcAft>
                           <a:spcPts val="0"/>
                         </a:spcAft>
-                        <a:defRPr sz="1500" b="0">
-                          <a:solidFill>
-                            <a:srgbClr val="F4F7FC"/>
-                          </a:solidFill>
-                          <a:latin typeface="Noto Sans CJK SC"/>
-                        </a:defRPr>
-                      </a:pPr>
-                      <a:r>
-                        <a:t>300、3 000、6 000、9 000、12 000、15 000</a:t>
+                        <a:defRPr sz="1450" b="0">
+                          <a:solidFill>
+                            <a:srgbClr val="F4F7FC"/>
+                          </a:solidFill>
+                          <a:latin typeface="Noto Sans CJK SC"/>
+                        </a:defRPr>
+                      </a:pPr>
+                      <a:r>
+                        <a:t>高压卸载后可保留的亚稳相</a:t>
                       </a:r>
                     </a:p>
                   </a:txBody>
@@ -4490,21 +4490,113 @@
                         <a:spcAft>
                           <a:spcPts val="0"/>
                         </a:spcAft>
-                        <a:defRPr sz="1500" b="0">
-                          <a:solidFill>
-                            <a:srgbClr val="F4F7FC"/>
-                          </a:solidFill>
-                          <a:latin typeface="Noto Sans CJK SC"/>
-                        </a:defRPr>
-                      </a:pPr>
-                      <a:r>
-                        <a:t>按目标工况及试算调整</a:t>
+                        <a:defRPr sz="1450" b="0">
+                          <a:solidFill>
+                            <a:srgbClr val="F4F7FC"/>
+                          </a:solidFill>
+                          <a:latin typeface="Noto Sans CJK SC"/>
+                        </a:defRPr>
+                      </a:pPr>
+                      <a:r>
+                        <a:t>30 / 30</a:t>
                       </a:r>
                     </a:p>
                   </a:txBody>
                   <a:tcPr marL="109728" marR="73152" marT="27432" marB="18288" anchor="ctr">
                     <a:solidFill>
                       <a:srgbClr val="182A43"/>
+                    </a:solidFill>
+                  </a:tcPr>
+                </a:tc>
+              </a:tr>
+              <a:tr h="495300">
+                <a:tc>
+                  <a:txBody>
+                    <a:bodyPr/>
+                    <a:lstStyle/>
+                    <a:p>
+                      <a:pPr>
+                        <a:lnSpc>
+                          <a:spcPct val="100000"/>
+                        </a:lnSpc>
+                        <a:spcAft>
+                          <a:spcPts val="0"/>
+                        </a:spcAft>
+                        <a:defRPr sz="1450" b="0">
+                          <a:solidFill>
+                            <a:srgbClr val="F4F7FC"/>
+                          </a:solidFill>
+                          <a:latin typeface="Noto Sans CJK SC"/>
+                        </a:defRPr>
+                      </a:pPr>
+                      <a:r>
+                        <a:t>六方金刚石型 / ST12</a:t>
+                      </a:r>
+                    </a:p>
+                  </a:txBody>
+                  <a:tcPr marL="109728" marR="73152" marT="27432" marB="18288" anchor="ctr">
+                    <a:solidFill>
+                      <a:srgbClr val="21334F"/>
+                    </a:solidFill>
+                  </a:tcPr>
+                </a:tc>
+                <a:tc>
+                  <a:txBody>
+                    <a:bodyPr/>
+                    <a:lstStyle/>
+                    <a:p>
+                      <a:pPr>
+                        <a:lnSpc>
+                          <a:spcPct val="100000"/>
+                        </a:lnSpc>
+                        <a:spcAft>
+                          <a:spcPts val="0"/>
+                        </a:spcAft>
+                        <a:defRPr sz="1450" b="0">
+                          <a:solidFill>
+                            <a:srgbClr val="F4F7FC"/>
+                          </a:solidFill>
+                          <a:latin typeface="Noto Sans CJK SC"/>
+                        </a:defRPr>
+                      </a:pPr>
+                      <a:r>
+                        <a:t>可选亚稳候选；验证结构、排除混相</a:t>
+                      </a:r>
+                    </a:p>
+                  </a:txBody>
+                  <a:tcPr marL="109728" marR="73152" marT="27432" marB="18288" anchor="ctr">
+                    <a:solidFill>
+                      <a:srgbClr val="21334F"/>
+                    </a:solidFill>
+                  </a:tcPr>
+                </a:tc>
+                <a:tc>
+                  <a:txBody>
+                    <a:bodyPr/>
+                    <a:lstStyle/>
+                    <a:p>
+                      <a:pPr>
+                        <a:lnSpc>
+                          <a:spcPct val="100000"/>
+                        </a:lnSpc>
+                        <a:spcAft>
+                          <a:spcPts val="0"/>
+                        </a:spcAft>
+                        <a:defRPr sz="1450" b="0">
+                          <a:solidFill>
+                            <a:srgbClr val="F4F7FC"/>
+                          </a:solidFill>
+                          <a:latin typeface="Noto Sans CJK SC"/>
+                        </a:defRPr>
+                      </a:pPr>
+                      <a:r>
+                        <a:t>20 / 10</a:t>
+                      </a:r>
+                    </a:p>
+                  </a:txBody>
+                  <a:tcPr marL="109728" marR="73152" marT="27432" marB="18288" anchor="ctr">
+                    <a:solidFill>
+                      <a:srgbClr val="21334F"/>
                     </a:solidFill>
                   </a:tcPr>
                 </a:tc>
@@ -4590,7 +4682,7 @@
               </a:defRPr>
             </a:pPr>
             <a:r>
-              <a:t>图 / 表建议  表格左侧配“结构空间 × Tₑ”采样矩阵；晶格温度 Tᵢ 与 Tₑ 分别记录。</a:t>
+              <a:t>图 / 表建议  Si 多晶型结构拼图 + 条件相图区示意；不将预测相或高压相标成常压稳定相。</a:t>
             </a:r>
           </a:p>
         </p:txBody>
@@ -4629,7 +4721,7 @@
               </a:defRPr>
             </a:pPr>
             <a:r>
-              <a:t>依据：数据集构建策略，第1–3页；激光组会10.7，第3–4页。</a:t>
+              <a:t>沿用 HfO₂/ZrO₂ 多相分类范式；Si 相类别为补充建议，需结合可靠相图与 DFT 验证。</a:t>
             </a:r>
           </a:p>
         </p:txBody>
@@ -4776,7 +4868,7 @@
               </a:defRPr>
             </a:pPr>
             <a:r>
-              <a:t>构型分类与数量统计｜目标 1 000 个几何结构</a:t>
+              <a:t>构型分类与数量统计｜多相、位错、无序与缺陷</a:t>
             </a:r>
           </a:p>
         </p:txBody>
@@ -4854,7 +4946,7 @@
               </a:defRPr>
             </a:pPr>
             <a:r>
-              <a:t>• 以下为去重后目标预算，非已完成计算；跨类别重复仅计一次。</a:t>
+              <a:t>• 去重后目标共 1 000 个几何结构；以下为预算，非已完成数据。</a:t>
             </a:r>
           </a:p>
           <a:p>
@@ -4870,7 +4962,7 @@
               </a:defRPr>
             </a:pPr>
             <a:r>
-              <a:t>• 200 个锚点 × 6 个 Tₑ + 其余 800 个 × 2 个 Tₑ ≈ 2 800 次标注。</a:t>
+              <a:t>• 200 个锚点 × 6 个 Tₑ + 其余 800 个 × 2 个 Tₑ = 2 800 次标注。</a:t>
             </a:r>
           </a:p>
         </p:txBody>
@@ -4911,7 +5003,7 @@
                         <a:spcAft>
                           <a:spcPts val="0"/>
                         </a:spcAft>
-                        <a:defRPr sz="1500" b="1">
+                        <a:defRPr sz="1450" b="1">
                           <a:solidFill>
                             <a:srgbClr val="F4F7FC"/>
                           </a:solidFill>
@@ -4941,7 +5033,7 @@
                         <a:spcAft>
                           <a:spcPts val="0"/>
                         </a:spcAft>
-                        <a:defRPr sz="1500" b="1">
+                        <a:defRPr sz="1450" b="1">
                           <a:solidFill>
                             <a:srgbClr val="F4F7FC"/>
                           </a:solidFill>
@@ -4971,7 +5063,7 @@
                         <a:spcAft>
                           <a:spcPts val="0"/>
                         </a:spcAft>
-                        <a:defRPr sz="1500" b="1">
+                        <a:defRPr sz="1450" b="1">
                           <a:solidFill>
                             <a:srgbClr val="F4F7FC"/>
                           </a:solidFill>
@@ -5003,15 +5095,15 @@
                         <a:spcAft>
                           <a:spcPts val="0"/>
                         </a:spcAft>
-                        <a:defRPr sz="1500" b="0">
-                          <a:solidFill>
-                            <a:srgbClr val="F4F7FC"/>
-                          </a:solidFill>
-                          <a:latin typeface="Noto Sans CJK SC"/>
-                        </a:defRPr>
-                      </a:pPr>
-                      <a:r>
-                        <a:t>晶体基线</a:t>
+                        <a:defRPr sz="1450" b="0">
+                          <a:solidFill>
+                            <a:srgbClr val="F4F7FC"/>
+                          </a:solidFill>
+                          <a:latin typeface="Noto Sans CJK SC"/>
+                        </a:defRPr>
+                      </a:pPr>
+                      <a:r>
+                        <a:t>金刚石基线</a:t>
                       </a:r>
                     </a:p>
                   </a:txBody>
@@ -5033,15 +5125,15 @@
                         <a:spcAft>
                           <a:spcPts val="0"/>
                         </a:spcAft>
-                        <a:defRPr sz="1500" b="0">
-                          <a:solidFill>
-                            <a:srgbClr val="F4F7FC"/>
-                          </a:solidFill>
-                          <a:latin typeface="Noto Sans CJK SC"/>
-                        </a:defRPr>
-                      </a:pPr>
-                      <a:r>
-                        <a:t>完美晶体 20；热扰动 100；应变 100</a:t>
+                        <a:defRPr sz="1450" b="0">
+                          <a:solidFill>
+                            <a:srgbClr val="F4F7FC"/>
+                          </a:solidFill>
+                          <a:latin typeface="Noto Sans CJK SC"/>
+                        </a:defRPr>
+                      </a:pPr>
+                      <a:r>
+                        <a:t>完美 20；随机扰动 60；应变 60</a:t>
                       </a:r>
                     </a:p>
                   </a:txBody>
@@ -5063,15 +5155,15 @@
                         <a:spcAft>
                           <a:spcPts val="0"/>
                         </a:spcAft>
-                        <a:defRPr sz="1500" b="0">
-                          <a:solidFill>
-                            <a:srgbClr val="F4F7FC"/>
-                          </a:solidFill>
-                          <a:latin typeface="Noto Sans CJK SC"/>
-                        </a:defRPr>
-                      </a:pPr>
-                      <a:r>
-                        <a:t>220</a:t>
+                        <a:defRPr sz="1450" b="0">
+                          <a:solidFill>
+                            <a:srgbClr val="F4F7FC"/>
+                          </a:solidFill>
+                          <a:latin typeface="Noto Sans CJK SC"/>
+                        </a:defRPr>
+                      </a:pPr>
+                      <a:r>
+                        <a:t>140</a:t>
                       </a:r>
                     </a:p>
                   </a:txBody>
@@ -5095,15 +5187,15 @@
                         <a:spcAft>
                           <a:spcPts val="0"/>
                         </a:spcAft>
-                        <a:defRPr sz="1500" b="0">
-                          <a:solidFill>
-                            <a:srgbClr val="F4F7FC"/>
-                          </a:solidFill>
-                          <a:latin typeface="Noto Sans CJK SC"/>
-                        </a:defRPr>
-                      </a:pPr>
-                      <a:r>
-                        <a:t>点缺陷与团簇</a:t>
+                        <a:defRPr sz="1450" b="0">
+                          <a:solidFill>
+                            <a:srgbClr val="F4F7FC"/>
+                          </a:solidFill>
+                          <a:latin typeface="Noto Sans CJK SC"/>
+                        </a:defRPr>
+                      </a:pPr>
+                      <a:r>
+                        <a:t>其他晶相</a:t>
                       </a:r>
                     </a:p>
                   </a:txBody>
@@ -5125,15 +5217,15 @@
                         <a:spcAft>
                           <a:spcPts val="0"/>
                         </a:spcAft>
-                        <a:defRPr sz="1500" b="0">
-                          <a:solidFill>
-                            <a:srgbClr val="F4F7FC"/>
-                          </a:solidFill>
-                          <a:latin typeface="Noto Sans CJK SC"/>
-                        </a:defRPr>
-                      </a:pPr>
-                      <a:r>
-                        <a:t>单空位 120；自间隙 120；小团簇 80</a:t>
+                        <a:defRPr sz="1450" b="0">
+                          <a:solidFill>
+                            <a:srgbClr val="F4F7FC"/>
+                          </a:solidFill>
+                          <a:latin typeface="Noto Sans CJK SC"/>
+                        </a:defRPr>
+                      </a:pPr>
+                      <a:r>
+                        <a:t>高压相 70；BC8/R8 60；其余候选 30</a:t>
                       </a:r>
                     </a:p>
                   </a:txBody>
@@ -5155,15 +5247,15 @@
                         <a:spcAft>
                           <a:spcPts val="0"/>
                         </a:spcAft>
-                        <a:defRPr sz="1500" b="0">
-                          <a:solidFill>
-                            <a:srgbClr val="F4F7FC"/>
-                          </a:solidFill>
-                          <a:latin typeface="Noto Sans CJK SC"/>
-                        </a:defRPr>
-                      </a:pPr>
-                      <a:r>
-                        <a:t>320</a:t>
+                        <a:defRPr sz="1450" b="0">
+                          <a:solidFill>
+                            <a:srgbClr val="F4F7FC"/>
+                          </a:solidFill>
+                          <a:latin typeface="Noto Sans CJK SC"/>
+                        </a:defRPr>
+                      </a:pPr>
+                      <a:r>
+                        <a:t>160</a:t>
                       </a:r>
                     </a:p>
                   </a:txBody>
@@ -5187,15 +5279,15 @@
                         <a:spcAft>
                           <a:spcPts val="0"/>
                         </a:spcAft>
-                        <a:defRPr sz="1500" b="0">
-                          <a:solidFill>
-                            <a:srgbClr val="F4F7FC"/>
-                          </a:solidFill>
-                          <a:latin typeface="Noto Sans CJK SC"/>
-                        </a:defRPr>
-                      </a:pPr>
-                      <a:r>
-                        <a:t>表面与扩展缺陷</a:t>
+                        <a:defRPr sz="1450" b="0">
+                          <a:solidFill>
+                            <a:srgbClr val="F4F7FC"/>
+                          </a:solidFill>
+                          <a:latin typeface="Noto Sans CJK SC"/>
+                        </a:defRPr>
+                      </a:pPr>
+                      <a:r>
+                        <a:t>点缺陷与团簇</a:t>
                       </a:r>
                     </a:p>
                   </a:txBody>
@@ -5217,15 +5309,15 @@
                         <a:spcAft>
                           <a:spcPts val="0"/>
                         </a:spcAft>
-                        <a:defRPr sz="1500" b="0">
-                          <a:solidFill>
-                            <a:srgbClr val="F4F7FC"/>
-                          </a:solidFill>
-                          <a:latin typeface="Noto Sans CJK SC"/>
-                        </a:defRPr>
-                      </a:pPr>
-                      <a:r>
-                        <a:t>表面 / 近表面缺陷 80；层错 / 位错 80</a:t>
+                        <a:defRPr sz="1450" b="0">
+                          <a:solidFill>
+                            <a:srgbClr val="F4F7FC"/>
+                          </a:solidFill>
+                          <a:latin typeface="Noto Sans CJK SC"/>
+                        </a:defRPr>
+                      </a:pPr>
+                      <a:r>
+                        <a:t>空位 100；自间隙 80；团簇 / 空洞胚胎 80</a:t>
                       </a:r>
                     </a:p>
                   </a:txBody>
@@ -5247,15 +5339,15 @@
                         <a:spcAft>
                           <a:spcPts val="0"/>
                         </a:spcAft>
-                        <a:defRPr sz="1500" b="0">
-                          <a:solidFill>
-                            <a:srgbClr val="F4F7FC"/>
-                          </a:solidFill>
-                          <a:latin typeface="Noto Sans CJK SC"/>
-                        </a:defRPr>
-                      </a:pPr>
-                      <a:r>
-                        <a:t>160</a:t>
+                        <a:defRPr sz="1450" b="0">
+                          <a:solidFill>
+                            <a:srgbClr val="F4F7FC"/>
+                          </a:solidFill>
+                          <a:latin typeface="Noto Sans CJK SC"/>
+                        </a:defRPr>
+                      </a:pPr>
+                      <a:r>
+                        <a:t>260</a:t>
                       </a:r>
                     </a:p>
                   </a:txBody>
@@ -5279,15 +5371,15 @@
                         <a:spcAft>
                           <a:spcPts val="0"/>
                         </a:spcAft>
-                        <a:defRPr sz="1500" b="0">
-                          <a:solidFill>
-                            <a:srgbClr val="F4F7FC"/>
-                          </a:solidFill>
-                          <a:latin typeface="Noto Sans CJK SC"/>
-                        </a:defRPr>
-                      </a:pPr>
-                      <a:r>
-                        <a:t>无序与相界</a:t>
+                        <a:defRPr sz="1450" b="0">
+                          <a:solidFill>
+                            <a:srgbClr val="F4F7FC"/>
+                          </a:solidFill>
+                          <a:latin typeface="Noto Sans CJK SC"/>
+                        </a:defRPr>
+                      </a:pPr>
+                      <a:r>
+                        <a:t>扩展缺陷与表面</a:t>
                       </a:r>
                     </a:p>
                   </a:txBody>
@@ -5309,15 +5401,15 @@
                         <a:spcAft>
                           <a:spcPts val="0"/>
                         </a:spcAft>
-                        <a:defRPr sz="1500" b="0">
-                          <a:solidFill>
-                            <a:srgbClr val="F4F7FC"/>
-                          </a:solidFill>
-                          <a:latin typeface="Noto Sans CJK SC"/>
-                        </a:defRPr>
-                      </a:pPr>
-                      <a:r>
-                        <a:t>液态、非晶、固液界面</a:t>
+                        <a:defRPr sz="1450" b="0">
+                          <a:solidFill>
+                            <a:srgbClr val="F4F7FC"/>
+                          </a:solidFill>
+                          <a:latin typeface="Noto Sans CJK SC"/>
+                        </a:defRPr>
+                      </a:pPr>
+                      <a:r>
+                        <a:t>位错 80；层错 / 孪晶 40；表面 40</a:t>
                       </a:r>
                     </a:p>
                   </a:txBody>
@@ -5339,15 +5431,15 @@
                         <a:spcAft>
                           <a:spcPts val="0"/>
                         </a:spcAft>
-                        <a:defRPr sz="1500" b="0">
-                          <a:solidFill>
-                            <a:srgbClr val="F4F7FC"/>
-                          </a:solidFill>
-                          <a:latin typeface="Noto Sans CJK SC"/>
-                        </a:defRPr>
-                      </a:pPr>
-                      <a:r>
-                        <a:t>200</a:t>
+                        <a:defRPr sz="1450" b="0">
+                          <a:solidFill>
+                            <a:srgbClr val="F4F7FC"/>
+                          </a:solidFill>
+                          <a:latin typeface="Noto Sans CJK SC"/>
+                        </a:defRPr>
+                      </a:pPr>
+                      <a:r>
+                        <a:t>160</a:t>
                       </a:r>
                     </a:p>
                   </a:txBody>
@@ -5371,15 +5463,15 @@
                         <a:spcAft>
                           <a:spcPts val="0"/>
                         </a:spcAft>
-                        <a:defRPr sz="1500" b="0">
-                          <a:solidFill>
-                            <a:srgbClr val="F4F7FC"/>
-                          </a:solidFill>
-                          <a:latin typeface="Noto Sans CJK SC"/>
-                        </a:defRPr>
-                      </a:pPr>
-                      <a:r>
-                        <a:t>迁移与转变路径</a:t>
+                        <a:defRPr sz="1450" b="0">
+                          <a:solidFill>
+                            <a:srgbClr val="F4F7FC"/>
+                          </a:solidFill>
+                          <a:latin typeface="Noto Sans CJK SC"/>
+                        </a:defRPr>
+                      </a:pPr>
+                      <a:r>
+                        <a:t>非晶、熔体与相界</a:t>
                       </a:r>
                     </a:p>
                   </a:txBody>
@@ -5401,15 +5493,15 @@
                         <a:spcAft>
                           <a:spcPts val="0"/>
                         </a:spcAft>
-                        <a:defRPr sz="1500" b="0">
-                          <a:solidFill>
-                            <a:srgbClr val="F4F7FC"/>
-                          </a:solidFill>
-                          <a:latin typeface="Noto Sans CJK SC"/>
-                        </a:defRPr>
-                      </a:pPr>
-                      <a:r>
-                        <a:t>去重后的路径中间态；端点归缺陷类</a:t>
+                        <a:defRPr sz="1450" b="0">
+                          <a:solidFill>
+                            <a:srgbClr val="F4F7FC"/>
+                          </a:solidFill>
+                          <a:latin typeface="Noto Sans CJK SC"/>
+                        </a:defRPr>
+                      </a:pPr>
+                      <a:r>
+                        <a:t>非晶 60；液态 60；相界 / 空位诱导熔化 60</a:t>
                       </a:r>
                     </a:p>
                   </a:txBody>
@@ -5431,15 +5523,15 @@
                         <a:spcAft>
                           <a:spcPts val="0"/>
                         </a:spcAft>
-                        <a:defRPr sz="1500" b="0">
-                          <a:solidFill>
-                            <a:srgbClr val="F4F7FC"/>
-                          </a:solidFill>
-                          <a:latin typeface="Noto Sans CJK SC"/>
-                        </a:defRPr>
-                      </a:pPr>
-                      <a:r>
-                        <a:t>100</a:t>
+                        <a:defRPr sz="1450" b="0">
+                          <a:solidFill>
+                            <a:srgbClr val="F4F7FC"/>
+                          </a:solidFill>
+                          <a:latin typeface="Noto Sans CJK SC"/>
+                        </a:defRPr>
+                      </a:pPr>
+                      <a:r>
+                        <a:t>180</a:t>
                       </a:r>
                     </a:p>
                   </a:txBody>
@@ -5463,15 +5555,15 @@
                         <a:spcAft>
                           <a:spcPts val="0"/>
                         </a:spcAft>
-                        <a:defRPr sz="1500" b="0">
-                          <a:solidFill>
-                            <a:srgbClr val="F4F7FC"/>
-                          </a:solidFill>
-                          <a:latin typeface="Noto Sans CJK SC"/>
-                        </a:defRPr>
-                      </a:pPr>
-                      <a:r>
-                        <a:t>总计</a:t>
+                        <a:defRPr sz="1450" b="0">
+                          <a:solidFill>
+                            <a:srgbClr val="F4F7FC"/>
+                          </a:solidFill>
+                          <a:latin typeface="Noto Sans CJK SC"/>
+                        </a:defRPr>
+                      </a:pPr>
+                      <a:r>
+                        <a:t>迁移与转变路径</a:t>
                       </a:r>
                     </a:p>
                   </a:txBody>
@@ -5493,15 +5585,15 @@
                         <a:spcAft>
                           <a:spcPts val="0"/>
                         </a:spcAft>
-                        <a:defRPr sz="1500" b="0">
-                          <a:solidFill>
-                            <a:srgbClr val="F4F7FC"/>
-                          </a:solidFill>
-                          <a:latin typeface="Noto Sans CJK SC"/>
-                        </a:defRPr>
-                      </a:pPr>
-                      <a:r>
-                        <a:t>十类结构；不足时按覆盖缺口补充候选</a:t>
+                        <a:defRPr sz="1450" b="0">
+                          <a:solidFill>
+                            <a:srgbClr val="F4F7FC"/>
+                          </a:solidFill>
+                          <a:latin typeface="Noto Sans CJK SC"/>
+                        </a:defRPr>
+                      </a:pPr>
+                      <a:r>
+                        <a:t>缺陷迁移 / 复合；相变；位错滑移中间态</a:t>
                       </a:r>
                     </a:p>
                   </a:txBody>
@@ -5523,15 +5615,15 @@
                         <a:spcAft>
                           <a:spcPts val="0"/>
                         </a:spcAft>
-                        <a:defRPr sz="1500" b="0">
-                          <a:solidFill>
-                            <a:srgbClr val="F4F7FC"/>
-                          </a:solidFill>
-                          <a:latin typeface="Noto Sans CJK SC"/>
-                        </a:defRPr>
-                      </a:pPr>
-                      <a:r>
-                        <a:t>1 000</a:t>
+                        <a:defRPr sz="1450" b="0">
+                          <a:solidFill>
+                            <a:srgbClr val="F4F7FC"/>
+                          </a:solidFill>
+                          <a:latin typeface="Noto Sans CJK SC"/>
+                        </a:defRPr>
+                      </a:pPr>
+                      <a:r>
+                        <a:t>100</a:t>
                       </a:r>
                     </a:p>
                   </a:txBody>
@@ -5623,7 +5715,7 @@
               </a:defRPr>
             </a:pPr>
             <a:r>
-              <a:t>图 / 表建议  采用本页统计表；可加构型占比条形图。锚点为 1 000 个候选的子集，不另加数量。</a:t>
+              <a:t>图 / 表建议  统计表配晶型、位错、非晶、液态、空位五类缩略图；端点与跨类重复结构仅计一次。</a:t>
             </a:r>
           </a:p>
         </p:txBody>
@@ -5662,7 +5754,7 @@
               </a:defRPr>
             </a:pPr>
             <a:r>
-              <a:t>仿照数据集构建策略，第2页；本页 Si 构型数量为方案建议。</a:t>
+              <a:t>仿照数据集构建策略，第2页；扩充组会材料的位错、非晶与液态类别；数值均为建议。</a:t>
             </a:r>
           </a:p>
         </p:txBody>
@@ -5809,7 +5901,7 @@
               </a:defRPr>
             </a:pPr>
             <a:r>
-              <a:t>构型生成策略｜静态扰动 + AIMD + 路径采样</a:t>
+              <a:t>构型生成策略｜压卸载、位错滑移与空位诱导熔化</a:t>
             </a:r>
           </a:p>
         </p:txBody>
@@ -5887,7 +5979,7 @@
               </a:defRPr>
             </a:pPr>
             <a:r>
-              <a:t>• 保留基态与非平衡结构；热轨迹充分平衡后去相关抽帧。</a:t>
+              <a:t>• 晶态空位与液态低配位 / 自由体积分别统计，不混用定义。</a:t>
             </a:r>
           </a:p>
           <a:p>
@@ -5903,7 +5995,7 @@
               </a:defRPr>
             </a:pPr>
             <a:r>
-              <a:t>• 同一几何结构改变 Tₑ 重复标注，用于分离纯电子激发效应。</a:t>
+              <a:t>• Tₑ 起始网格：300、3 000、6 000、9 000、12 000、15 000 K；Tᵢ 独立。</a:t>
             </a:r>
           </a:p>
         </p:txBody>
@@ -5931,20 +6023,20 @@
                 <a:gridCol w="3581400"/>
                 <a:gridCol w="3581400"/>
               </a:tblGrid>
-              <a:tr h="495300">
-                <a:tc>
-                  <a:txBody>
-                    <a:bodyPr/>
-                    <a:lstStyle/>
-                    <a:p>
-                      <a:pPr>
-                        <a:lnSpc>
-                          <a:spcPct val="100000"/>
-                        </a:lnSpc>
-                        <a:spcAft>
-                          <a:spcPts val="0"/>
-                        </a:spcAft>
-                        <a:defRPr sz="1500" b="1">
+              <a:tr h="424542">
+                <a:tc>
+                  <a:txBody>
+                    <a:bodyPr/>
+                    <a:lstStyle/>
+                    <a:p>
+                      <a:pPr>
+                        <a:lnSpc>
+                          <a:spcPct val="100000"/>
+                        </a:lnSpc>
+                        <a:spcAft>
+                          <a:spcPts val="0"/>
+                        </a:spcAft>
+                        <a:defRPr sz="1450" b="1">
                           <a:solidFill>
                             <a:srgbClr val="F4F7FC"/>
                           </a:solidFill>
@@ -5974,7 +6066,7 @@
                         <a:spcAft>
                           <a:spcPts val="0"/>
                         </a:spcAft>
-                        <a:defRPr sz="1500" b="1">
+                        <a:defRPr sz="1450" b="1">
                           <a:solidFill>
                             <a:srgbClr val="F4F7FC"/>
                           </a:solidFill>
@@ -6004,15 +6096,15 @@
                         <a:spcAft>
                           <a:spcPts val="0"/>
                         </a:spcAft>
-                        <a:defRPr sz="1500" b="1">
-                          <a:solidFill>
-                            <a:srgbClr val="F4F7FC"/>
-                          </a:solidFill>
-                          <a:latin typeface="Noto Sans CJK SC"/>
-                        </a:defRPr>
-                      </a:pPr>
-                      <a:r>
-                        <a:t>采样与质量控制</a:t>
+                        <a:defRPr sz="1450" b="1">
+                          <a:solidFill>
+                            <a:srgbClr val="F4F7FC"/>
+                          </a:solidFill>
+                          <a:latin typeface="Noto Sans CJK SC"/>
+                        </a:defRPr>
+                      </a:pPr>
+                      <a:r>
+                        <a:t>重点覆盖</a:t>
                       </a:r>
                     </a:p>
                   </a:txBody>
@@ -6023,28 +6115,28 @@
                   </a:tcPr>
                 </a:tc>
               </a:tr>
-              <a:tr h="495300">
-                <a:tc>
-                  <a:txBody>
-                    <a:bodyPr/>
-                    <a:lstStyle/>
-                    <a:p>
-                      <a:pPr>
-                        <a:lnSpc>
-                          <a:spcPct val="100000"/>
-                        </a:lnSpc>
-                        <a:spcAft>
-                          <a:spcPts val="0"/>
-                        </a:spcAft>
-                        <a:defRPr sz="1500" b="0">
-                          <a:solidFill>
-                            <a:srgbClr val="F4F7FC"/>
-                          </a:solidFill>
-                          <a:latin typeface="Noto Sans CJK SC"/>
-                        </a:defRPr>
-                      </a:pPr>
-                      <a:r>
-                        <a:t>晶体 / 扰动 / 应变</a:t>
+              <a:tr h="424542">
+                <a:tc>
+                  <a:txBody>
+                    <a:bodyPr/>
+                    <a:lstStyle/>
+                    <a:p>
+                      <a:pPr>
+                        <a:lnSpc>
+                          <a:spcPct val="100000"/>
+                        </a:lnSpc>
+                        <a:spcAft>
+                          <a:spcPts val="0"/>
+                        </a:spcAft>
+                        <a:defRPr sz="1450" b="0">
+                          <a:solidFill>
+                            <a:srgbClr val="F4F7FC"/>
+                          </a:solidFill>
+                          <a:latin typeface="Noto Sans CJK SC"/>
+                        </a:defRPr>
+                      </a:pPr>
+                      <a:r>
+                        <a:t>多晶相</a:t>
                       </a:r>
                     </a:p>
                   </a:txBody>
@@ -6066,15 +6158,15 @@
                         <a:spcAft>
                           <a:spcPts val="0"/>
                         </a:spcAft>
-                        <a:defRPr sz="1500" b="0">
-                          <a:solidFill>
-                            <a:srgbClr val="F4F7FC"/>
-                          </a:solidFill>
-                          <a:latin typeface="Noto Sans CJK SC"/>
-                        </a:defRPr>
-                      </a:pPr>
-                      <a:r>
-                        <a:t>线性缩放 0.95/1/1.05；随机位移、剪切</a:t>
+                        <a:defRPr sz="1450" b="0">
+                          <a:solidFill>
+                            <a:srgbClr val="F4F7FC"/>
+                          </a:solidFill>
+                          <a:latin typeface="Noto Sans CJK SC"/>
+                        </a:defRPr>
+                      </a:pPr>
+                      <a:r>
+                        <a:t>晶胞优化；压缩 / 卸载；各相扰动</a:t>
                       </a:r>
                     </a:p>
                   </a:txBody>
@@ -6096,15 +6188,15 @@
                         <a:spcAft>
                           <a:spcPts val="0"/>
                         </a:spcAft>
-                        <a:defRPr sz="1500" b="0">
-                          <a:solidFill>
-                            <a:srgbClr val="F4F7FC"/>
-                          </a:solidFill>
-                          <a:latin typeface="Noto Sans CJK SC"/>
-                        </a:defRPr>
-                      </a:pPr>
-                      <a:r>
-                        <a:t>多幅度、多种子；检查最小距离</a:t>
+                        <a:defRPr sz="1450" b="0">
+                          <a:solidFill>
+                            <a:srgbClr val="F4F7FC"/>
+                          </a:solidFill>
+                          <a:latin typeface="Noto Sans CJK SC"/>
+                        </a:defRPr>
+                      </a:pPr>
+                      <a:r>
+                        <a:t>多体积、多应变；相间过渡结构</a:t>
                       </a:r>
                     </a:p>
                   </a:txBody>
@@ -6115,28 +6207,28 @@
                   </a:tcPr>
                 </a:tc>
               </a:tr>
-              <a:tr h="495300">
-                <a:tc>
-                  <a:txBody>
-                    <a:bodyPr/>
-                    <a:lstStyle/>
-                    <a:p>
-                      <a:pPr>
-                        <a:lnSpc>
-                          <a:spcPct val="100000"/>
-                        </a:lnSpc>
-                        <a:spcAft>
-                          <a:spcPts val="0"/>
-                        </a:spcAft>
-                        <a:defRPr sz="1500" b="0">
-                          <a:solidFill>
-                            <a:srgbClr val="F4F7FC"/>
-                          </a:solidFill>
-                          <a:latin typeface="Noto Sans CJK SC"/>
-                        </a:defRPr>
-                      </a:pPr>
-                      <a:r>
-                        <a:t>点缺陷 / 团簇</a:t>
+              <a:tr h="424542">
+                <a:tc>
+                  <a:txBody>
+                    <a:bodyPr/>
+                    <a:lstStyle/>
+                    <a:p>
+                      <a:pPr>
+                        <a:lnSpc>
+                          <a:spcPct val="100000"/>
+                        </a:lnSpc>
+                        <a:spcAft>
+                          <a:spcPts val="0"/>
+                        </a:spcAft>
+                        <a:defRPr sz="1450" b="0">
+                          <a:solidFill>
+                            <a:srgbClr val="F4F7FC"/>
+                          </a:solidFill>
+                          <a:latin typeface="Noto Sans CJK SC"/>
+                        </a:defRPr>
+                      </a:pPr>
+                      <a:r>
+                        <a:t>空位 / 间隙 / 团簇</a:t>
                       </a:r>
                     </a:p>
                   </a:txBody>
@@ -6158,15 +6250,15 @@
                         <a:spcAft>
                           <a:spcPts val="0"/>
                         </a:spcAft>
-                        <a:defRPr sz="1500" b="0">
-                          <a:solidFill>
-                            <a:srgbClr val="F4F7FC"/>
-                          </a:solidFill>
-                          <a:latin typeface="Noto Sans CJK SC"/>
-                        </a:defRPr>
-                      </a:pPr>
-                      <a:r>
-                        <a:t>删原子、插原子；局域弛豫后扰动</a:t>
+                        <a:defRPr sz="1450" b="0">
+                          <a:solidFill>
+                            <a:srgbClr val="F4F7FC"/>
+                          </a:solidFill>
+                          <a:latin typeface="Noto Sans CJK SC"/>
+                        </a:defRPr>
+                      </a:pPr>
+                      <a:r>
+                        <a:t>删 / 插原子；局域弛豫与热扰动</a:t>
                       </a:r>
                     </a:p>
                   </a:txBody>
@@ -6188,15 +6280,15 @@
                         <a:spcAft>
                           <a:spcPts val="0"/>
                         </a:spcAft>
-                        <a:defRPr sz="1500" b="0">
-                          <a:solidFill>
-                            <a:srgbClr val="F4F7FC"/>
-                          </a:solidFill>
-                          <a:latin typeface="Noto Sans CJK SC"/>
-                        </a:defRPr>
-                      </a:pPr>
-                      <a:r>
-                        <a:t>多取向、多体积；以中性缺陷起步</a:t>
+                        <a:defRPr sz="1450" b="0">
+                          <a:solidFill>
+                            <a:srgbClr val="F4F7FC"/>
+                          </a:solidFill>
+                          <a:latin typeface="Noto Sans CJK SC"/>
+                        </a:defRPr>
+                      </a:pPr>
+                      <a:r>
+                        <a:t>单空位、多空位；Frenkel 对与复合</a:t>
                       </a:r>
                     </a:p>
                   </a:txBody>
@@ -6207,28 +6299,28 @@
                   </a:tcPr>
                 </a:tc>
               </a:tr>
-              <a:tr h="495300">
-                <a:tc>
-                  <a:txBody>
-                    <a:bodyPr/>
-                    <a:lstStyle/>
-                    <a:p>
-                      <a:pPr>
-                        <a:lnSpc>
-                          <a:spcPct val="100000"/>
-                        </a:lnSpc>
-                        <a:spcAft>
-                          <a:spcPts val="0"/>
-                        </a:spcAft>
-                        <a:defRPr sz="1500" b="0">
-                          <a:solidFill>
-                            <a:srgbClr val="F4F7FC"/>
-                          </a:solidFill>
-                          <a:latin typeface="Noto Sans CJK SC"/>
-                        </a:defRPr>
-                      </a:pPr>
-                      <a:r>
-                        <a:t>表面 / 扩展缺陷</a:t>
+              <a:tr h="424542">
+                <a:tc>
+                  <a:txBody>
+                    <a:bodyPr/>
+                    <a:lstStyle/>
+                    <a:p>
+                      <a:pPr>
+                        <a:lnSpc>
+                          <a:spcPct val="100000"/>
+                        </a:lnSpc>
+                        <a:spcAft>
+                          <a:spcPts val="0"/>
+                        </a:spcAft>
+                        <a:defRPr sz="1450" b="0">
+                          <a:solidFill>
+                            <a:srgbClr val="F4F7FC"/>
+                          </a:solidFill>
+                          <a:latin typeface="Noto Sans CJK SC"/>
+                        </a:defRPr>
+                      </a:pPr>
+                      <a:r>
+                        <a:t>位错 / 层错 / 孪晶</a:t>
                       </a:r>
                     </a:p>
                   </a:txBody>
@@ -6250,15 +6342,15 @@
                         <a:spcAft>
                           <a:spcPts val="0"/>
                         </a:spcAft>
-                        <a:defRPr sz="1500" b="0">
-                          <a:solidFill>
-                            <a:srgbClr val="F4F7FC"/>
-                          </a:solidFill>
-                          <a:latin typeface="Noto Sans CJK SC"/>
-                        </a:defRPr>
-                      </a:pPr>
-                      <a:r>
-                        <a:t>低指数 slab；受控滑移、位错构建</a:t>
+                        <a:defRPr sz="1450" b="0">
+                          <a:solidFill>
+                            <a:srgbClr val="F4F7FC"/>
+                          </a:solidFill>
+                          <a:latin typeface="Noto Sans CJK SC"/>
+                        </a:defRPr>
+                      </a:pPr>
+                      <a:r>
+                        <a:t>刃型、螺型或部分位错；剪切驱动</a:t>
                       </a:r>
                     </a:p>
                   </a:txBody>
@@ -6280,15 +6372,15 @@
                         <a:spcAft>
                           <a:spcPts val="0"/>
                         </a:spcAft>
-                        <a:defRPr sz="1500" b="0">
-                          <a:solidFill>
-                            <a:srgbClr val="F4F7FC"/>
-                          </a:solidFill>
-                          <a:latin typeface="Noto Sans CJK SC"/>
-                        </a:defRPr>
-                      </a:pPr>
-                      <a:r>
-                        <a:t>厚度、真空和周期镜像收敛</a:t>
+                        <a:defRPr sz="1450" b="0">
+                          <a:solidFill>
+                            <a:srgbClr val="F4F7FC"/>
+                          </a:solidFill>
+                          <a:latin typeface="Noto Sans CJK SC"/>
+                        </a:defRPr>
+                      </a:pPr>
+                      <a:r>
+                        <a:t>缺陷核、核重构与滑移邻域</a:t>
                       </a:r>
                     </a:p>
                   </a:txBody>
@@ -6299,28 +6391,28 @@
                   </a:tcPr>
                 </a:tc>
               </a:tr>
-              <a:tr h="495300">
-                <a:tc>
-                  <a:txBody>
-                    <a:bodyPr/>
-                    <a:lstStyle/>
-                    <a:p>
-                      <a:pPr>
-                        <a:lnSpc>
-                          <a:spcPct val="100000"/>
-                        </a:lnSpc>
-                        <a:spcAft>
-                          <a:spcPts val="0"/>
-                        </a:spcAft>
-                        <a:defRPr sz="1500" b="0">
-                          <a:solidFill>
-                            <a:srgbClr val="F4F7FC"/>
-                          </a:solidFill>
-                          <a:latin typeface="Noto Sans CJK SC"/>
-                        </a:defRPr>
-                      </a:pPr>
-                      <a:r>
-                        <a:t>液态 / 非晶 / 相界</a:t>
+              <a:tr h="424542">
+                <a:tc>
+                  <a:txBody>
+                    <a:bodyPr/>
+                    <a:lstStyle/>
+                    <a:p>
+                      <a:pPr>
+                        <a:lnSpc>
+                          <a:spcPct val="100000"/>
+                        </a:lnSpc>
+                        <a:spcAft>
+                          <a:spcPts val="0"/>
+                        </a:spcAft>
+                        <a:defRPr sz="1450" b="0">
+                          <a:solidFill>
+                            <a:srgbClr val="F4F7FC"/>
+                          </a:solidFill>
+                          <a:latin typeface="Noto Sans CJK SC"/>
+                        </a:defRPr>
+                      </a:pPr>
+                      <a:r>
+                        <a:t>非晶 / 液态</a:t>
                       </a:r>
                     </a:p>
                   </a:txBody>
@@ -6342,15 +6434,15 @@
                         <a:spcAft>
                           <a:spcPts val="0"/>
                         </a:spcAft>
-                        <a:defRPr sz="1500" b="0">
-                          <a:solidFill>
-                            <a:srgbClr val="F4F7FC"/>
-                          </a:solidFill>
-                          <a:latin typeface="Noto Sans CJK SC"/>
-                        </a:defRPr>
-                      </a:pPr>
-                      <a:r>
-                        <a:t>多温度 AIMD；熔化、淬火、两相共存</a:t>
+                        <a:defRPr sz="1450" b="0">
+                          <a:solidFill>
+                            <a:srgbClr val="F4F7FC"/>
+                          </a:solidFill>
+                          <a:latin typeface="Noto Sans CJK SC"/>
+                        </a:defRPr>
+                      </a:pPr>
+                      <a:r>
+                        <a:t>多路径熔化—淬火；不同密度与 Tᵢ</a:t>
                       </a:r>
                     </a:p>
                   </a:txBody>
@@ -6372,15 +6464,15 @@
                         <a:spcAft>
                           <a:spcPts val="0"/>
                         </a:spcAft>
-                        <a:defRPr sz="1500" b="0">
-                          <a:solidFill>
-                            <a:srgbClr val="F4F7FC"/>
-                          </a:solidFill>
-                          <a:latin typeface="Noto Sans CJK SC"/>
-                        </a:defRPr>
-                      </a:pPr>
-                      <a:r>
-                        <a:t>多轨迹、多淬火速率；结构去重</a:t>
+                        <a:defRPr sz="1450" b="0">
+                          <a:solidFill>
+                            <a:srgbClr val="F4F7FC"/>
+                          </a:solidFill>
+                          <a:latin typeface="Noto Sans CJK SC"/>
+                        </a:defRPr>
+                      </a:pPr>
+                      <a:r>
+                        <a:t>局域配位；短 / 中程有序；去相关</a:t>
                       </a:r>
                     </a:p>
                   </a:txBody>
@@ -6391,28 +6483,28 @@
                   </a:tcPr>
                 </a:tc>
               </a:tr>
-              <a:tr h="495300">
-                <a:tc>
-                  <a:txBody>
-                    <a:bodyPr/>
-                    <a:lstStyle/>
-                    <a:p>
-                      <a:pPr>
-                        <a:lnSpc>
-                          <a:spcPct val="100000"/>
-                        </a:lnSpc>
-                        <a:spcAft>
-                          <a:spcPts val="0"/>
-                        </a:spcAft>
-                        <a:defRPr sz="1500" b="0">
-                          <a:solidFill>
-                            <a:srgbClr val="F4F7FC"/>
-                          </a:solidFill>
-                          <a:latin typeface="Noto Sans CJK SC"/>
-                        </a:defRPr>
-                      </a:pPr>
-                      <a:r>
-                        <a:t>迁移 / 转变路径</a:t>
+              <a:tr h="424542">
+                <a:tc>
+                  <a:txBody>
+                    <a:bodyPr/>
+                    <a:lstStyle/>
+                    <a:p>
+                      <a:pPr>
+                        <a:lnSpc>
+                          <a:spcPct val="100000"/>
+                        </a:lnSpc>
+                        <a:spcAft>
+                          <a:spcPts val="0"/>
+                        </a:spcAft>
+                        <a:defRPr sz="1450" b="0">
+                          <a:solidFill>
+                            <a:srgbClr val="F4F7FC"/>
+                          </a:solidFill>
+                          <a:latin typeface="Noto Sans CJK SC"/>
+                        </a:defRPr>
+                      </a:pPr>
+                      <a:r>
+                        <a:t>空位诱导熔化 / 相界</a:t>
                       </a:r>
                     </a:p>
                   </a:txBody>
@@ -6434,15 +6526,15 @@
                         <a:spcAft>
                           <a:spcPts val="0"/>
                         </a:spcAft>
-                        <a:defRPr sz="1500" b="0">
-                          <a:solidFill>
-                            <a:srgbClr val="F4F7FC"/>
-                          </a:solidFill>
-                          <a:latin typeface="Noto Sans CJK SC"/>
-                        </a:defRPr>
-                      </a:pPr>
-                      <a:r>
-                        <a:t>固定 Tₑ 的 NEB；约 8–12 个中间图像</a:t>
+                        <a:defRPr sz="1450" b="0">
+                          <a:solidFill>
+                            <a:srgbClr val="F4F7FC"/>
+                          </a:solidFill>
+                          <a:latin typeface="Noto Sans CJK SC"/>
+                        </a:defRPr>
+                      </a:pPr>
+                      <a:r>
+                        <a:t>含空位晶体加热；固液共存采样</a:t>
                       </a:r>
                     </a:p>
                   </a:txBody>
@@ -6464,21 +6556,113 @@
                         <a:spcAft>
                           <a:spcPts val="0"/>
                         </a:spcAft>
-                        <a:defRPr sz="1500" b="0">
-                          <a:solidFill>
-                            <a:srgbClr val="F4F7FC"/>
-                          </a:solidFill>
-                          <a:latin typeface="Noto Sans CJK SC"/>
-                        </a:defRPr>
-                      </a:pPr>
-                      <a:r>
-                        <a:t>势垒与图像数收敛；保留鞍点邻域</a:t>
+                        <a:defRPr sz="1450" b="0">
+                          <a:solidFill>
+                            <a:srgbClr val="F4F7FC"/>
+                          </a:solidFill>
+                          <a:latin typeface="Noto Sans CJK SC"/>
+                        </a:defRPr>
+                      </a:pPr>
+                      <a:r>
+                        <a:t>空洞胚胎、熔化前沿、再凝固</a:t>
                       </a:r>
                     </a:p>
                   </a:txBody>
                   <a:tcPr marL="109728" marR="73152" marT="27432" marB="18288" anchor="ctr">
                     <a:solidFill>
                       <a:srgbClr val="21334F"/>
+                    </a:solidFill>
+                  </a:tcPr>
+                </a:tc>
+              </a:tr>
+              <a:tr h="424548">
+                <a:tc>
+                  <a:txBody>
+                    <a:bodyPr/>
+                    <a:lstStyle/>
+                    <a:p>
+                      <a:pPr>
+                        <a:lnSpc>
+                          <a:spcPct val="100000"/>
+                        </a:lnSpc>
+                        <a:spcAft>
+                          <a:spcPts val="0"/>
+                        </a:spcAft>
+                        <a:defRPr sz="1450" b="0">
+                          <a:solidFill>
+                            <a:srgbClr val="F4F7FC"/>
+                          </a:solidFill>
+                          <a:latin typeface="Noto Sans CJK SC"/>
+                        </a:defRPr>
+                      </a:pPr>
+                      <a:r>
+                        <a:t>反应 / 转变路径</a:t>
+                      </a:r>
+                    </a:p>
+                  </a:txBody>
+                  <a:tcPr marL="109728" marR="73152" marT="27432" marB="18288" anchor="ctr">
+                    <a:solidFill>
+                      <a:srgbClr val="182A43"/>
+                    </a:solidFill>
+                  </a:tcPr>
+                </a:tc>
+                <a:tc>
+                  <a:txBody>
+                    <a:bodyPr/>
+                    <a:lstStyle/>
+                    <a:p>
+                      <a:pPr>
+                        <a:lnSpc>
+                          <a:spcPct val="100000"/>
+                        </a:lnSpc>
+                        <a:spcAft>
+                          <a:spcPts val="0"/>
+                        </a:spcAft>
+                        <a:defRPr sz="1450" b="0">
+                          <a:solidFill>
+                            <a:srgbClr val="F4F7FC"/>
+                          </a:solidFill>
+                          <a:latin typeface="Noto Sans CJK SC"/>
+                        </a:defRPr>
+                      </a:pPr>
+                      <a:r>
+                        <a:t>固定 Tₑ 的 NEB 或受控形变</a:t>
+                      </a:r>
+                    </a:p>
+                  </a:txBody>
+                  <a:tcPr marL="109728" marR="73152" marT="27432" marB="18288" anchor="ctr">
+                    <a:solidFill>
+                      <a:srgbClr val="182A43"/>
+                    </a:solidFill>
+                  </a:tcPr>
+                </a:tc>
+                <a:tc>
+                  <a:txBody>
+                    <a:bodyPr/>
+                    <a:lstStyle/>
+                    <a:p>
+                      <a:pPr>
+                        <a:lnSpc>
+                          <a:spcPct val="100000"/>
+                        </a:lnSpc>
+                        <a:spcAft>
+                          <a:spcPts val="0"/>
+                        </a:spcAft>
+                        <a:defRPr sz="1450" b="0">
+                          <a:solidFill>
+                            <a:srgbClr val="F4F7FC"/>
+                          </a:solidFill>
+                          <a:latin typeface="Noto Sans CJK SC"/>
+                        </a:defRPr>
+                      </a:pPr>
+                      <a:r>
+                        <a:t>鞍点邻域；路径端点去重</a:t>
+                      </a:r>
+                    </a:p>
+                  </a:txBody>
+                  <a:tcPr marL="109728" marR="73152" marT="27432" marB="18288" anchor="ctr">
+                    <a:solidFill>
+                      <a:srgbClr val="182A43"/>
                     </a:solidFill>
                   </a:tcPr>
                 </a:tc>
@@ -6564,7 +6748,7 @@
               </a:defRPr>
             </a:pPr>
             <a:r>
-              <a:t>图 / 表建议  配完美 Si、空位、非晶三个结构缩略图，以及一条 NEB 路径能量曲线示意。</a:t>
+              <a:t>图 / 表建议  位错滑移、熔化—淬火与空位诱导局域熔化的三条采样路线图；一步 AIMD 不算热采样。</a:t>
             </a:r>
           </a:p>
         </p:txBody>
@@ -6603,7 +6787,7 @@
               </a:defRPr>
             </a:pPr>
             <a:r>
-              <a:t>依据：数据集构建策略，第3页；激光组会10.7，第4页；数值为起始建议。</a:t>
+              <a:t>数据集构建策略，第3页；激光组会10.7，第4页；新增 Si 相变与缺陷生成策略。</a:t>
             </a:r>
           </a:p>
         </p:txBody>
@@ -6750,7 +6934,7 @@
               </a:defRPr>
             </a:pPr>
             <a:r>
-              <a:t>DFT 泛函选型｜统一主标签，少量高阶校验</a:t>
+              <a:t>DFT 泛函选型｜兼顾多相排序与缺陷能量</a:t>
             </a:r>
           </a:p>
         </p:txBody>
@@ -6828,7 +7012,7 @@
               </a:defRPr>
             </a:pPr>
             <a:r>
-              <a:t>• 拟以 PBE 为主标签基线，先检验 Si 结构与缺陷基准。</a:t>
+              <a:t>• 拟以 PBE 统一主标签；先校验相间自由能、缺陷与压力响应。</a:t>
             </a:r>
           </a:p>
           <a:p>
@@ -6844,7 +7028,7 @@
               </a:defRPr>
             </a:pPr>
             <a:r>
-              <a:t>• 不同泛函的标签不直接混训；原氧化物案例的耗时不套用于 Si。</a:t>
+              <a:t>• 其他泛函用于独立基准，不将不同泛函标签直接混训。</a:t>
             </a:r>
           </a:p>
         </p:txBody>
@@ -6886,7 +7070,7 @@
                         <a:spcAft>
                           <a:spcPts val="0"/>
                         </a:spcAft>
-                        <a:defRPr sz="1500" b="1">
+                        <a:defRPr sz="1450" b="1">
                           <a:solidFill>
                             <a:srgbClr val="F4F7FC"/>
                           </a:solidFill>
@@ -6916,7 +7100,7 @@
                         <a:spcAft>
                           <a:spcPts val="0"/>
                         </a:spcAft>
-                        <a:defRPr sz="1500" b="1">
+                        <a:defRPr sz="1450" b="1">
                           <a:solidFill>
                             <a:srgbClr val="F4F7FC"/>
                           </a:solidFill>
@@ -6946,7 +7130,7 @@
                         <a:spcAft>
                           <a:spcPts val="0"/>
                         </a:spcAft>
-                        <a:defRPr sz="1500" b="1">
+                        <a:defRPr sz="1450" b="1">
                           <a:solidFill>
                             <a:srgbClr val="F4F7FC"/>
                           </a:solidFill>
@@ -6976,7 +7160,7 @@
                         <a:spcAft>
                           <a:spcPts val="0"/>
                         </a:spcAft>
-                        <a:defRPr sz="1500" b="1">
+                        <a:defRPr sz="1450" b="1">
                           <a:solidFill>
                             <a:srgbClr val="F4F7FC"/>
                           </a:solidFill>
@@ -7008,7 +7192,7 @@
                         <a:spcAft>
                           <a:spcPts val="0"/>
                         </a:spcAft>
-                        <a:defRPr sz="1500" b="0">
+                        <a:defRPr sz="1450" b="0">
                           <a:solidFill>
                             <a:srgbClr val="F4F7FC"/>
                           </a:solidFill>
@@ -7038,15 +7222,15 @@
                         <a:spcAft>
                           <a:spcPts val="0"/>
                         </a:spcAft>
-                        <a:defRPr sz="1500" b="0">
-                          <a:solidFill>
-                            <a:srgbClr val="F4F7FC"/>
-                          </a:solidFill>
-                          <a:latin typeface="Noto Sans CJK SC"/>
-                        </a:defRPr>
-                      </a:pPr>
-                      <a:r>
-                        <a:t>成本较低；传统固体基准</a:t>
+                        <a:defRPr sz="1450" b="0">
+                          <a:solidFill>
+                            <a:srgbClr val="F4F7FC"/>
+                          </a:solidFill>
+                          <a:latin typeface="Noto Sans CJK SC"/>
+                        </a:defRPr>
+                      </a:pPr>
+                      <a:r>
+                        <a:t>传统固体基准；成本较低</a:t>
                       </a:r>
                     </a:p>
                   </a:txBody>
@@ -7068,7 +7252,7 @@
                         <a:spcAft>
                           <a:spcPts val="0"/>
                         </a:spcAft>
-                        <a:defRPr sz="1500" b="0">
+                        <a:defRPr sz="1450" b="0">
                           <a:solidFill>
                             <a:srgbClr val="F4F7FC"/>
                           </a:solidFill>
@@ -7098,15 +7282,15 @@
                         <a:spcAft>
                           <a:spcPts val="0"/>
                         </a:spcAft>
-                        <a:defRPr sz="1500" b="0">
-                          <a:solidFill>
-                            <a:srgbClr val="F4F7FC"/>
-                          </a:solidFill>
-                          <a:latin typeface="Noto Sans CJK SC"/>
-                        </a:defRPr>
-                      </a:pPr>
-                      <a:r>
-                        <a:t>可选对照</a:t>
+                        <a:defRPr sz="1450" b="0">
+                          <a:solidFill>
+                            <a:srgbClr val="F4F7FC"/>
+                          </a:solidFill>
+                          <a:latin typeface="Noto Sans CJK SC"/>
+                        </a:defRPr>
+                      </a:pPr>
+                      <a:r>
+                        <a:t>多相与体积对照</a:t>
                       </a:r>
                     </a:p>
                   </a:txBody>
@@ -7130,7 +7314,7 @@
                         <a:spcAft>
                           <a:spcPts val="0"/>
                         </a:spcAft>
-                        <a:defRPr sz="1500" b="0">
+                        <a:defRPr sz="1450" b="0">
                           <a:solidFill>
                             <a:srgbClr val="F4F7FC"/>
                           </a:solidFill>
@@ -7160,15 +7344,15 @@
                         <a:spcAft>
                           <a:spcPts val="0"/>
                         </a:spcAft>
-                        <a:defRPr sz="1500" b="0">
-                          <a:solidFill>
-                            <a:srgbClr val="F4F7FC"/>
-                          </a:solidFill>
-                          <a:latin typeface="Noto Sans CJK SC"/>
-                        </a:defRPr>
-                      </a:pPr>
-                      <a:r>
-                        <a:t>通用、便于规模化标注</a:t>
+                        <a:defRPr sz="1450" b="0">
+                          <a:solidFill>
+                            <a:srgbClr val="F4F7FC"/>
+                          </a:solidFill>
+                          <a:latin typeface="Noto Sans CJK SC"/>
+                        </a:defRPr>
+                      </a:pPr>
+                      <a:r>
+                        <a:t>通用；便于批量标注</a:t>
                       </a:r>
                     </a:p>
                   </a:txBody>
@@ -7190,15 +7374,15 @@
                         <a:spcAft>
                           <a:spcPts val="0"/>
                         </a:spcAft>
-                        <a:defRPr sz="1500" b="0">
-                          <a:solidFill>
-                            <a:srgbClr val="F4F7FC"/>
-                          </a:solidFill>
-                          <a:latin typeface="Noto Sans CJK SC"/>
-                        </a:defRPr>
-                      </a:pPr>
-                      <a:r>
-                        <a:t>带隙与缺陷能级偏差</a:t>
+                        <a:defRPr sz="1450" b="0">
+                          <a:solidFill>
+                            <a:srgbClr val="F4F7FC"/>
+                          </a:solidFill>
+                          <a:latin typeface="Noto Sans CJK SC"/>
+                        </a:defRPr>
+                      </a:pPr>
+                      <a:r>
+                        <a:t>相对能、缺陷能仍需校验</a:t>
                       </a:r>
                     </a:p>
                   </a:txBody>
@@ -7220,7 +7404,7 @@
                         <a:spcAft>
                           <a:spcPts val="0"/>
                         </a:spcAft>
-                        <a:defRPr sz="1500" b="0">
+                        <a:defRPr sz="1450" b="0">
                           <a:solidFill>
                             <a:srgbClr val="F4F7FC"/>
                           </a:solidFill>
@@ -7252,7 +7436,7 @@
                         <a:spcAft>
                           <a:spcPts val="0"/>
                         </a:spcAft>
-                        <a:defRPr sz="1500" b="0">
+                        <a:defRPr sz="1450" b="0">
                           <a:solidFill>
                             <a:srgbClr val="F4F7FC"/>
                           </a:solidFill>
@@ -7282,15 +7466,15 @@
                         <a:spcAft>
                           <a:spcPts val="0"/>
                         </a:spcAft>
-                        <a:defRPr sz="1500" b="0">
-                          <a:solidFill>
-                            <a:srgbClr val="F4F7FC"/>
-                          </a:solidFill>
-                          <a:latin typeface="Noto Sans CJK SC"/>
-                        </a:defRPr>
-                      </a:pPr>
-                      <a:r>
-                        <a:t>固体结构 / 应力基准</a:t>
+                        <a:defRPr sz="1450" b="0">
+                          <a:solidFill>
+                            <a:srgbClr val="F4F7FC"/>
+                          </a:solidFill>
+                          <a:latin typeface="Noto Sans CJK SC"/>
+                        </a:defRPr>
+                      </a:pPr>
+                      <a:r>
+                        <a:t>结构 / 应力基准</a:t>
                       </a:r>
                     </a:p>
                   </a:txBody>
@@ -7312,15 +7496,15 @@
                         <a:spcAft>
                           <a:spcPts val="0"/>
                         </a:spcAft>
-                        <a:defRPr sz="1500" b="0">
-                          <a:solidFill>
-                            <a:srgbClr val="F4F7FC"/>
-                          </a:solidFill>
-                          <a:latin typeface="Noto Sans CJK SC"/>
-                        </a:defRPr>
-                      </a:pPr>
-                      <a:r>
-                        <a:t>带隙问题仍存在</a:t>
+                        <a:defRPr sz="1450" b="0">
+                          <a:solidFill>
+                            <a:srgbClr val="F4F7FC"/>
+                          </a:solidFill>
+                          <a:latin typeface="Noto Sans CJK SC"/>
+                        </a:defRPr>
+                      </a:pPr>
+                      <a:r>
+                        <a:t>不保证相变和缺陷能更准</a:t>
                       </a:r>
                     </a:p>
                   </a:txBody>
@@ -7342,15 +7526,15 @@
                         <a:spcAft>
                           <a:spcPts val="0"/>
                         </a:spcAft>
-                        <a:defRPr sz="1500" b="0">
-                          <a:solidFill>
-                            <a:srgbClr val="F4F7FC"/>
-                          </a:solidFill>
-                          <a:latin typeface="Noto Sans CJK SC"/>
-                        </a:defRPr>
-                      </a:pPr>
-                      <a:r>
-                        <a:t>结构和弹性对照</a:t>
+                        <a:defRPr sz="1450" b="0">
+                          <a:solidFill>
+                            <a:srgbClr val="F4F7FC"/>
+                          </a:solidFill>
+                          <a:latin typeface="Noto Sans CJK SC"/>
+                        </a:defRPr>
+                      </a:pPr>
+                      <a:r>
+                        <a:t>状态方程与弹性对照</a:t>
                       </a:r>
                     </a:p>
                   </a:txBody>
@@ -7374,7 +7558,7 @@
                         <a:spcAft>
                           <a:spcPts val="0"/>
                         </a:spcAft>
-                        <a:defRPr sz="1500" b="0">
+                        <a:defRPr sz="1450" b="0">
                           <a:solidFill>
                             <a:srgbClr val="F4F7FC"/>
                           </a:solidFill>
@@ -7404,7 +7588,7 @@
                         <a:spcAft>
                           <a:spcPts val="0"/>
                         </a:spcAft>
-                        <a:defRPr sz="1500" b="0">
+                        <a:defRPr sz="1450" b="0">
                           <a:solidFill>
                             <a:srgbClr val="F4F7FC"/>
                           </a:solidFill>
@@ -7434,7 +7618,7 @@
                         <a:spcAft>
                           <a:spcPts val="0"/>
                         </a:spcAft>
-                        <a:defRPr sz="1500" b="0">
+                        <a:defRPr sz="1450" b="0">
                           <a:solidFill>
                             <a:srgbClr val="F4F7FC"/>
                           </a:solidFill>
@@ -7464,15 +7648,15 @@
                         <a:spcAft>
                           <a:spcPts val="0"/>
                         </a:spcAft>
-                        <a:defRPr sz="1500" b="0">
-                          <a:solidFill>
-                            <a:srgbClr val="F4F7FC"/>
-                          </a:solidFill>
-                          <a:latin typeface="Noto Sans CJK SC"/>
-                        </a:defRPr>
-                      </a:pPr>
-                      <a:r>
-                        <a:t>关键缺陷与相对能校验</a:t>
+                        <a:defRPr sz="1450" b="0">
+                          <a:solidFill>
+                            <a:srgbClr val="F4F7FC"/>
+                          </a:solidFill>
+                          <a:latin typeface="Noto Sans CJK SC"/>
+                        </a:defRPr>
+                      </a:pPr>
+                      <a:r>
+                        <a:t>相排序、缺陷形成能校验</a:t>
                       </a:r>
                     </a:p>
                   </a:txBody>
@@ -7496,7 +7680,7 @@
                         <a:spcAft>
                           <a:spcPts val="0"/>
                         </a:spcAft>
-                        <a:defRPr sz="1500" b="0">
+                        <a:defRPr sz="1450" b="0">
                           <a:solidFill>
                             <a:srgbClr val="F4F7FC"/>
                           </a:solidFill>
@@ -7526,7 +7710,7 @@
                         <a:spcAft>
                           <a:spcPts val="0"/>
                         </a:spcAft>
-                        <a:defRPr sz="1500" b="0">
+                        <a:defRPr sz="1450" b="0">
                           <a:solidFill>
                             <a:srgbClr val="F4F7FC"/>
                           </a:solidFill>
@@ -7556,15 +7740,15 @@
                         <a:spcAft>
                           <a:spcPts val="0"/>
                         </a:spcAft>
-                        <a:defRPr sz="1500" b="0">
-                          <a:solidFill>
-                            <a:srgbClr val="F4F7FC"/>
-                          </a:solidFill>
-                          <a:latin typeface="Noto Sans CJK SC"/>
-                        </a:defRPr>
-                      </a:pPr>
-                      <a:r>
-                        <a:t>成本高；仍需验证</a:t>
+                        <a:defRPr sz="1450" b="0">
+                          <a:solidFill>
+                            <a:srgbClr val="F4F7FC"/>
+                          </a:solidFill>
+                          <a:latin typeface="Noto Sans CJK SC"/>
+                        </a:defRPr>
+                      </a:pPr>
+                      <a:r>
+                        <a:t>昂贵；高激发应用需验证</a:t>
                       </a:r>
                     </a:p>
                   </a:txBody>
@@ -7586,7 +7770,7 @@
                         <a:spcAft>
                           <a:spcPts val="0"/>
                         </a:spcAft>
-                        <a:defRPr sz="1500" b="0">
+                        <a:defRPr sz="1450" b="0">
                           <a:solidFill>
                             <a:srgbClr val="F4F7FC"/>
                           </a:solidFill>
@@ -7686,7 +7870,7 @@
               </a:defRPr>
             </a:pPr>
             <a:r>
-              <a:t>图 / 表建议  使用四列表格，高亮 PBE 主标签与高阶泛函校验角色；不标固定耗时倍数。</a:t>
+              <a:t>图 / 表建议  泛函选型表 + 代表晶相相对能 / 体积曲线示意；不套用氧化物计算耗时。</a:t>
             </a:r>
           </a:p>
         </p:txBody>
@@ -7725,7 +7909,7 @@
               </a:defRPr>
             </a:pPr>
             <a:r>
-              <a:t>依据：数据集构建策略，第4页；按 Si 任务重新选型，正式方案需经基准测试。</a:t>
+              <a:t>数据集构建策略，第4页；Si 多相与缺陷的具体准确性须经基准测试。</a:t>
             </a:r>
           </a:p>
         </p:txBody>
@@ -7872,7 +8056,7 @@
               </a:defRPr>
             </a:pPr>
             <a:r>
-              <a:t>DFT 参数与标注验收｜先收敛，再批量计算</a:t>
+              <a:t>DFT 参数与验收｜多相和缺陷均需独立验证</a:t>
             </a:r>
           </a:p>
         </p:txBody>
@@ -7950,7 +8134,7 @@
               </a:defRPr>
             </a:pPr>
             <a:r>
-              <a:t>• Fermi–Dirac 占据对应物理 Tₑ；训练 A = E − TₑSₑ，而非零温势能。</a:t>
+              <a:t>• Mermin-DFT 标注 A = E − TₑSₑ、原子力与应力；使用物理 Fermi–Dirac 占据。</a:t>
             </a:r>
           </a:p>
           <a:p>
@@ -7966,7 +8150,7 @@
               </a:defRPr>
             </a:pPr>
             <a:r>
-              <a:t>• 分组划分训练 / 测试集；同一母结构多 Tₑ、同轨迹或同路径不跨组。</a:t>
+              <a:t>• 固定 Tₑ 比较 A(V) 与 A+PV 的条件排序；有限 Tᵢ 相稳定性还需离子自由能。</a:t>
             </a:r>
           </a:p>
         </p:txBody>
@@ -8007,15 +8191,15 @@
                         <a:spcAft>
                           <a:spcPts val="0"/>
                         </a:spcAft>
-                        <a:defRPr sz="1500" b="1">
-                          <a:solidFill>
-                            <a:srgbClr val="F4F7FC"/>
-                          </a:solidFill>
-                          <a:latin typeface="Noto Sans CJK SC"/>
-                        </a:defRPr>
-                      </a:pPr>
-                      <a:r>
-                        <a:t>参数 / 环节</a:t>
+                        <a:defRPr sz="1450" b="1">
+                          <a:solidFill>
+                            <a:srgbClr val="F4F7FC"/>
+                          </a:solidFill>
+                          <a:latin typeface="Noto Sans CJK SC"/>
+                        </a:defRPr>
+                      </a:pPr>
+                      <a:r>
+                        <a:t>参数 / 验收对象</a:t>
                       </a:r>
                     </a:p>
                   </a:txBody>
@@ -8037,15 +8221,15 @@
                         <a:spcAft>
                           <a:spcPts val="0"/>
                         </a:spcAft>
-                        <a:defRPr sz="1500" b="1">
-                          <a:solidFill>
-                            <a:srgbClr val="F4F7FC"/>
-                          </a:solidFill>
-                          <a:latin typeface="Noto Sans CJK SC"/>
-                        </a:defRPr>
-                      </a:pPr>
-                      <a:r>
-                        <a:t>起始设置或检查</a:t>
+                        <a:defRPr sz="1450" b="1">
+                          <a:solidFill>
+                            <a:srgbClr val="F4F7FC"/>
+                          </a:solidFill>
+                          <a:latin typeface="Noto Sans CJK SC"/>
+                        </a:defRPr>
+                      </a:pPr>
+                      <a:r>
+                        <a:t>起始设置或计算</a:t>
                       </a:r>
                     </a:p>
                   </a:txBody>
@@ -8067,7 +8251,7 @@
                         <a:spcAft>
                           <a:spcPts val="0"/>
                         </a:spcAft>
-                        <a:defRPr sz="1500" b="1">
+                        <a:defRPr sz="1450" b="1">
                           <a:solidFill>
                             <a:srgbClr val="F4F7FC"/>
                           </a:solidFill>
@@ -8099,15 +8283,15 @@
                         <a:spcAft>
                           <a:spcPts val="0"/>
                         </a:spcAft>
-                        <a:defRPr sz="1500" b="0">
-                          <a:solidFill>
-                            <a:srgbClr val="F4F7FC"/>
-                          </a:solidFill>
-                          <a:latin typeface="Noto Sans CJK SC"/>
-                        </a:defRPr>
-                      </a:pPr>
-                      <a:r>
-                        <a:t>超胞与边界</a:t>
+                        <a:defRPr sz="1450" b="0">
+                          <a:solidFill>
+                            <a:srgbClr val="F4F7FC"/>
+                          </a:solidFill>
+                          <a:latin typeface="Noto Sans CJK SC"/>
+                        </a:defRPr>
+                      </a:pPr>
+                      <a:r>
+                        <a:t>超胞 / 边界</a:t>
                       </a:r>
                     </a:p>
                   </a:txBody>
@@ -8129,15 +8313,15 @@
                         <a:spcAft>
                           <a:spcPts val="0"/>
                         </a:spcAft>
-                        <a:defRPr sz="1500" b="0">
-                          <a:solidFill>
-                            <a:srgbClr val="F4F7FC"/>
-                          </a:solidFill>
-                          <a:latin typeface="Noto Sans CJK SC"/>
-                        </a:defRPr>
-                      </a:pPr>
-                      <a:r>
-                        <a:t>体相 64/216 原子起测；表面用 slab</a:t>
+                        <a:defRPr sz="1450" b="0">
+                          <a:solidFill>
+                            <a:srgbClr val="F4F7FC"/>
+                          </a:solidFill>
+                          <a:latin typeface="Noto Sans CJK SC"/>
+                        </a:defRPr>
+                      </a:pPr>
+                      <a:r>
+                        <a:t>体相 64/216 原子起测；位错用兼容超胞</a:t>
                       </a:r>
                     </a:p>
                   </a:txBody>
@@ -8159,15 +8343,15 @@
                         <a:spcAft>
                           <a:spcPts val="0"/>
                         </a:spcAft>
-                        <a:defRPr sz="1500" b="0">
-                          <a:solidFill>
-                            <a:srgbClr val="F4F7FC"/>
-                          </a:solidFill>
-                          <a:latin typeface="Noto Sans CJK SC"/>
-                        </a:defRPr>
-                      </a:pPr>
-                      <a:r>
-                        <a:t>缺陷尺寸效应、真空与镜像收敛</a:t>
+                        <a:defRPr sz="1450" b="0">
+                          <a:solidFill>
+                            <a:srgbClr val="F4F7FC"/>
+                          </a:solidFill>
+                          <a:latin typeface="Noto Sans CJK SC"/>
+                        </a:defRPr>
+                      </a:pPr>
+                      <a:r>
+                        <a:t>尺寸、真空、位错镜像收敛</a:t>
                       </a:r>
                     </a:p>
                   </a:txBody>
@@ -8191,15 +8375,15 @@
                         <a:spcAft>
                           <a:spcPts val="0"/>
                         </a:spcAft>
-                        <a:defRPr sz="1500" b="0">
-                          <a:solidFill>
-                            <a:srgbClr val="F4F7FC"/>
-                          </a:solidFill>
-                          <a:latin typeface="Noto Sans CJK SC"/>
-                        </a:defRPr>
-                      </a:pPr>
-                      <a:r>
-                        <a:t>截断能与 k 点</a:t>
+                        <a:defRPr sz="1450" b="0">
+                          <a:solidFill>
+                            <a:srgbClr val="F4F7FC"/>
+                          </a:solidFill>
+                          <a:latin typeface="Noto Sans CJK SC"/>
+                        </a:defRPr>
+                      </a:pPr>
+                      <a:r>
+                        <a:t>截断能 / k 点 / 空带</a:t>
                       </a:r>
                     </a:p>
                   </a:txBody>
@@ -8221,15 +8405,15 @@
                         <a:spcAft>
                           <a:spcPts val="0"/>
                         </a:spcAft>
-                        <a:defRPr sz="1500" b="0">
-                          <a:solidFill>
-                            <a:srgbClr val="F4F7FC"/>
-                          </a:solidFill>
-                          <a:latin typeface="Noto Sans CJK SC"/>
-                        </a:defRPr>
-                      </a:pPr>
-                      <a:r>
-                        <a:t>赝势推荐截断能的 1.0–1.5 倍；加密 k 点</a:t>
+                        <a:defRPr sz="1450" b="0">
+                          <a:solidFill>
+                            <a:srgbClr val="F4F7FC"/>
+                          </a:solidFill>
+                          <a:latin typeface="Noto Sans CJK SC"/>
+                        </a:defRPr>
+                      </a:pPr>
+                      <a:r>
+                        <a:t>逐项收敛；高压金属相加密 k 点</a:t>
                       </a:r>
                     </a:p>
                   </a:txBody>
@@ -8251,15 +8435,15 @@
                         <a:spcAft>
                           <a:spcPts val="0"/>
                         </a:spcAft>
-                        <a:defRPr sz="1500" b="0">
-                          <a:solidFill>
-                            <a:srgbClr val="F4F7FC"/>
-                          </a:solidFill>
-                          <a:latin typeface="Noto Sans CJK SC"/>
-                        </a:defRPr>
-                      </a:pPr>
-                      <a:r>
-                        <a:t>A、力、应力共同收敛；Γ 点须验证</a:t>
+                        <a:defRPr sz="1450" b="0">
+                          <a:solidFill>
+                            <a:srgbClr val="F4F7FC"/>
+                          </a:solidFill>
+                          <a:latin typeface="Noto Sans CJK SC"/>
+                        </a:defRPr>
+                      </a:pPr>
+                      <a:r>
+                        <a:t>高 Tₑ 检查 NBANDS 与尾占据</a:t>
                       </a:r>
                     </a:p>
                   </a:txBody>
@@ -8283,15 +8467,15 @@
                         <a:spcAft>
                           <a:spcPts val="0"/>
                         </a:spcAft>
-                        <a:defRPr sz="1500" b="0">
-                          <a:solidFill>
-                            <a:srgbClr val="F4F7FC"/>
-                          </a:solidFill>
-                          <a:latin typeface="Noto Sans CJK SC"/>
-                        </a:defRPr>
-                      </a:pPr>
-                      <a:r>
-                        <a:t>高 Tₑ 空带 / SCF</a:t>
+                        <a:defRPr sz="1450" b="0">
+                          <a:solidFill>
+                            <a:srgbClr val="F4F7FC"/>
+                          </a:solidFill>
+                          <a:latin typeface="Noto Sans CJK SC"/>
+                        </a:defRPr>
+                      </a:pPr>
+                      <a:r>
+                        <a:t>晶相物理</a:t>
                       </a:r>
                     </a:p>
                   </a:txBody>
@@ -8313,15 +8497,15 @@
                         <a:spcAft>
                           <a:spcPts val="0"/>
                         </a:spcAft>
-                        <a:defRPr sz="1500" b="0">
-                          <a:solidFill>
-                            <a:srgbClr val="F4F7FC"/>
-                          </a:solidFill>
-                          <a:latin typeface="Noto Sans CJK SC"/>
-                        </a:defRPr>
-                      </a:pPr>
-                      <a:r>
-                        <a:t>增加 NBANDS；检查尾占据与自洽</a:t>
+                        <a:defRPr sz="1450" b="0">
+                          <a:solidFill>
+                            <a:srgbClr val="F4F7FC"/>
+                          </a:solidFill>
+                          <a:latin typeface="Noto Sans CJK SC"/>
+                        </a:defRPr>
+                      </a:pPr>
+                      <a:r>
+                        <a:t>A(V)、压力响应；弛豫与稳定性检查</a:t>
                       </a:r>
                     </a:p>
                   </a:txBody>
@@ -8343,15 +8527,15 @@
                         <a:spcAft>
                           <a:spcPts val="0"/>
                         </a:spcAft>
-                        <a:defRPr sz="1500" b="0">
-                          <a:solidFill>
-                            <a:srgbClr val="F4F7FC"/>
-                          </a:solidFill>
-                          <a:latin typeface="Noto Sans CJK SC"/>
-                        </a:defRPr>
-                      </a:pPr>
-                      <a:r>
-                        <a:t>标签稳定；失败计算诊断后重算</a:t>
+                        <a:defRPr sz="1450" b="0">
+                          <a:solidFill>
+                            <a:srgbClr val="F4F7FC"/>
+                          </a:solidFill>
+                          <a:latin typeface="Noto Sans CJK SC"/>
+                        </a:defRPr>
+                      </a:pPr>
+                      <a:r>
+                        <a:t>不以单次优化证明热力学稳定</a:t>
                       </a:r>
                     </a:p>
                   </a:txBody>
@@ -8375,15 +8559,15 @@
                         <a:spcAft>
                           <a:spcPts val="0"/>
                         </a:spcAft>
-                        <a:defRPr sz="1500" b="0">
-                          <a:solidFill>
-                            <a:srgbClr val="F4F7FC"/>
-                          </a:solidFill>
-                          <a:latin typeface="Noto Sans CJK SC"/>
-                        </a:defRPr>
-                      </a:pPr>
-                      <a:r>
-                        <a:t>数值误差参考目标</a:t>
+                        <a:defRPr sz="1450" b="0">
+                          <a:solidFill>
+                            <a:srgbClr val="F4F7FC"/>
+                          </a:solidFill>
+                          <a:latin typeface="Noto Sans CJK SC"/>
+                        </a:defRPr>
+                      </a:pPr>
+                      <a:r>
+                        <a:t>缺陷与无序物理</a:t>
                       </a:r>
                     </a:p>
                   </a:txBody>
@@ -8405,15 +8589,15 @@
                         <a:spcAft>
                           <a:spcPts val="0"/>
                         </a:spcAft>
-                        <a:defRPr sz="1500" b="0">
-                          <a:solidFill>
-                            <a:srgbClr val="F4F7FC"/>
-                          </a:solidFill>
-                          <a:latin typeface="Noto Sans CJK SC"/>
-                        </a:defRPr>
-                      </a:pPr>
-                      <a:r>
-                        <a:t>约 1 meV/atom、0.01 eV/Å；应力另验</a:t>
+                        <a:defRPr sz="1450" b="0">
+                          <a:solidFill>
+                            <a:srgbClr val="F4F7FC"/>
+                          </a:solidFill>
+                          <a:latin typeface="Noto Sans CJK SC"/>
+                        </a:defRPr>
+                      </a:pPr>
+                      <a:r>
+                        <a:t>形成自由能、势垒、滑移；RDF 与配位</a:t>
                       </a:r>
                     </a:p>
                   </a:txBody>
@@ -8435,15 +8619,15 @@
                         <a:spcAft>
                           <a:spcPts val="0"/>
                         </a:spcAft>
-                        <a:defRPr sz="1500" b="0">
-                          <a:solidFill>
-                            <a:srgbClr val="F4F7FC"/>
-                          </a:solidFill>
-                          <a:latin typeface="Noto Sans CJK SC"/>
-                        </a:defRPr>
-                      </a:pPr>
-                      <a:r>
-                        <a:t>低于模型误差预算；非最终生产参数</a:t>
+                        <a:defRPr sz="1450" b="0">
+                          <a:solidFill>
+                            <a:srgbClr val="F4F7FC"/>
+                          </a:solidFill>
+                          <a:latin typeface="Noto Sans CJK SC"/>
+                        </a:defRPr>
+                      </a:pPr>
+                      <a:r>
+                        <a:t>缺陷化学势一致；液态不套晶格空位判据</a:t>
                       </a:r>
                     </a:p>
                   </a:txBody>
@@ -8467,15 +8651,15 @@
                         <a:spcAft>
                           <a:spcPts val="0"/>
                         </a:spcAft>
-                        <a:defRPr sz="1500" b="0">
-                          <a:solidFill>
-                            <a:srgbClr val="F4F7FC"/>
-                          </a:solidFill>
-                          <a:latin typeface="Noto Sans CJK SC"/>
-                        </a:defRPr>
-                      </a:pPr>
-                      <a:r>
-                        <a:t>标签与数据质控</a:t>
+                        <a:defRPr sz="1450" b="0">
+                          <a:solidFill>
+                            <a:srgbClr val="F4F7FC"/>
+                          </a:solidFill>
+                          <a:latin typeface="Noto Sans CJK SC"/>
+                        </a:defRPr>
+                      </a:pPr>
+                      <a:r>
+                        <a:t>质控与划分</a:t>
                       </a:r>
                     </a:p>
                   </a:txBody>
@@ -8497,15 +8681,15 @@
                         <a:spcAft>
                           <a:spcPts val="0"/>
                         </a:spcAft>
-                        <a:defRPr sz="1500" b="0">
-                          <a:solidFill>
-                            <a:srgbClr val="F4F7FC"/>
-                          </a:solidFill>
-                          <a:latin typeface="Noto Sans CJK SC"/>
-                        </a:defRPr>
-                      </a:pPr>
-                      <a:r>
-                        <a:t>统一单位、泛函、赝势及应力符号</a:t>
+                        <a:defRPr sz="1450" b="0">
+                          <a:solidFill>
+                            <a:srgbClr val="F4F7FC"/>
+                          </a:solidFill>
+                          <a:latin typeface="Noto Sans CJK SC"/>
+                        </a:defRPr>
+                      </a:pPr>
+                      <a:r>
+                        <a:t>统一单位 / 赝势；按母结构与轨迹分组</a:t>
                       </a:r>
                     </a:p>
                   </a:txBody>
@@ -8527,15 +8711,15 @@
                         <a:spcAft>
                           <a:spcPts val="0"/>
                         </a:spcAft>
-                        <a:defRPr sz="1500" b="0">
-                          <a:solidFill>
-                            <a:srgbClr val="F4F7FC"/>
-                          </a:solidFill>
-                          <a:latin typeface="Noto Sans CJK SC"/>
-                        </a:defRPr>
-                      </a:pPr>
-                      <a:r>
-                        <a:t>保留来源 / 参数；去重后核对数量</a:t>
+                        <a:defRPr sz="1450" b="0">
+                          <a:solidFill>
+                            <a:srgbClr val="F4F7FC"/>
+                          </a:solidFill>
+                          <a:latin typeface="Noto Sans CJK SC"/>
+                        </a:defRPr>
+                      </a:pPr>
+                      <a:r>
+                        <a:t>同 R 多 Tₑ / 同路径不跨组；失败点重算</a:t>
                       </a:r>
                     </a:p>
                   </a:txBody>
@@ -8627,7 +8811,7 @@
               </a:defRPr>
             </a:pPr>
             <a:r>
-              <a:t>图 / 表建议  配“生成 → 去重 → DFT → 质控 → 分组 → 初训”流程；缺陷能比较统一原子化学势。</a:t>
+              <a:t>图 / 表建议  验收矩阵：晶相排序、缺陷 / 位错、非晶 / 熔体；势垒与晶相可达性作为主动学习补点依据。</a:t>
             </a:r>
           </a:p>
         </p:txBody>
@@ -8666,7 +8850,7 @@
               </a:defRPr>
             </a:pPr>
             <a:r>
-              <a:t>依据：激光组会10.7，第3–4页；参数、数量及验收阈值均为待试算确认的建议。</a:t>
+              <a:t>激光组会10.7，第3–4页；参数与数量均待试算确认；模型适用范围须明确。</a:t>
             </a:r>
           </a:p>
         </p:txBody>

--- a/deliverables/Si_Te_Initial_Dataset_5slides.pptx
+++ b/deliverables/Si_Te_Initial_Dataset_5slides.pptx
@@ -513,7 +513,7 @@
           <a:lstStyle/>
           <a:p>
             <a:r>
-              <a:t>依据《数据集构建策略》第1页任务矩阵和《激光组会10.7》第3–4页。压缩为代表性初始种子集，不宣称120个几何构型即可获得通用可靠势。各高压相和卸压亚稳相依据条件选择，不视为常压稳定。</a:t>
+              <a:t>沿用用户《数据集构建策略》第1页。所有数值为首轮执行起点，需基准确认；不是已经验证的最优参数。不扩大首轮构型类别，保留用户要求的晶相、位错、非晶、液态与空位诱导熔化。</a:t>
             </a:r>
           </a:p>
         </p:txBody>
@@ -599,7 +599,7 @@
           <a:lstStyle/>
           <a:p>
             <a:r>
-              <a:t>本页保持原模板《数据产生》的三列表格。若结构沿不同Te动力学变化，应另标记为不同几何结构；固定R多Te支路则绝不在扫温之间改变R。结构生成与DFT标注使用一致的单位、赝势和泛函。</a:t>
+              <a:t>精确几何、原型来源、构建方向、随机种子、轨迹程序和入库规则详见随附执行清单。晶相建议母结构压力起点：dc/BC8/R8为0 GPa、β-Sn为12 GPa、sh为20 GPa；高压相不能先在0 GPa任意弛豫。相及结构仍需可靠CIF确认。</a:t>
             </a:r>
           </a:p>
         </p:txBody>
@@ -685,7 +685,7 @@
           <a:lstStyle/>
           <a:p>
             <a:r>
-              <a:t>PBE是待基准确认的方案选择，而非已证明最优。不同泛函用于独立误差诊断。高Te空带、自洽、截断能与k点须分别收敛，不能以相同泛函代替数值一致性检查。</a:t>
+              <a:t>SW为公开常用Si Stillinger–Weber候选生成势，不作标签。熔化判据用RDF、配位、扩散；若所选轨迹没有熔化，不强行命名为熔体。界面在1700K取样时5帧间隔至少2ps；含空位升温各目标温度先保持2ps。NPT温度耦合100fs、压力耦合1000fs可作为起点。NEB生成在300K，选定R后才进行六Te单点，不重新计算每个Te的完整NEB。</a:t>
             </a:r>
           </a:p>
         </p:txBody>
@@ -771,7 +771,7 @@
           <a:lstStyle/>
           <a:p>
             <a:r>
-              <a:t>晶相参考20个候选：dc 8、β-Sn 4、sh 4、BC8 2、R8 2。点缺陷20个：空位10、间隙5、Frenkel对5。扩展缺陷10个：代表位错6、层错/孪晶4。表面5个含低指数表面和近表面低配位环境。每类配额偏小，首轮只用于起步；按模型偏差和物理基准扩充。液态和非晶同样使用6个电子温度标签；Ti记录在结构元数据中。kBT值四舍五入显示，实际设置用精确常数。720为120个去重几何结构在6个Te上的标注预算，非已计算数量。</a:t>
+              <a:t>Tₑ网格使用精确 kB=8.617333262×10^-5 eV/K换算，表中仅显示三位小数；Tᵢ是几何采样的热浴温度，不由Tₑ替代。首轮按结构、轨迹和路径家族分组；不得随机打散相邻轨迹帧及同R不同Te。</a:t>
             </a:r>
           </a:p>
         </p:txBody>
@@ -841,7 +841,7 @@
           <a:lstStyle/>
           <a:p>
             <a:r>
-              <a:t>单一Te假设电子子系统可用热化占据描述；载流子数独立变化或明显非热分布时需重新检验适用性。对于固定R锚点扫温不重新弛豫；其他动态采样中的结构变化作为另一几何候选。插值验证结构应按母构型分组，保持独立性，且清楚报告结构泛化与温度插值两种任务。若以Te导数估计电子熵/热容，必须另验证导数；本初始训练不自动证明其精度。</a:t>
+              <a:t>参数仅以VASP为例，使用同一套PAW-PBE Si赝势；PREC=Accurate、LREAL=.FALSE.、ISYM=0可作为初始设置。Nocc指占满价带所需能带数，依据电子数和自旋设置确定，不打印或依赖凭空指定NBANDS。最高带占据需覆盖所有k点/自旋；必要时尾部多带检查及A/F/应力二次收敛。母结构弛豫和NEB参数另设，不要复用NSW=0。最终静态标签冻结几何，不附加SW能量，不使用E0替代有限Te自由能。</a:t>
             </a:r>
           </a:p>
         </p:txBody>
@@ -4312,8 +4312,8 @@
           <p:nvPr/>
         </p:nvGraphicFramePr>
         <p:xfrm>
-          <a:off x="164592" y="1188720"/>
-          <a:ext cx="11868910" cy="4343400"/>
+          <a:off x="164592" y="1143000"/>
+          <a:ext cx="11868910" cy="4389120"/>
         </p:xfrm>
         <a:graphic>
           <a:graphicData uri="http://schemas.openxmlformats.org/drawingml/2006/table">
@@ -4322,12 +4322,12 @@
                 <a:tableStyleId>{5C22544A-7EE6-4342-B048-85BDC9FD1C3A}</a:tableStyleId>
               </a:tblPr>
               <a:tblGrid>
-                <a:gridCol w="2255093"/>
-                <a:gridCol w="2848538"/>
-                <a:gridCol w="3679362"/>
-                <a:gridCol w="3085917"/>
+                <a:gridCol w="2136404"/>
+                <a:gridCol w="2729849"/>
+                <a:gridCol w="3798051"/>
+                <a:gridCol w="3204606"/>
               </a:tblGrid>
-              <a:tr h="868680">
+              <a:tr h="877824">
                 <a:tc>
                   <a:txBody>
                     <a:bodyPr/>
@@ -4529,7 +4529,7 @@
                   </a:tcPr>
                 </a:tc>
               </a:tr>
-              <a:tr h="868680">
+              <a:tr h="877824">
                 <a:tc>
                   <a:txBody>
                     <a:bodyPr/>
@@ -4550,7 +4550,7 @@
                         </a:defRPr>
                       </a:pPr>
                       <a:r>
-                        <a:t>覆盖代表晶相</a:t>
+                        <a:t>晶相与受载响应</a:t>
                       </a:r>
                     </a:p>
                   </a:txBody>
@@ -4600,7 +4600,7 @@
                         </a:defRPr>
                       </a:pPr>
                       <a:r>
-                        <a:t>只用常温金刚石，缺少压缩 / 卸压环境</a:t>
+                        <a:t>只有常压金刚石，缺压缩 / 卸压环境</a:t>
                       </a:r>
                     </a:p>
                   </a:txBody>
@@ -4650,7 +4650,7 @@
                         </a:defRPr>
                       </a:pPr>
                       <a:r>
-                        <a:t>dc、β-Sn、sh、BC8、R8；各相稳定条件分别核实</a:t>
+                        <a:t>dc、β-Sn、sh、BC8、R8；体积扰动与剪切</a:t>
                       </a:r>
                     </a:p>
                   </a:txBody>
@@ -4700,7 +4700,7 @@
                         </a:defRPr>
                       </a:pPr>
                       <a:r>
-                        <a:t>A(V)、压力与相对能；非平衡相变路径</a:t>
+                        <a:t>A(V)、压力、相对能与局域受力</a:t>
                       </a:r>
                     </a:p>
                   </a:txBody>
@@ -4731,7 +4731,7 @@
                   </a:tcPr>
                 </a:tc>
               </a:tr>
-              <a:tr h="868680">
+              <a:tr h="877824">
                 <a:tc>
                   <a:txBody>
                     <a:bodyPr/>
@@ -4752,7 +4752,7 @@
                         </a:defRPr>
                       </a:pPr>
                       <a:r>
-                        <a:t>覆盖关键缺陷</a:t>
+                        <a:t>缺陷与低配位环境</a:t>
                       </a:r>
                     </a:p>
                   </a:txBody>
@@ -4802,7 +4802,7 @@
                         </a:defRPr>
                       </a:pPr>
                       <a:r>
-                        <a:t>缺少低配位和非平衡局域环境</a:t>
+                        <a:t>缺迁移前驱、位错核与表面构型</a:t>
                       </a:r>
                     </a:p>
                   </a:txBody>
@@ -4852,7 +4852,7 @@
                         </a:defRPr>
                       </a:pPr>
                       <a:r>
-                        <a:t>空位、间隙、Frenkel 对；代表位错、层错 / 孪晶、表面</a:t>
+                        <a:t>单 / 双空位、分裂间隙、Frenkel对；位错、面缺陷、表面</a:t>
                       </a:r>
                     </a:p>
                   </a:txBody>
@@ -4902,7 +4902,7 @@
                         </a:defRPr>
                       </a:pPr>
                       <a:r>
-                        <a:t>形成自由能、迁移势垒、缺陷核与局域受力</a:t>
+                        <a:t>形成自由能、迁移势垒、核结构及表面响应</a:t>
                       </a:r>
                     </a:p>
                   </a:txBody>
@@ -4933,7 +4933,7 @@
                   </a:tcPr>
                 </a:tc>
               </a:tr>
-              <a:tr h="868680">
+              <a:tr h="877824">
                 <a:tc>
                   <a:txBody>
                     <a:bodyPr/>
@@ -4954,7 +4954,7 @@
                         </a:defRPr>
                       </a:pPr>
                       <a:r>
-                        <a:t>覆盖熔化与无序</a:t>
+                        <a:t>熔化与无序化</a:t>
                       </a:r>
                     </a:p>
                   </a:txBody>
@@ -5004,7 +5004,7 @@
                         </a:defRPr>
                       </a:pPr>
                       <a:r>
-                        <a:t>缺少激光加热后的结构状态</a:t>
+                        <a:t>缺非平衡无序及界面构型</a:t>
                       </a:r>
                     </a:p>
                   </a:txBody>
@@ -5054,7 +5054,7 @@
                         </a:defRPr>
                       </a:pPr>
                       <a:r>
-                        <a:t>非晶、液态、固液界面、空位诱导局域熔化</a:t>
+                        <a:t>两速率非晶、两温度液态、固液界面、空位诱导局部熔化</a:t>
                       </a:r>
                     </a:p>
                   </a:txBody>
@@ -5104,7 +5104,7 @@
                         </a:defRPr>
                       </a:pPr>
                       <a:r>
-                        <a:t>RDF、配位、缺陷及熔化邻域动力学</a:t>
+                        <a:t>RDF、配位、结构及热动力学稳定性</a:t>
                       </a:r>
                     </a:p>
                   </a:txBody>
@@ -5135,7 +5135,7 @@
                   </a:tcPr>
                 </a:tc>
               </a:tr>
-              <a:tr h="868680">
+              <a:tr h="877824">
                 <a:tc>
                   <a:txBody>
                     <a:bodyPr/>
@@ -5156,7 +5156,7 @@
                         </a:defRPr>
                       </a:pPr>
                       <a:r>
-                        <a:t>显式学习 Tₑ 依赖</a:t>
+                        <a:t>学习 Tₑ 依赖</a:t>
                       </a:r>
                     </a:p>
                   </a:txBody>
@@ -5206,7 +5206,7 @@
                         </a:defRPr>
                       </a:pPr>
                       <a:r>
-                        <a:t>单一 Tₑ 无法学习电子激发自由能面</a:t>
+                        <a:t>不能用单温标签表示电子激发</a:t>
                       </a:r>
                     </a:p>
                   </a:txBody>
@@ -5256,7 +5256,7 @@
                         </a:defRPr>
                       </a:pPr>
                       <a:r>
-                        <a:t>同一几何 R 在 6 个 Tₑ 分别计算 A、原子力和应力</a:t>
+                        <a:t>固定120个几何 R，各标注6个 Tₑ；共720组</a:t>
                       </a:r>
                     </a:p>
                   </a:txBody>
@@ -5306,7 +5306,7 @@
                         </a:defRPr>
                       </a:pPr>
                       <a:r>
-                        <a:t>固定 R 的 A(Tₑ)、力 / 应力；Tₑ 插值与敏感性</a:t>
+                        <a:t>A(Tₑ)、力、应力；未见结构 / 温度插值</a:t>
                       </a:r>
                     </a:p>
                   </a:txBody>
@@ -5349,8 +5349,8 @@
         </p:nvSpPr>
         <p:spPr>
           <a:xfrm>
-            <a:off x="256032" y="5760720"/>
-            <a:ext cx="11612880" cy="411480"/>
+            <a:off x="256032" y="5779008"/>
+            <a:ext cx="11612880" cy="384048"/>
           </a:xfrm>
           <a:prstGeom prst="rect">
             <a:avLst/>
@@ -5370,7 +5370,7 @@
               <a:spcAft>
                 <a:spcPts val="0"/>
               </a:spcAft>
-              <a:defRPr sz="1700" b="0">
+              <a:defRPr sz="1600" b="0">
                 <a:solidFill>
                   <a:srgbClr val="002060"/>
                 </a:solidFill>
@@ -5378,7 +5378,7 @@
               </a:defRPr>
             </a:pPr>
             <a:r>
-              <a:t>首轮采用 120 个几何构型 × 6 个 Tₑ = 720 组标签；这是初始种子集，后续按模型偏差补点。</a:t>
+              <a:t>执行顺序：参数基准 → 生成并去重120个R → 固定R扫6个Tₑ → 质控导出 → 分组训练 / 补点。</a:t>
             </a:r>
           </a:p>
         </p:txBody>
@@ -5420,7 +5420,7 @@
               </a:defRPr>
             </a:pPr>
             <a:r>
-              <a:t>图表：沿用原模板任务矩阵。Tₑ 通过电子占据进入 Mermin-DFT；晶格温度 Tᵢ 用于原子构型采样，两者独立。</a:t>
+              <a:t>图表：原模板任务矩阵。120为初始种子集目标；720仅指最终单点标签，不含母结构弛豫、NEB与额外收敛测试。</a:t>
             </a:r>
           </a:p>
         </p:txBody>
@@ -5493,7 +5493,7 @@
               </a:defRPr>
             </a:pPr>
             <a:r>
-              <a:t>构型数量统计｜120 个几何结构 × 6 个 Tₑ</a:t>
+              <a:t>构型数量统计｜每一项均对应具体生成步骤</a:t>
             </a:r>
           </a:p>
         </p:txBody>
@@ -5549,8 +5549,8 @@
         </p:nvSpPr>
         <p:spPr>
           <a:xfrm>
-            <a:off x="201168" y="1042415"/>
-            <a:ext cx="6400800" cy="320040"/>
+            <a:off x="201168" y="1024128"/>
+            <a:ext cx="7132320" cy="320040"/>
           </a:xfrm>
           <a:prstGeom prst="rect">
             <a:avLst/>
@@ -5578,7 +5578,7 @@
               </a:defRPr>
             </a:pPr>
             <a:r>
-              <a:t>结构分类与标注数量</a:t>
+              <a:t>几何构型预算与生成算式</a:t>
             </a:r>
           </a:p>
         </p:txBody>
@@ -5591,8 +5591,8 @@
         </p:nvSpPr>
         <p:spPr>
           <a:xfrm>
-            <a:off x="6858000" y="1042415"/>
-            <a:ext cx="5120640" cy="320040"/>
+            <a:off x="7571231" y="1024128"/>
+            <a:ext cx="4389120" cy="320040"/>
           </a:xfrm>
           <a:prstGeom prst="rect">
             <a:avLst/>
@@ -5620,7 +5620,7 @@
               </a:defRPr>
             </a:pPr>
             <a:r>
-              <a:t>明确列出 Tₑ 网格与电子展宽</a:t>
+              <a:t>6 个 Tₑ 与 Fermi–Dirac 展宽</a:t>
             </a:r>
           </a:p>
         </p:txBody>
@@ -5634,8 +5634,8 @@
           <p:nvPr/>
         </p:nvGraphicFramePr>
         <p:xfrm>
-          <a:off x="201168" y="1463040"/>
-          <a:ext cx="6400800" cy="4617720"/>
+          <a:off x="201168" y="1435608"/>
+          <a:ext cx="7150607" cy="4645152"/>
         </p:xfrm>
         <a:graphic>
           <a:graphicData uri="http://schemas.openxmlformats.org/drawingml/2006/table">
@@ -5644,12 +5644,12 @@
                 <a:tableStyleId>{5C22544A-7EE6-4342-B048-85BDC9FD1C3A}</a:tableStyleId>
               </a:tblPr>
               <a:tblGrid>
-                <a:gridCol w="3520440"/>
-                <a:gridCol w="896112"/>
-                <a:gridCol w="768096"/>
-                <a:gridCol w="1216152"/>
+                <a:gridCol w="2073676"/>
+                <a:gridCol w="2931749"/>
+                <a:gridCol w="929579"/>
+                <a:gridCol w="1215603"/>
               </a:tblGrid>
-              <a:tr h="419792">
+              <a:tr h="422286">
                 <a:tc>
                   <a:txBody>
                     <a:bodyPr/>
@@ -5662,15 +5662,15 @@
                         <a:spcAft>
                           <a:spcPts val="0"/>
                         </a:spcAft>
-                        <a:defRPr sz="1350" b="1">
-                          <a:solidFill>
-                            <a:srgbClr val="111111"/>
-                          </a:solidFill>
-                          <a:latin typeface="Noto Serif CJK SC"/>
-                        </a:defRPr>
-                      </a:pPr>
-                      <a:r>
-                        <a:t>构型类别</a:t>
+                        <a:defRPr sz="1280" b="1">
+                          <a:solidFill>
+                            <a:srgbClr val="111111"/>
+                          </a:solidFill>
+                          <a:latin typeface="Noto Serif CJK SC"/>
+                        </a:defRPr>
+                      </a:pPr>
+                      <a:r>
+                        <a:t>构型</a:t>
                       </a:r>
                     </a:p>
                   </a:txBody>
@@ -5712,7 +5712,57 @@
                         <a:spcAft>
                           <a:spcPts val="0"/>
                         </a:spcAft>
-                        <a:defRPr sz="1350" b="1">
+                        <a:defRPr sz="1280" b="1">
+                          <a:solidFill>
+                            <a:srgbClr val="111111"/>
+                          </a:solidFill>
+                          <a:latin typeface="Noto Serif CJK SC"/>
+                        </a:defRPr>
+                      </a:pPr>
+                      <a:r>
+                        <a:t>数量来源</a:t>
+                      </a:r>
+                    </a:p>
+                  </a:txBody>
+                  <a:tcPr marL="64008" marR="54864" marT="22860" marB="22860" anchor="ctr">
+                    <a:solidFill>
+                      <a:srgbClr val="FFFFFF"/>
+                    </a:solidFill>
+                    <a:lnL w="6350">
+                      <a:solidFill>
+                        <a:srgbClr val="555555"/>
+                      </a:solidFill>
+                    </a:lnL>
+                    <a:lnR w="6350">
+                      <a:solidFill>
+                        <a:srgbClr val="555555"/>
+                      </a:solidFill>
+                    </a:lnR>
+                    <a:lnT w="6350">
+                      <a:solidFill>
+                        <a:srgbClr val="555555"/>
+                      </a:solidFill>
+                    </a:lnT>
+                    <a:lnB w="6350">
+                      <a:solidFill>
+                        <a:srgbClr val="555555"/>
+                      </a:solidFill>
+                    </a:lnB>
+                  </a:tcPr>
+                </a:tc>
+                <a:tc>
+                  <a:txBody>
+                    <a:bodyPr/>
+                    <a:lstStyle/>
+                    <a:p>
+                      <a:pPr algn="ctr">
+                        <a:lnSpc>
+                          <a:spcPct val="100000"/>
+                        </a:lnSpc>
+                        <a:spcAft>
+                          <a:spcPts val="0"/>
+                        </a:spcAft>
+                        <a:defRPr sz="1280" b="1">
                           <a:solidFill>
                             <a:srgbClr val="111111"/>
                           </a:solidFill>
@@ -5762,57 +5812,7 @@
                         <a:spcAft>
                           <a:spcPts val="0"/>
                         </a:spcAft>
-                        <a:defRPr sz="1350" b="1">
-                          <a:solidFill>
-                            <a:srgbClr val="111111"/>
-                          </a:solidFill>
-                          <a:latin typeface="Noto Serif CJK SC"/>
-                        </a:defRPr>
-                      </a:pPr>
-                      <a:r>
-                        <a:t>Tₑ 点</a:t>
-                      </a:r>
-                    </a:p>
-                  </a:txBody>
-                  <a:tcPr marL="64008" marR="54864" marT="22860" marB="22860" anchor="ctr">
-                    <a:solidFill>
-                      <a:srgbClr val="FFFFFF"/>
-                    </a:solidFill>
-                    <a:lnL w="6350">
-                      <a:solidFill>
-                        <a:srgbClr val="555555"/>
-                      </a:solidFill>
-                    </a:lnL>
-                    <a:lnR w="6350">
-                      <a:solidFill>
-                        <a:srgbClr val="555555"/>
-                      </a:solidFill>
-                    </a:lnR>
-                    <a:lnT w="6350">
-                      <a:solidFill>
-                        <a:srgbClr val="555555"/>
-                      </a:solidFill>
-                    </a:lnT>
-                    <a:lnB w="6350">
-                      <a:solidFill>
-                        <a:srgbClr val="555555"/>
-                      </a:solidFill>
-                    </a:lnB>
-                  </a:tcPr>
-                </a:tc>
-                <a:tc>
-                  <a:txBody>
-                    <a:bodyPr/>
-                    <a:lstStyle/>
-                    <a:p>
-                      <a:pPr algn="ctr">
-                        <a:lnSpc>
-                          <a:spcPct val="100000"/>
-                        </a:lnSpc>
-                        <a:spcAft>
-                          <a:spcPts val="0"/>
-                        </a:spcAft>
-                        <a:defRPr sz="1350" b="1">
+                        <a:defRPr sz="1280" b="1">
                           <a:solidFill>
                             <a:srgbClr val="111111"/>
                           </a:solidFill>
@@ -5851,7 +5851,7 @@
                   </a:tcPr>
                 </a:tc>
               </a:tr>
-              <a:tr h="419792">
+              <a:tr h="422286">
                 <a:tc>
                   <a:txBody>
                     <a:bodyPr/>
@@ -5864,15 +5864,15 @@
                         <a:spcAft>
                           <a:spcPts val="0"/>
                         </a:spcAft>
-                        <a:defRPr sz="1350" b="0">
-                          <a:solidFill>
-                            <a:srgbClr val="111111"/>
-                          </a:solidFill>
-                          <a:latin typeface="Noto Serif CJK SC"/>
-                        </a:defRPr>
-                      </a:pPr>
-                      <a:r>
-                        <a:t>晶相参考（dc/β-Sn/sh/BC8/R8）</a:t>
+                        <a:defRPr sz="1280" b="0">
+                          <a:solidFill>
+                            <a:srgbClr val="111111"/>
+                          </a:solidFill>
+                          <a:latin typeface="Noto Serif CJK SC"/>
+                        </a:defRPr>
+                      </a:pPr>
+                      <a:r>
+                        <a:t>晶相参考</a:t>
                       </a:r>
                     </a:p>
                   </a:txBody>
@@ -5914,7 +5914,57 @@
                         <a:spcAft>
                           <a:spcPts val="0"/>
                         </a:spcAft>
-                        <a:defRPr sz="1350" b="0">
+                        <a:defRPr sz="1280" b="0">
+                          <a:solidFill>
+                            <a:srgbClr val="111111"/>
+                          </a:solidFill>
+                          <a:latin typeface="Noto Serif CJK SC"/>
+                        </a:defRPr>
+                      </a:pPr>
+                      <a:r>
+                        <a:t>5相×4体积</a:t>
+                      </a:r>
+                    </a:p>
+                  </a:txBody>
+                  <a:tcPr marL="64008" marR="54864" marT="22860" marB="22860" anchor="ctr">
+                    <a:solidFill>
+                      <a:srgbClr val="FFFFFF"/>
+                    </a:solidFill>
+                    <a:lnL w="6350">
+                      <a:solidFill>
+                        <a:srgbClr val="555555"/>
+                      </a:solidFill>
+                    </a:lnL>
+                    <a:lnR w="6350">
+                      <a:solidFill>
+                        <a:srgbClr val="555555"/>
+                      </a:solidFill>
+                    </a:lnR>
+                    <a:lnT w="6350">
+                      <a:solidFill>
+                        <a:srgbClr val="555555"/>
+                      </a:solidFill>
+                    </a:lnT>
+                    <a:lnB w="6350">
+                      <a:solidFill>
+                        <a:srgbClr val="555555"/>
+                      </a:solidFill>
+                    </a:lnB>
+                  </a:tcPr>
+                </a:tc>
+                <a:tc>
+                  <a:txBody>
+                    <a:bodyPr/>
+                    <a:lstStyle/>
+                    <a:p>
+                      <a:pPr algn="l">
+                        <a:lnSpc>
+                          <a:spcPct val="100000"/>
+                        </a:lnSpc>
+                        <a:spcAft>
+                          <a:spcPts val="0"/>
+                        </a:spcAft>
+                        <a:defRPr sz="1280" b="0">
                           <a:solidFill>
                             <a:srgbClr val="111111"/>
                           </a:solidFill>
@@ -5964,44 +6014,46 @@
                         <a:spcAft>
                           <a:spcPts val="0"/>
                         </a:spcAft>
-                        <a:defRPr sz="1350" b="0">
-                          <a:solidFill>
-                            <a:srgbClr val="111111"/>
-                          </a:solidFill>
-                          <a:latin typeface="Noto Serif CJK SC"/>
-                        </a:defRPr>
-                      </a:pPr>
-                      <a:r>
-                        <a:t>6</a:t>
-                      </a:r>
-                    </a:p>
-                  </a:txBody>
-                  <a:tcPr marL="64008" marR="54864" marT="22860" marB="22860" anchor="ctr">
-                    <a:solidFill>
-                      <a:srgbClr val="FFFFFF"/>
-                    </a:solidFill>
-                    <a:lnL w="6350">
-                      <a:solidFill>
-                        <a:srgbClr val="555555"/>
-                      </a:solidFill>
-                    </a:lnL>
-                    <a:lnR w="6350">
-                      <a:solidFill>
-                        <a:srgbClr val="555555"/>
-                      </a:solidFill>
-                    </a:lnR>
-                    <a:lnT w="6350">
-                      <a:solidFill>
-                        <a:srgbClr val="555555"/>
-                      </a:solidFill>
-                    </a:lnT>
-                    <a:lnB w="6350">
-                      <a:solidFill>
-                        <a:srgbClr val="555555"/>
-                      </a:solidFill>
-                    </a:lnB>
-                  </a:tcPr>
-                </a:tc>
+                        <a:defRPr sz="1280" b="0">
+                          <a:solidFill>
+                            <a:srgbClr val="111111"/>
+                          </a:solidFill>
+                          <a:latin typeface="Noto Serif CJK SC"/>
+                        </a:defRPr>
+                      </a:pPr>
+                      <a:r>
+                        <a:t>120</a:t>
+                      </a:r>
+                    </a:p>
+                  </a:txBody>
+                  <a:tcPr marL="64008" marR="54864" marT="22860" marB="22860" anchor="ctr">
+                    <a:solidFill>
+                      <a:srgbClr val="FFFFFF"/>
+                    </a:solidFill>
+                    <a:lnL w="6350">
+                      <a:solidFill>
+                        <a:srgbClr val="555555"/>
+                      </a:solidFill>
+                    </a:lnL>
+                    <a:lnR w="6350">
+                      <a:solidFill>
+                        <a:srgbClr val="555555"/>
+                      </a:solidFill>
+                    </a:lnR>
+                    <a:lnT w="6350">
+                      <a:solidFill>
+                        <a:srgbClr val="555555"/>
+                      </a:solidFill>
+                    </a:lnT>
+                    <a:lnB w="6350">
+                      <a:solidFill>
+                        <a:srgbClr val="555555"/>
+                      </a:solidFill>
+                    </a:lnB>
+                  </a:tcPr>
+                </a:tc>
+              </a:tr>
+              <a:tr h="422286">
                 <a:tc>
                   <a:txBody>
                     <a:bodyPr/>
@@ -6014,7 +6066,157 @@
                         <a:spcAft>
                           <a:spcPts val="0"/>
                         </a:spcAft>
-                        <a:defRPr sz="1350" b="0">
+                        <a:defRPr sz="1280" b="0">
+                          <a:solidFill>
+                            <a:srgbClr val="111111"/>
+                          </a:solidFill>
+                          <a:latin typeface="Noto Serif CJK SC"/>
+                        </a:defRPr>
+                      </a:pPr>
+                      <a:r>
+                        <a:t>扰动 / 应变</a:t>
+                      </a:r>
+                    </a:p>
+                  </a:txBody>
+                  <a:tcPr marL="64008" marR="54864" marT="22860" marB="22860" anchor="ctr">
+                    <a:solidFill>
+                      <a:srgbClr val="FFFFFF"/>
+                    </a:solidFill>
+                    <a:lnL w="6350">
+                      <a:solidFill>
+                        <a:srgbClr val="555555"/>
+                      </a:solidFill>
+                    </a:lnL>
+                    <a:lnR w="6350">
+                      <a:solidFill>
+                        <a:srgbClr val="555555"/>
+                      </a:solidFill>
+                    </a:lnR>
+                    <a:lnT w="6350">
+                      <a:solidFill>
+                        <a:srgbClr val="555555"/>
+                      </a:solidFill>
+                    </a:lnT>
+                    <a:lnB w="6350">
+                      <a:solidFill>
+                        <a:srgbClr val="555555"/>
+                      </a:solidFill>
+                    </a:lnB>
+                  </a:tcPr>
+                </a:tc>
+                <a:tc>
+                  <a:txBody>
+                    <a:bodyPr/>
+                    <a:lstStyle/>
+                    <a:p>
+                      <a:pPr algn="l">
+                        <a:lnSpc>
+                          <a:spcPct val="100000"/>
+                        </a:lnSpc>
+                        <a:spcAft>
+                          <a:spcPts val="0"/>
+                        </a:spcAft>
+                        <a:defRPr sz="1280" b="0">
+                          <a:solidFill>
+                            <a:srgbClr val="111111"/>
+                          </a:solidFill>
+                          <a:latin typeface="Noto Serif CJK SC"/>
+                        </a:defRPr>
+                      </a:pPr>
+                      <a:r>
+                        <a:t>3缩放×5扰动+5剪切</a:t>
+                      </a:r>
+                    </a:p>
+                  </a:txBody>
+                  <a:tcPr marL="64008" marR="54864" marT="22860" marB="22860" anchor="ctr">
+                    <a:solidFill>
+                      <a:srgbClr val="FFFFFF"/>
+                    </a:solidFill>
+                    <a:lnL w="6350">
+                      <a:solidFill>
+                        <a:srgbClr val="555555"/>
+                      </a:solidFill>
+                    </a:lnL>
+                    <a:lnR w="6350">
+                      <a:solidFill>
+                        <a:srgbClr val="555555"/>
+                      </a:solidFill>
+                    </a:lnR>
+                    <a:lnT w="6350">
+                      <a:solidFill>
+                        <a:srgbClr val="555555"/>
+                      </a:solidFill>
+                    </a:lnT>
+                    <a:lnB w="6350">
+                      <a:solidFill>
+                        <a:srgbClr val="555555"/>
+                      </a:solidFill>
+                    </a:lnB>
+                  </a:tcPr>
+                </a:tc>
+                <a:tc>
+                  <a:txBody>
+                    <a:bodyPr/>
+                    <a:lstStyle/>
+                    <a:p>
+                      <a:pPr algn="l">
+                        <a:lnSpc>
+                          <a:spcPct val="100000"/>
+                        </a:lnSpc>
+                        <a:spcAft>
+                          <a:spcPts val="0"/>
+                        </a:spcAft>
+                        <a:defRPr sz="1280" b="0">
+                          <a:solidFill>
+                            <a:srgbClr val="111111"/>
+                          </a:solidFill>
+                          <a:latin typeface="Noto Serif CJK SC"/>
+                        </a:defRPr>
+                      </a:pPr>
+                      <a:r>
+                        <a:t>20</a:t>
+                      </a:r>
+                    </a:p>
+                  </a:txBody>
+                  <a:tcPr marL="64008" marR="54864" marT="22860" marB="22860" anchor="ctr">
+                    <a:solidFill>
+                      <a:srgbClr val="FFFFFF"/>
+                    </a:solidFill>
+                    <a:lnL w="6350">
+                      <a:solidFill>
+                        <a:srgbClr val="555555"/>
+                      </a:solidFill>
+                    </a:lnL>
+                    <a:lnR w="6350">
+                      <a:solidFill>
+                        <a:srgbClr val="555555"/>
+                      </a:solidFill>
+                    </a:lnR>
+                    <a:lnT w="6350">
+                      <a:solidFill>
+                        <a:srgbClr val="555555"/>
+                      </a:solidFill>
+                    </a:lnT>
+                    <a:lnB w="6350">
+                      <a:solidFill>
+                        <a:srgbClr val="555555"/>
+                      </a:solidFill>
+                    </a:lnB>
+                  </a:tcPr>
+                </a:tc>
+                <a:tc>
+                  <a:txBody>
+                    <a:bodyPr/>
+                    <a:lstStyle/>
+                    <a:p>
+                      <a:pPr algn="l">
+                        <a:lnSpc>
+                          <a:spcPct val="100000"/>
+                        </a:lnSpc>
+                        <a:spcAft>
+                          <a:spcPts val="0"/>
+                        </a:spcAft>
+                        <a:defRPr sz="1280" b="0">
                           <a:solidFill>
                             <a:srgbClr val="111111"/>
                           </a:solidFill>
@@ -6053,7 +6255,7 @@
                   </a:tcPr>
                 </a:tc>
               </a:tr>
-              <a:tr h="419792">
+              <a:tr h="422286">
                 <a:tc>
                   <a:txBody>
                     <a:bodyPr/>
@@ -6066,15 +6268,15 @@
                         <a:spcAft>
                           <a:spcPts val="0"/>
                         </a:spcAft>
-                        <a:defRPr sz="1350" b="0">
-                          <a:solidFill>
-                            <a:srgbClr val="111111"/>
-                          </a:solidFill>
-                          <a:latin typeface="Noto Serif CJK SC"/>
-                        </a:defRPr>
-                      </a:pPr>
-                      <a:r>
-                        <a:t>随机扰动与应变</a:t>
+                        <a:defRPr sz="1280" b="0">
+                          <a:solidFill>
+                            <a:srgbClr val="111111"/>
+                          </a:solidFill>
+                          <a:latin typeface="Noto Serif CJK SC"/>
+                        </a:defRPr>
+                      </a:pPr>
+                      <a:r>
+                        <a:t>点缺陷</a:t>
                       </a:r>
                     </a:p>
                   </a:txBody>
@@ -6116,7 +6318,57 @@
                         <a:spcAft>
                           <a:spcPts val="0"/>
                         </a:spcAft>
-                        <a:defRPr sz="1350" b="0">
+                        <a:defRPr sz="1280" b="0">
+                          <a:solidFill>
+                            <a:srgbClr val="111111"/>
+                          </a:solidFill>
+                          <a:latin typeface="Noto Serif CJK SC"/>
+                        </a:defRPr>
+                      </a:pPr>
+                      <a:r>
+                        <a:t>4类×5扰动</a:t>
+                      </a:r>
+                    </a:p>
+                  </a:txBody>
+                  <a:tcPr marL="64008" marR="54864" marT="22860" marB="22860" anchor="ctr">
+                    <a:solidFill>
+                      <a:srgbClr val="FFFFFF"/>
+                    </a:solidFill>
+                    <a:lnL w="6350">
+                      <a:solidFill>
+                        <a:srgbClr val="555555"/>
+                      </a:solidFill>
+                    </a:lnL>
+                    <a:lnR w="6350">
+                      <a:solidFill>
+                        <a:srgbClr val="555555"/>
+                      </a:solidFill>
+                    </a:lnR>
+                    <a:lnT w="6350">
+                      <a:solidFill>
+                        <a:srgbClr val="555555"/>
+                      </a:solidFill>
+                    </a:lnT>
+                    <a:lnB w="6350">
+                      <a:solidFill>
+                        <a:srgbClr val="555555"/>
+                      </a:solidFill>
+                    </a:lnB>
+                  </a:tcPr>
+                </a:tc>
+                <a:tc>
+                  <a:txBody>
+                    <a:bodyPr/>
+                    <a:lstStyle/>
+                    <a:p>
+                      <a:pPr algn="l">
+                        <a:lnSpc>
+                          <a:spcPct val="100000"/>
+                        </a:lnSpc>
+                        <a:spcAft>
+                          <a:spcPts val="0"/>
+                        </a:spcAft>
+                        <a:defRPr sz="1280" b="0">
                           <a:solidFill>
                             <a:srgbClr val="111111"/>
                           </a:solidFill>
@@ -6166,44 +6418,46 @@
                         <a:spcAft>
                           <a:spcPts val="0"/>
                         </a:spcAft>
-                        <a:defRPr sz="1350" b="0">
-                          <a:solidFill>
-                            <a:srgbClr val="111111"/>
-                          </a:solidFill>
-                          <a:latin typeface="Noto Serif CJK SC"/>
-                        </a:defRPr>
-                      </a:pPr>
-                      <a:r>
-                        <a:t>6</a:t>
-                      </a:r>
-                    </a:p>
-                  </a:txBody>
-                  <a:tcPr marL="64008" marR="54864" marT="22860" marB="22860" anchor="ctr">
-                    <a:solidFill>
-                      <a:srgbClr val="FFFFFF"/>
-                    </a:solidFill>
-                    <a:lnL w="6350">
-                      <a:solidFill>
-                        <a:srgbClr val="555555"/>
-                      </a:solidFill>
-                    </a:lnL>
-                    <a:lnR w="6350">
-                      <a:solidFill>
-                        <a:srgbClr val="555555"/>
-                      </a:solidFill>
-                    </a:lnR>
-                    <a:lnT w="6350">
-                      <a:solidFill>
-                        <a:srgbClr val="555555"/>
-                      </a:solidFill>
-                    </a:lnT>
-                    <a:lnB w="6350">
-                      <a:solidFill>
-                        <a:srgbClr val="555555"/>
-                      </a:solidFill>
-                    </a:lnB>
-                  </a:tcPr>
-                </a:tc>
+                        <a:defRPr sz="1280" b="0">
+                          <a:solidFill>
+                            <a:srgbClr val="111111"/>
+                          </a:solidFill>
+                          <a:latin typeface="Noto Serif CJK SC"/>
+                        </a:defRPr>
+                      </a:pPr>
+                      <a:r>
+                        <a:t>120</a:t>
+                      </a:r>
+                    </a:p>
+                  </a:txBody>
+                  <a:tcPr marL="64008" marR="54864" marT="22860" marB="22860" anchor="ctr">
+                    <a:solidFill>
+                      <a:srgbClr val="FFFFFF"/>
+                    </a:solidFill>
+                    <a:lnL w="6350">
+                      <a:solidFill>
+                        <a:srgbClr val="555555"/>
+                      </a:solidFill>
+                    </a:lnL>
+                    <a:lnR w="6350">
+                      <a:solidFill>
+                        <a:srgbClr val="555555"/>
+                      </a:solidFill>
+                    </a:lnR>
+                    <a:lnT w="6350">
+                      <a:solidFill>
+                        <a:srgbClr val="555555"/>
+                      </a:solidFill>
+                    </a:lnT>
+                    <a:lnB w="6350">
+                      <a:solidFill>
+                        <a:srgbClr val="555555"/>
+                      </a:solidFill>
+                    </a:lnB>
+                  </a:tcPr>
+                </a:tc>
+              </a:tr>
+              <a:tr h="422286">
                 <a:tc>
                   <a:txBody>
                     <a:bodyPr/>
@@ -6216,7 +6470,1319 @@
                         <a:spcAft>
                           <a:spcPts val="0"/>
                         </a:spcAft>
-                        <a:defRPr sz="1350" b="0">
+                        <a:defRPr sz="1280" b="0">
+                          <a:solidFill>
+                            <a:srgbClr val="111111"/>
+                          </a:solidFill>
+                          <a:latin typeface="Noto Serif CJK SC"/>
+                        </a:defRPr>
+                      </a:pPr>
+                      <a:r>
+                        <a:t>位错 / 层错 / 孪晶</a:t>
+                      </a:r>
+                    </a:p>
+                  </a:txBody>
+                  <a:tcPr marL="64008" marR="54864" marT="22860" marB="22860" anchor="ctr">
+                    <a:solidFill>
+                      <a:srgbClr val="FFFFFF"/>
+                    </a:solidFill>
+                    <a:lnL w="6350">
+                      <a:solidFill>
+                        <a:srgbClr val="555555"/>
+                      </a:solidFill>
+                    </a:lnL>
+                    <a:lnR w="6350">
+                      <a:solidFill>
+                        <a:srgbClr val="555555"/>
+                      </a:solidFill>
+                    </a:lnR>
+                    <a:lnT w="6350">
+                      <a:solidFill>
+                        <a:srgbClr val="555555"/>
+                      </a:solidFill>
+                    </a:lnT>
+                    <a:lnB w="6350">
+                      <a:solidFill>
+                        <a:srgbClr val="555555"/>
+                      </a:solidFill>
+                    </a:lnB>
+                  </a:tcPr>
+                </a:tc>
+                <a:tc>
+                  <a:txBody>
+                    <a:bodyPr/>
+                    <a:lstStyle/>
+                    <a:p>
+                      <a:pPr algn="l">
+                        <a:lnSpc>
+                          <a:spcPct val="100000"/>
+                        </a:lnSpc>
+                        <a:spcAft>
+                          <a:spcPts val="0"/>
+                        </a:spcAft>
+                        <a:defRPr sz="1280" b="0">
+                          <a:solidFill>
+                            <a:srgbClr val="111111"/>
+                          </a:solidFill>
+                          <a:latin typeface="Noto Serif CJK SC"/>
+                        </a:defRPr>
+                      </a:pPr>
+                      <a:r>
+                        <a:t>6+2+2</a:t>
+                      </a:r>
+                    </a:p>
+                  </a:txBody>
+                  <a:tcPr marL="64008" marR="54864" marT="22860" marB="22860" anchor="ctr">
+                    <a:solidFill>
+                      <a:srgbClr val="FFFFFF"/>
+                    </a:solidFill>
+                    <a:lnL w="6350">
+                      <a:solidFill>
+                        <a:srgbClr val="555555"/>
+                      </a:solidFill>
+                    </a:lnL>
+                    <a:lnR w="6350">
+                      <a:solidFill>
+                        <a:srgbClr val="555555"/>
+                      </a:solidFill>
+                    </a:lnR>
+                    <a:lnT w="6350">
+                      <a:solidFill>
+                        <a:srgbClr val="555555"/>
+                      </a:solidFill>
+                    </a:lnT>
+                    <a:lnB w="6350">
+                      <a:solidFill>
+                        <a:srgbClr val="555555"/>
+                      </a:solidFill>
+                    </a:lnB>
+                  </a:tcPr>
+                </a:tc>
+                <a:tc>
+                  <a:txBody>
+                    <a:bodyPr/>
+                    <a:lstStyle/>
+                    <a:p>
+                      <a:pPr algn="l">
+                        <a:lnSpc>
+                          <a:spcPct val="100000"/>
+                        </a:lnSpc>
+                        <a:spcAft>
+                          <a:spcPts val="0"/>
+                        </a:spcAft>
+                        <a:defRPr sz="1280" b="0">
+                          <a:solidFill>
+                            <a:srgbClr val="111111"/>
+                          </a:solidFill>
+                          <a:latin typeface="Noto Serif CJK SC"/>
+                        </a:defRPr>
+                      </a:pPr>
+                      <a:r>
+                        <a:t>10</a:t>
+                      </a:r>
+                    </a:p>
+                  </a:txBody>
+                  <a:tcPr marL="64008" marR="54864" marT="22860" marB="22860" anchor="ctr">
+                    <a:solidFill>
+                      <a:srgbClr val="FFFFFF"/>
+                    </a:solidFill>
+                    <a:lnL w="6350">
+                      <a:solidFill>
+                        <a:srgbClr val="555555"/>
+                      </a:solidFill>
+                    </a:lnL>
+                    <a:lnR w="6350">
+                      <a:solidFill>
+                        <a:srgbClr val="555555"/>
+                      </a:solidFill>
+                    </a:lnR>
+                    <a:lnT w="6350">
+                      <a:solidFill>
+                        <a:srgbClr val="555555"/>
+                      </a:solidFill>
+                    </a:lnT>
+                    <a:lnB w="6350">
+                      <a:solidFill>
+                        <a:srgbClr val="555555"/>
+                      </a:solidFill>
+                    </a:lnB>
+                  </a:tcPr>
+                </a:tc>
+                <a:tc>
+                  <a:txBody>
+                    <a:bodyPr/>
+                    <a:lstStyle/>
+                    <a:p>
+                      <a:pPr algn="l">
+                        <a:lnSpc>
+                          <a:spcPct val="100000"/>
+                        </a:lnSpc>
+                        <a:spcAft>
+                          <a:spcPts val="0"/>
+                        </a:spcAft>
+                        <a:defRPr sz="1280" b="0">
+                          <a:solidFill>
+                            <a:srgbClr val="111111"/>
+                          </a:solidFill>
+                          <a:latin typeface="Noto Serif CJK SC"/>
+                        </a:defRPr>
+                      </a:pPr>
+                      <a:r>
+                        <a:t>60</a:t>
+                      </a:r>
+                    </a:p>
+                  </a:txBody>
+                  <a:tcPr marL="64008" marR="54864" marT="22860" marB="22860" anchor="ctr">
+                    <a:solidFill>
+                      <a:srgbClr val="FFFFFF"/>
+                    </a:solidFill>
+                    <a:lnL w="6350">
+                      <a:solidFill>
+                        <a:srgbClr val="555555"/>
+                      </a:solidFill>
+                    </a:lnL>
+                    <a:lnR w="6350">
+                      <a:solidFill>
+                        <a:srgbClr val="555555"/>
+                      </a:solidFill>
+                    </a:lnR>
+                    <a:lnT w="6350">
+                      <a:solidFill>
+                        <a:srgbClr val="555555"/>
+                      </a:solidFill>
+                    </a:lnT>
+                    <a:lnB w="6350">
+                      <a:solidFill>
+                        <a:srgbClr val="555555"/>
+                      </a:solidFill>
+                    </a:lnB>
+                  </a:tcPr>
+                </a:tc>
+              </a:tr>
+              <a:tr h="422286">
+                <a:tc>
+                  <a:txBody>
+                    <a:bodyPr/>
+                    <a:lstStyle/>
+                    <a:p>
+                      <a:pPr algn="l">
+                        <a:lnSpc>
+                          <a:spcPct val="100000"/>
+                        </a:lnSpc>
+                        <a:spcAft>
+                          <a:spcPts val="0"/>
+                        </a:spcAft>
+                        <a:defRPr sz="1280" b="0">
+                          <a:solidFill>
+                            <a:srgbClr val="111111"/>
+                          </a:solidFill>
+                          <a:latin typeface="Noto Serif CJK SC"/>
+                        </a:defRPr>
+                      </a:pPr>
+                      <a:r>
+                        <a:t>表面</a:t>
+                      </a:r>
+                    </a:p>
+                  </a:txBody>
+                  <a:tcPr marL="64008" marR="54864" marT="22860" marB="22860" anchor="ctr">
+                    <a:solidFill>
+                      <a:srgbClr val="FFFFFF"/>
+                    </a:solidFill>
+                    <a:lnL w="6350">
+                      <a:solidFill>
+                        <a:srgbClr val="555555"/>
+                      </a:solidFill>
+                    </a:lnL>
+                    <a:lnR w="6350">
+                      <a:solidFill>
+                        <a:srgbClr val="555555"/>
+                      </a:solidFill>
+                    </a:lnR>
+                    <a:lnT w="6350">
+                      <a:solidFill>
+                        <a:srgbClr val="555555"/>
+                      </a:solidFill>
+                    </a:lnT>
+                    <a:lnB w="6350">
+                      <a:solidFill>
+                        <a:srgbClr val="555555"/>
+                      </a:solidFill>
+                    </a:lnB>
+                  </a:tcPr>
+                </a:tc>
+                <a:tc>
+                  <a:txBody>
+                    <a:bodyPr/>
+                    <a:lstStyle/>
+                    <a:p>
+                      <a:pPr algn="l">
+                        <a:lnSpc>
+                          <a:spcPct val="100000"/>
+                        </a:lnSpc>
+                        <a:spcAft>
+                          <a:spcPts val="0"/>
+                        </a:spcAft>
+                        <a:defRPr sz="1280" b="0">
+                          <a:solidFill>
+                            <a:srgbClr val="111111"/>
+                          </a:solidFill>
+                          <a:latin typeface="Noto Serif CJK SC"/>
+                        </a:defRPr>
+                      </a:pPr>
+                      <a:r>
+                        <a:t>3+2</a:t>
+                      </a:r>
+                    </a:p>
+                  </a:txBody>
+                  <a:tcPr marL="64008" marR="54864" marT="22860" marB="22860" anchor="ctr">
+                    <a:solidFill>
+                      <a:srgbClr val="FFFFFF"/>
+                    </a:solidFill>
+                    <a:lnL w="6350">
+                      <a:solidFill>
+                        <a:srgbClr val="555555"/>
+                      </a:solidFill>
+                    </a:lnL>
+                    <a:lnR w="6350">
+                      <a:solidFill>
+                        <a:srgbClr val="555555"/>
+                      </a:solidFill>
+                    </a:lnR>
+                    <a:lnT w="6350">
+                      <a:solidFill>
+                        <a:srgbClr val="555555"/>
+                      </a:solidFill>
+                    </a:lnT>
+                    <a:lnB w="6350">
+                      <a:solidFill>
+                        <a:srgbClr val="555555"/>
+                      </a:solidFill>
+                    </a:lnB>
+                  </a:tcPr>
+                </a:tc>
+                <a:tc>
+                  <a:txBody>
+                    <a:bodyPr/>
+                    <a:lstStyle/>
+                    <a:p>
+                      <a:pPr algn="l">
+                        <a:lnSpc>
+                          <a:spcPct val="100000"/>
+                        </a:lnSpc>
+                        <a:spcAft>
+                          <a:spcPts val="0"/>
+                        </a:spcAft>
+                        <a:defRPr sz="1280" b="0">
+                          <a:solidFill>
+                            <a:srgbClr val="111111"/>
+                          </a:solidFill>
+                          <a:latin typeface="Noto Serif CJK SC"/>
+                        </a:defRPr>
+                      </a:pPr>
+                      <a:r>
+                        <a:t>5</a:t>
+                      </a:r>
+                    </a:p>
+                  </a:txBody>
+                  <a:tcPr marL="64008" marR="54864" marT="22860" marB="22860" anchor="ctr">
+                    <a:solidFill>
+                      <a:srgbClr val="FFFFFF"/>
+                    </a:solidFill>
+                    <a:lnL w="6350">
+                      <a:solidFill>
+                        <a:srgbClr val="555555"/>
+                      </a:solidFill>
+                    </a:lnL>
+                    <a:lnR w="6350">
+                      <a:solidFill>
+                        <a:srgbClr val="555555"/>
+                      </a:solidFill>
+                    </a:lnR>
+                    <a:lnT w="6350">
+                      <a:solidFill>
+                        <a:srgbClr val="555555"/>
+                      </a:solidFill>
+                    </a:lnT>
+                    <a:lnB w="6350">
+                      <a:solidFill>
+                        <a:srgbClr val="555555"/>
+                      </a:solidFill>
+                    </a:lnB>
+                  </a:tcPr>
+                </a:tc>
+                <a:tc>
+                  <a:txBody>
+                    <a:bodyPr/>
+                    <a:lstStyle/>
+                    <a:p>
+                      <a:pPr algn="l">
+                        <a:lnSpc>
+                          <a:spcPct val="100000"/>
+                        </a:lnSpc>
+                        <a:spcAft>
+                          <a:spcPts val="0"/>
+                        </a:spcAft>
+                        <a:defRPr sz="1280" b="0">
+                          <a:solidFill>
+                            <a:srgbClr val="111111"/>
+                          </a:solidFill>
+                          <a:latin typeface="Noto Serif CJK SC"/>
+                        </a:defRPr>
+                      </a:pPr>
+                      <a:r>
+                        <a:t>30</a:t>
+                      </a:r>
+                    </a:p>
+                  </a:txBody>
+                  <a:tcPr marL="64008" marR="54864" marT="22860" marB="22860" anchor="ctr">
+                    <a:solidFill>
+                      <a:srgbClr val="FFFFFF"/>
+                    </a:solidFill>
+                    <a:lnL w="6350">
+                      <a:solidFill>
+                        <a:srgbClr val="555555"/>
+                      </a:solidFill>
+                    </a:lnL>
+                    <a:lnR w="6350">
+                      <a:solidFill>
+                        <a:srgbClr val="555555"/>
+                      </a:solidFill>
+                    </a:lnR>
+                    <a:lnT w="6350">
+                      <a:solidFill>
+                        <a:srgbClr val="555555"/>
+                      </a:solidFill>
+                    </a:lnT>
+                    <a:lnB w="6350">
+                      <a:solidFill>
+                        <a:srgbClr val="555555"/>
+                      </a:solidFill>
+                    </a:lnB>
+                  </a:tcPr>
+                </a:tc>
+              </a:tr>
+              <a:tr h="422286">
+                <a:tc>
+                  <a:txBody>
+                    <a:bodyPr/>
+                    <a:lstStyle/>
+                    <a:p>
+                      <a:pPr algn="l">
+                        <a:lnSpc>
+                          <a:spcPct val="100000"/>
+                        </a:lnSpc>
+                        <a:spcAft>
+                          <a:spcPts val="0"/>
+                        </a:spcAft>
+                        <a:defRPr sz="1280" b="0">
+                          <a:solidFill>
+                            <a:srgbClr val="111111"/>
+                          </a:solidFill>
+                          <a:latin typeface="Noto Serif CJK SC"/>
+                        </a:defRPr>
+                      </a:pPr>
+                      <a:r>
+                        <a:t>非晶</a:t>
+                      </a:r>
+                    </a:p>
+                  </a:txBody>
+                  <a:tcPr marL="64008" marR="54864" marT="22860" marB="22860" anchor="ctr">
+                    <a:solidFill>
+                      <a:srgbClr val="FFFFFF"/>
+                    </a:solidFill>
+                    <a:lnL w="6350">
+                      <a:solidFill>
+                        <a:srgbClr val="555555"/>
+                      </a:solidFill>
+                    </a:lnL>
+                    <a:lnR w="6350">
+                      <a:solidFill>
+                        <a:srgbClr val="555555"/>
+                      </a:solidFill>
+                    </a:lnR>
+                    <a:lnT w="6350">
+                      <a:solidFill>
+                        <a:srgbClr val="555555"/>
+                      </a:solidFill>
+                    </a:lnT>
+                    <a:lnB w="6350">
+                      <a:solidFill>
+                        <a:srgbClr val="555555"/>
+                      </a:solidFill>
+                    </a:lnB>
+                  </a:tcPr>
+                </a:tc>
+                <a:tc>
+                  <a:txBody>
+                    <a:bodyPr/>
+                    <a:lstStyle/>
+                    <a:p>
+                      <a:pPr algn="l">
+                        <a:lnSpc>
+                          <a:spcPct val="100000"/>
+                        </a:lnSpc>
+                        <a:spcAft>
+                          <a:spcPts val="0"/>
+                        </a:spcAft>
+                        <a:defRPr sz="1280" b="0">
+                          <a:solidFill>
+                            <a:srgbClr val="111111"/>
+                          </a:solidFill>
+                          <a:latin typeface="Noto Serif CJK SC"/>
+                        </a:defRPr>
+                      </a:pPr>
+                      <a:r>
+                        <a:t>2淬火速率×5种子</a:t>
+                      </a:r>
+                    </a:p>
+                  </a:txBody>
+                  <a:tcPr marL="64008" marR="54864" marT="22860" marB="22860" anchor="ctr">
+                    <a:solidFill>
+                      <a:srgbClr val="FFFFFF"/>
+                    </a:solidFill>
+                    <a:lnL w="6350">
+                      <a:solidFill>
+                        <a:srgbClr val="555555"/>
+                      </a:solidFill>
+                    </a:lnL>
+                    <a:lnR w="6350">
+                      <a:solidFill>
+                        <a:srgbClr val="555555"/>
+                      </a:solidFill>
+                    </a:lnR>
+                    <a:lnT w="6350">
+                      <a:solidFill>
+                        <a:srgbClr val="555555"/>
+                      </a:solidFill>
+                    </a:lnT>
+                    <a:lnB w="6350">
+                      <a:solidFill>
+                        <a:srgbClr val="555555"/>
+                      </a:solidFill>
+                    </a:lnB>
+                  </a:tcPr>
+                </a:tc>
+                <a:tc>
+                  <a:txBody>
+                    <a:bodyPr/>
+                    <a:lstStyle/>
+                    <a:p>
+                      <a:pPr algn="l">
+                        <a:lnSpc>
+                          <a:spcPct val="100000"/>
+                        </a:lnSpc>
+                        <a:spcAft>
+                          <a:spcPts val="0"/>
+                        </a:spcAft>
+                        <a:defRPr sz="1280" b="0">
+                          <a:solidFill>
+                            <a:srgbClr val="111111"/>
+                          </a:solidFill>
+                          <a:latin typeface="Noto Serif CJK SC"/>
+                        </a:defRPr>
+                      </a:pPr>
+                      <a:r>
+                        <a:t>10</a:t>
+                      </a:r>
+                    </a:p>
+                  </a:txBody>
+                  <a:tcPr marL="64008" marR="54864" marT="22860" marB="22860" anchor="ctr">
+                    <a:solidFill>
+                      <a:srgbClr val="FFFFFF"/>
+                    </a:solidFill>
+                    <a:lnL w="6350">
+                      <a:solidFill>
+                        <a:srgbClr val="555555"/>
+                      </a:solidFill>
+                    </a:lnL>
+                    <a:lnR w="6350">
+                      <a:solidFill>
+                        <a:srgbClr val="555555"/>
+                      </a:solidFill>
+                    </a:lnR>
+                    <a:lnT w="6350">
+                      <a:solidFill>
+                        <a:srgbClr val="555555"/>
+                      </a:solidFill>
+                    </a:lnT>
+                    <a:lnB w="6350">
+                      <a:solidFill>
+                        <a:srgbClr val="555555"/>
+                      </a:solidFill>
+                    </a:lnB>
+                  </a:tcPr>
+                </a:tc>
+                <a:tc>
+                  <a:txBody>
+                    <a:bodyPr/>
+                    <a:lstStyle/>
+                    <a:p>
+                      <a:pPr algn="l">
+                        <a:lnSpc>
+                          <a:spcPct val="100000"/>
+                        </a:lnSpc>
+                        <a:spcAft>
+                          <a:spcPts val="0"/>
+                        </a:spcAft>
+                        <a:defRPr sz="1280" b="0">
+                          <a:solidFill>
+                            <a:srgbClr val="111111"/>
+                          </a:solidFill>
+                          <a:latin typeface="Noto Serif CJK SC"/>
+                        </a:defRPr>
+                      </a:pPr>
+                      <a:r>
+                        <a:t>60</a:t>
+                      </a:r>
+                    </a:p>
+                  </a:txBody>
+                  <a:tcPr marL="64008" marR="54864" marT="22860" marB="22860" anchor="ctr">
+                    <a:solidFill>
+                      <a:srgbClr val="FFFFFF"/>
+                    </a:solidFill>
+                    <a:lnL w="6350">
+                      <a:solidFill>
+                        <a:srgbClr val="555555"/>
+                      </a:solidFill>
+                    </a:lnL>
+                    <a:lnR w="6350">
+                      <a:solidFill>
+                        <a:srgbClr val="555555"/>
+                      </a:solidFill>
+                    </a:lnR>
+                    <a:lnT w="6350">
+                      <a:solidFill>
+                        <a:srgbClr val="555555"/>
+                      </a:solidFill>
+                    </a:lnT>
+                    <a:lnB w="6350">
+                      <a:solidFill>
+                        <a:srgbClr val="555555"/>
+                      </a:solidFill>
+                    </a:lnB>
+                  </a:tcPr>
+                </a:tc>
+              </a:tr>
+              <a:tr h="422286">
+                <a:tc>
+                  <a:txBody>
+                    <a:bodyPr/>
+                    <a:lstStyle/>
+                    <a:p>
+                      <a:pPr algn="l">
+                        <a:lnSpc>
+                          <a:spcPct val="100000"/>
+                        </a:lnSpc>
+                        <a:spcAft>
+                          <a:spcPts val="0"/>
+                        </a:spcAft>
+                        <a:defRPr sz="1280" b="0">
+                          <a:solidFill>
+                            <a:srgbClr val="111111"/>
+                          </a:solidFill>
+                          <a:latin typeface="Noto Serif CJK SC"/>
+                        </a:defRPr>
+                      </a:pPr>
+                      <a:r>
+                        <a:t>液态</a:t>
+                      </a:r>
+                    </a:p>
+                  </a:txBody>
+                  <a:tcPr marL="64008" marR="54864" marT="22860" marB="22860" anchor="ctr">
+                    <a:solidFill>
+                      <a:srgbClr val="FFFFFF"/>
+                    </a:solidFill>
+                    <a:lnL w="6350">
+                      <a:solidFill>
+                        <a:srgbClr val="555555"/>
+                      </a:solidFill>
+                    </a:lnL>
+                    <a:lnR w="6350">
+                      <a:solidFill>
+                        <a:srgbClr val="555555"/>
+                      </a:solidFill>
+                    </a:lnR>
+                    <a:lnT w="6350">
+                      <a:solidFill>
+                        <a:srgbClr val="555555"/>
+                      </a:solidFill>
+                    </a:lnT>
+                    <a:lnB w="6350">
+                      <a:solidFill>
+                        <a:srgbClr val="555555"/>
+                      </a:solidFill>
+                    </a:lnB>
+                  </a:tcPr>
+                </a:tc>
+                <a:tc>
+                  <a:txBody>
+                    <a:bodyPr/>
+                    <a:lstStyle/>
+                    <a:p>
+                      <a:pPr algn="l">
+                        <a:lnSpc>
+                          <a:spcPct val="100000"/>
+                        </a:lnSpc>
+                        <a:spcAft>
+                          <a:spcPts val="0"/>
+                        </a:spcAft>
+                        <a:defRPr sz="1280" b="0">
+                          <a:solidFill>
+                            <a:srgbClr val="111111"/>
+                          </a:solidFill>
+                          <a:latin typeface="Noto Serif CJK SC"/>
+                        </a:defRPr>
+                      </a:pPr>
+                      <a:r>
+                        <a:t>2温度×5帧</a:t>
+                      </a:r>
+                    </a:p>
+                  </a:txBody>
+                  <a:tcPr marL="64008" marR="54864" marT="22860" marB="22860" anchor="ctr">
+                    <a:solidFill>
+                      <a:srgbClr val="FFFFFF"/>
+                    </a:solidFill>
+                    <a:lnL w="6350">
+                      <a:solidFill>
+                        <a:srgbClr val="555555"/>
+                      </a:solidFill>
+                    </a:lnL>
+                    <a:lnR w="6350">
+                      <a:solidFill>
+                        <a:srgbClr val="555555"/>
+                      </a:solidFill>
+                    </a:lnR>
+                    <a:lnT w="6350">
+                      <a:solidFill>
+                        <a:srgbClr val="555555"/>
+                      </a:solidFill>
+                    </a:lnT>
+                    <a:lnB w="6350">
+                      <a:solidFill>
+                        <a:srgbClr val="555555"/>
+                      </a:solidFill>
+                    </a:lnB>
+                  </a:tcPr>
+                </a:tc>
+                <a:tc>
+                  <a:txBody>
+                    <a:bodyPr/>
+                    <a:lstStyle/>
+                    <a:p>
+                      <a:pPr algn="l">
+                        <a:lnSpc>
+                          <a:spcPct val="100000"/>
+                        </a:lnSpc>
+                        <a:spcAft>
+                          <a:spcPts val="0"/>
+                        </a:spcAft>
+                        <a:defRPr sz="1280" b="0">
+                          <a:solidFill>
+                            <a:srgbClr val="111111"/>
+                          </a:solidFill>
+                          <a:latin typeface="Noto Serif CJK SC"/>
+                        </a:defRPr>
+                      </a:pPr>
+                      <a:r>
+                        <a:t>10</a:t>
+                      </a:r>
+                    </a:p>
+                  </a:txBody>
+                  <a:tcPr marL="64008" marR="54864" marT="22860" marB="22860" anchor="ctr">
+                    <a:solidFill>
+                      <a:srgbClr val="FFFFFF"/>
+                    </a:solidFill>
+                    <a:lnL w="6350">
+                      <a:solidFill>
+                        <a:srgbClr val="555555"/>
+                      </a:solidFill>
+                    </a:lnL>
+                    <a:lnR w="6350">
+                      <a:solidFill>
+                        <a:srgbClr val="555555"/>
+                      </a:solidFill>
+                    </a:lnR>
+                    <a:lnT w="6350">
+                      <a:solidFill>
+                        <a:srgbClr val="555555"/>
+                      </a:solidFill>
+                    </a:lnT>
+                    <a:lnB w="6350">
+                      <a:solidFill>
+                        <a:srgbClr val="555555"/>
+                      </a:solidFill>
+                    </a:lnB>
+                  </a:tcPr>
+                </a:tc>
+                <a:tc>
+                  <a:txBody>
+                    <a:bodyPr/>
+                    <a:lstStyle/>
+                    <a:p>
+                      <a:pPr algn="l">
+                        <a:lnSpc>
+                          <a:spcPct val="100000"/>
+                        </a:lnSpc>
+                        <a:spcAft>
+                          <a:spcPts val="0"/>
+                        </a:spcAft>
+                        <a:defRPr sz="1280" b="0">
+                          <a:solidFill>
+                            <a:srgbClr val="111111"/>
+                          </a:solidFill>
+                          <a:latin typeface="Noto Serif CJK SC"/>
+                        </a:defRPr>
+                      </a:pPr>
+                      <a:r>
+                        <a:t>60</a:t>
+                      </a:r>
+                    </a:p>
+                  </a:txBody>
+                  <a:tcPr marL="64008" marR="54864" marT="22860" marB="22860" anchor="ctr">
+                    <a:solidFill>
+                      <a:srgbClr val="FFFFFF"/>
+                    </a:solidFill>
+                    <a:lnL w="6350">
+                      <a:solidFill>
+                        <a:srgbClr val="555555"/>
+                      </a:solidFill>
+                    </a:lnL>
+                    <a:lnR w="6350">
+                      <a:solidFill>
+                        <a:srgbClr val="555555"/>
+                      </a:solidFill>
+                    </a:lnR>
+                    <a:lnT w="6350">
+                      <a:solidFill>
+                        <a:srgbClr val="555555"/>
+                      </a:solidFill>
+                    </a:lnT>
+                    <a:lnB w="6350">
+                      <a:solidFill>
+                        <a:srgbClr val="555555"/>
+                      </a:solidFill>
+                    </a:lnB>
+                  </a:tcPr>
+                </a:tc>
+              </a:tr>
+              <a:tr h="422286">
+                <a:tc>
+                  <a:txBody>
+                    <a:bodyPr/>
+                    <a:lstStyle/>
+                    <a:p>
+                      <a:pPr algn="l">
+                        <a:lnSpc>
+                          <a:spcPct val="100000"/>
+                        </a:lnSpc>
+                        <a:spcAft>
+                          <a:spcPts val="0"/>
+                        </a:spcAft>
+                        <a:defRPr sz="1280" b="0">
+                          <a:solidFill>
+                            <a:srgbClr val="111111"/>
+                          </a:solidFill>
+                          <a:latin typeface="Noto Serif CJK SC"/>
+                        </a:defRPr>
+                      </a:pPr>
+                      <a:r>
+                        <a:t>界面 / 局部熔化</a:t>
+                      </a:r>
+                    </a:p>
+                  </a:txBody>
+                  <a:tcPr marL="64008" marR="54864" marT="22860" marB="22860" anchor="ctr">
+                    <a:solidFill>
+                      <a:srgbClr val="FFFFFF"/>
+                    </a:solidFill>
+                    <a:lnL w="6350">
+                      <a:solidFill>
+                        <a:srgbClr val="555555"/>
+                      </a:solidFill>
+                    </a:lnL>
+                    <a:lnR w="6350">
+                      <a:solidFill>
+                        <a:srgbClr val="555555"/>
+                      </a:solidFill>
+                    </a:lnR>
+                    <a:lnT w="6350">
+                      <a:solidFill>
+                        <a:srgbClr val="555555"/>
+                      </a:solidFill>
+                    </a:lnT>
+                    <a:lnB w="6350">
+                      <a:solidFill>
+                        <a:srgbClr val="555555"/>
+                      </a:solidFill>
+                    </a:lnB>
+                  </a:tcPr>
+                </a:tc>
+                <a:tc>
+                  <a:txBody>
+                    <a:bodyPr/>
+                    <a:lstStyle/>
+                    <a:p>
+                      <a:pPr algn="l">
+                        <a:lnSpc>
+                          <a:spcPct val="100000"/>
+                        </a:lnSpc>
+                        <a:spcAft>
+                          <a:spcPts val="0"/>
+                        </a:spcAft>
+                        <a:defRPr sz="1280" b="0">
+                          <a:solidFill>
+                            <a:srgbClr val="111111"/>
+                          </a:solidFill>
+                          <a:latin typeface="Noto Serif CJK SC"/>
+                        </a:defRPr>
+                      </a:pPr>
+                      <a:r>
+                        <a:t>5+5</a:t>
+                      </a:r>
+                    </a:p>
+                  </a:txBody>
+                  <a:tcPr marL="64008" marR="54864" marT="22860" marB="22860" anchor="ctr">
+                    <a:solidFill>
+                      <a:srgbClr val="FFFFFF"/>
+                    </a:solidFill>
+                    <a:lnL w="6350">
+                      <a:solidFill>
+                        <a:srgbClr val="555555"/>
+                      </a:solidFill>
+                    </a:lnL>
+                    <a:lnR w="6350">
+                      <a:solidFill>
+                        <a:srgbClr val="555555"/>
+                      </a:solidFill>
+                    </a:lnR>
+                    <a:lnT w="6350">
+                      <a:solidFill>
+                        <a:srgbClr val="555555"/>
+                      </a:solidFill>
+                    </a:lnT>
+                    <a:lnB w="6350">
+                      <a:solidFill>
+                        <a:srgbClr val="555555"/>
+                      </a:solidFill>
+                    </a:lnB>
+                  </a:tcPr>
+                </a:tc>
+                <a:tc>
+                  <a:txBody>
+                    <a:bodyPr/>
+                    <a:lstStyle/>
+                    <a:p>
+                      <a:pPr algn="l">
+                        <a:lnSpc>
+                          <a:spcPct val="100000"/>
+                        </a:lnSpc>
+                        <a:spcAft>
+                          <a:spcPts val="0"/>
+                        </a:spcAft>
+                        <a:defRPr sz="1280" b="0">
+                          <a:solidFill>
+                            <a:srgbClr val="111111"/>
+                          </a:solidFill>
+                          <a:latin typeface="Noto Serif CJK SC"/>
+                        </a:defRPr>
+                      </a:pPr>
+                      <a:r>
+                        <a:t>10</a:t>
+                      </a:r>
+                    </a:p>
+                  </a:txBody>
+                  <a:tcPr marL="64008" marR="54864" marT="22860" marB="22860" anchor="ctr">
+                    <a:solidFill>
+                      <a:srgbClr val="FFFFFF"/>
+                    </a:solidFill>
+                    <a:lnL w="6350">
+                      <a:solidFill>
+                        <a:srgbClr val="555555"/>
+                      </a:solidFill>
+                    </a:lnL>
+                    <a:lnR w="6350">
+                      <a:solidFill>
+                        <a:srgbClr val="555555"/>
+                      </a:solidFill>
+                    </a:lnR>
+                    <a:lnT w="6350">
+                      <a:solidFill>
+                        <a:srgbClr val="555555"/>
+                      </a:solidFill>
+                    </a:lnT>
+                    <a:lnB w="6350">
+                      <a:solidFill>
+                        <a:srgbClr val="555555"/>
+                      </a:solidFill>
+                    </a:lnB>
+                  </a:tcPr>
+                </a:tc>
+                <a:tc>
+                  <a:txBody>
+                    <a:bodyPr/>
+                    <a:lstStyle/>
+                    <a:p>
+                      <a:pPr algn="l">
+                        <a:lnSpc>
+                          <a:spcPct val="100000"/>
+                        </a:lnSpc>
+                        <a:spcAft>
+                          <a:spcPts val="0"/>
+                        </a:spcAft>
+                        <a:defRPr sz="1280" b="0">
+                          <a:solidFill>
+                            <a:srgbClr val="111111"/>
+                          </a:solidFill>
+                          <a:latin typeface="Noto Serif CJK SC"/>
+                        </a:defRPr>
+                      </a:pPr>
+                      <a:r>
+                        <a:t>60</a:t>
+                      </a:r>
+                    </a:p>
+                  </a:txBody>
+                  <a:tcPr marL="64008" marR="54864" marT="22860" marB="22860" anchor="ctr">
+                    <a:solidFill>
+                      <a:srgbClr val="FFFFFF"/>
+                    </a:solidFill>
+                    <a:lnL w="6350">
+                      <a:solidFill>
+                        <a:srgbClr val="555555"/>
+                      </a:solidFill>
+                    </a:lnL>
+                    <a:lnR w="6350">
+                      <a:solidFill>
+                        <a:srgbClr val="555555"/>
+                      </a:solidFill>
+                    </a:lnR>
+                    <a:lnT w="6350">
+                      <a:solidFill>
+                        <a:srgbClr val="555555"/>
+                      </a:solidFill>
+                    </a:lnT>
+                    <a:lnB w="6350">
+                      <a:solidFill>
+                        <a:srgbClr val="555555"/>
+                      </a:solidFill>
+                    </a:lnB>
+                  </a:tcPr>
+                </a:tc>
+              </a:tr>
+              <a:tr h="422286">
+                <a:tc>
+                  <a:txBody>
+                    <a:bodyPr/>
+                    <a:lstStyle/>
+                    <a:p>
+                      <a:pPr algn="l">
+                        <a:lnSpc>
+                          <a:spcPct val="100000"/>
+                        </a:lnSpc>
+                        <a:spcAft>
+                          <a:spcPts val="0"/>
+                        </a:spcAft>
+                        <a:defRPr sz="1280" b="0">
+                          <a:solidFill>
+                            <a:srgbClr val="111111"/>
+                          </a:solidFill>
+                          <a:latin typeface="Noto Serif CJK SC"/>
+                        </a:defRPr>
+                      </a:pPr>
+                      <a:r>
+                        <a:t>迁移路径</a:t>
+                      </a:r>
+                    </a:p>
+                  </a:txBody>
+                  <a:tcPr marL="64008" marR="54864" marT="22860" marB="22860" anchor="ctr">
+                    <a:solidFill>
+                      <a:srgbClr val="FFFFFF"/>
+                    </a:solidFill>
+                    <a:lnL w="6350">
+                      <a:solidFill>
+                        <a:srgbClr val="555555"/>
+                      </a:solidFill>
+                    </a:lnL>
+                    <a:lnR w="6350">
+                      <a:solidFill>
+                        <a:srgbClr val="555555"/>
+                      </a:solidFill>
+                    </a:lnR>
+                    <a:lnT w="6350">
+                      <a:solidFill>
+                        <a:srgbClr val="555555"/>
+                      </a:solidFill>
+                    </a:lnT>
+                    <a:lnB w="6350">
+                      <a:solidFill>
+                        <a:srgbClr val="555555"/>
+                      </a:solidFill>
+                    </a:lnB>
+                  </a:tcPr>
+                </a:tc>
+                <a:tc>
+                  <a:txBody>
+                    <a:bodyPr/>
+                    <a:lstStyle/>
+                    <a:p>
+                      <a:pPr algn="l">
+                        <a:lnSpc>
+                          <a:spcPct val="100000"/>
+                        </a:lnSpc>
+                        <a:spcAft>
+                          <a:spcPts val="0"/>
+                        </a:spcAft>
+                        <a:defRPr sz="1280" b="0">
+                          <a:solidFill>
+                            <a:srgbClr val="111111"/>
+                          </a:solidFill>
+                          <a:latin typeface="Noto Serif CJK SC"/>
+                        </a:defRPr>
+                      </a:pPr>
+                      <a:r>
+                        <a:t>3路径×5中间态</a:t>
+                      </a:r>
+                    </a:p>
+                  </a:txBody>
+                  <a:tcPr marL="64008" marR="54864" marT="22860" marB="22860" anchor="ctr">
+                    <a:solidFill>
+                      <a:srgbClr val="FFFFFF"/>
+                    </a:solidFill>
+                    <a:lnL w="6350">
+                      <a:solidFill>
+                        <a:srgbClr val="555555"/>
+                      </a:solidFill>
+                    </a:lnL>
+                    <a:lnR w="6350">
+                      <a:solidFill>
+                        <a:srgbClr val="555555"/>
+                      </a:solidFill>
+                    </a:lnR>
+                    <a:lnT w="6350">
+                      <a:solidFill>
+                        <a:srgbClr val="555555"/>
+                      </a:solidFill>
+                    </a:lnT>
+                    <a:lnB w="6350">
+                      <a:solidFill>
+                        <a:srgbClr val="555555"/>
+                      </a:solidFill>
+                    </a:lnB>
+                  </a:tcPr>
+                </a:tc>
+                <a:tc>
+                  <a:txBody>
+                    <a:bodyPr/>
+                    <a:lstStyle/>
+                    <a:p>
+                      <a:pPr algn="l">
+                        <a:lnSpc>
+                          <a:spcPct val="100000"/>
+                        </a:lnSpc>
+                        <a:spcAft>
+                          <a:spcPts val="0"/>
+                        </a:spcAft>
+                        <a:defRPr sz="1280" b="0">
+                          <a:solidFill>
+                            <a:srgbClr val="111111"/>
+                          </a:solidFill>
+                          <a:latin typeface="Noto Serif CJK SC"/>
+                        </a:defRPr>
+                      </a:pPr>
+                      <a:r>
+                        <a:t>15</a:t>
+                      </a:r>
+                    </a:p>
+                  </a:txBody>
+                  <a:tcPr marL="64008" marR="54864" marT="22860" marB="22860" anchor="ctr">
+                    <a:solidFill>
+                      <a:srgbClr val="FFFFFF"/>
+                    </a:solidFill>
+                    <a:lnL w="6350">
+                      <a:solidFill>
+                        <a:srgbClr val="555555"/>
+                      </a:solidFill>
+                    </a:lnL>
+                    <a:lnR w="6350">
+                      <a:solidFill>
+                        <a:srgbClr val="555555"/>
+                      </a:solidFill>
+                    </a:lnR>
+                    <a:lnT w="6350">
+                      <a:solidFill>
+                        <a:srgbClr val="555555"/>
+                      </a:solidFill>
+                    </a:lnT>
+                    <a:lnB w="6350">
+                      <a:solidFill>
+                        <a:srgbClr val="555555"/>
+                      </a:solidFill>
+                    </a:lnB>
+                  </a:tcPr>
+                </a:tc>
+                <a:tc>
+                  <a:txBody>
+                    <a:bodyPr/>
+                    <a:lstStyle/>
+                    <a:p>
+                      <a:pPr algn="l">
+                        <a:lnSpc>
+                          <a:spcPct val="100000"/>
+                        </a:lnSpc>
+                        <a:spcAft>
+                          <a:spcPts val="0"/>
+                        </a:spcAft>
+                        <a:defRPr sz="1280" b="0">
+                          <a:solidFill>
+                            <a:srgbClr val="111111"/>
+                          </a:solidFill>
+                          <a:latin typeface="Noto Serif CJK SC"/>
+                        </a:defRPr>
+                      </a:pPr>
+                      <a:r>
+                        <a:t>90</a:t>
+                      </a:r>
+                    </a:p>
+                  </a:txBody>
+                  <a:tcPr marL="64008" marR="54864" marT="22860" marB="22860" anchor="ctr">
+                    <a:solidFill>
+                      <a:srgbClr val="FFFFFF"/>
+                    </a:solidFill>
+                    <a:lnL w="6350">
+                      <a:solidFill>
+                        <a:srgbClr val="555555"/>
+                      </a:solidFill>
+                    </a:lnL>
+                    <a:lnR w="6350">
+                      <a:solidFill>
+                        <a:srgbClr val="555555"/>
+                      </a:solidFill>
+                    </a:lnR>
+                    <a:lnT w="6350">
+                      <a:solidFill>
+                        <a:srgbClr val="555555"/>
+                      </a:solidFill>
+                    </a:lnT>
+                    <a:lnB w="6350">
+                      <a:solidFill>
+                        <a:srgbClr val="555555"/>
+                      </a:solidFill>
+                    </a:lnB>
+                  </a:tcPr>
+                </a:tc>
+              </a:tr>
+              <a:tr h="422292">
+                <a:tc>
+                  <a:txBody>
+                    <a:bodyPr/>
+                    <a:lstStyle/>
+                    <a:p>
+                      <a:pPr algn="l">
+                        <a:lnSpc>
+                          <a:spcPct val="100000"/>
+                        </a:lnSpc>
+                        <a:spcAft>
+                          <a:spcPts val="0"/>
+                        </a:spcAft>
+                        <a:defRPr sz="1280" b="0">
+                          <a:solidFill>
+                            <a:srgbClr val="111111"/>
+                          </a:solidFill>
+                          <a:latin typeface="Noto Serif CJK SC"/>
+                        </a:defRPr>
+                      </a:pPr>
+                      <a:r>
+                        <a:t>合计</a:t>
+                      </a:r>
+                    </a:p>
+                  </a:txBody>
+                  <a:tcPr marL="64008" marR="54864" marT="22860" marB="22860" anchor="ctr">
+                    <a:solidFill>
+                      <a:srgbClr val="FFFFFF"/>
+                    </a:solidFill>
+                    <a:lnL w="6350">
+                      <a:solidFill>
+                        <a:srgbClr val="555555"/>
+                      </a:solidFill>
+                    </a:lnL>
+                    <a:lnR w="6350">
+                      <a:solidFill>
+                        <a:srgbClr val="555555"/>
+                      </a:solidFill>
+                    </a:lnR>
+                    <a:lnT w="6350">
+                      <a:solidFill>
+                        <a:srgbClr val="555555"/>
+                      </a:solidFill>
+                    </a:lnT>
+                    <a:lnB w="6350">
+                      <a:solidFill>
+                        <a:srgbClr val="555555"/>
+                      </a:solidFill>
+                    </a:lnB>
+                  </a:tcPr>
+                </a:tc>
+                <a:tc>
+                  <a:txBody>
+                    <a:bodyPr/>
+                    <a:lstStyle/>
+                    <a:p>
+                      <a:pPr algn="l">
+                        <a:lnSpc>
+                          <a:spcPct val="100000"/>
+                        </a:lnSpc>
+                        <a:spcAft>
+                          <a:spcPts val="0"/>
+                        </a:spcAft>
+                        <a:defRPr sz="1280" b="0">
+                          <a:solidFill>
+                            <a:srgbClr val="111111"/>
+                          </a:solidFill>
+                          <a:latin typeface="Noto Serif CJK SC"/>
+                        </a:defRPr>
+                      </a:pPr>
+                      <a:r>
+                        <a:t>全部固定R扫6个Tₑ</a:t>
+                      </a:r>
+                    </a:p>
+                  </a:txBody>
+                  <a:tcPr marL="64008" marR="54864" marT="22860" marB="22860" anchor="ctr">
+                    <a:solidFill>
+                      <a:srgbClr val="FFFFFF"/>
+                    </a:solidFill>
+                    <a:lnL w="6350">
+                      <a:solidFill>
+                        <a:srgbClr val="555555"/>
+                      </a:solidFill>
+                    </a:lnL>
+                    <a:lnR w="6350">
+                      <a:solidFill>
+                        <a:srgbClr val="555555"/>
+                      </a:solidFill>
+                    </a:lnR>
+                    <a:lnT w="6350">
+                      <a:solidFill>
+                        <a:srgbClr val="555555"/>
+                      </a:solidFill>
+                    </a:lnT>
+                    <a:lnB w="6350">
+                      <a:solidFill>
+                        <a:srgbClr val="555555"/>
+                      </a:solidFill>
+                    </a:lnB>
+                  </a:tcPr>
+                </a:tc>
+                <a:tc>
+                  <a:txBody>
+                    <a:bodyPr/>
+                    <a:lstStyle/>
+                    <a:p>
+                      <a:pPr algn="l">
+                        <a:lnSpc>
+                          <a:spcPct val="100000"/>
+                        </a:lnSpc>
+                        <a:spcAft>
+                          <a:spcPts val="0"/>
+                        </a:spcAft>
+                        <a:defRPr sz="1280" b="0">
                           <a:solidFill>
                             <a:srgbClr val="111111"/>
                           </a:solidFill>
@@ -6254,8 +7820,6 @@
                     </a:lnB>
                   </a:tcPr>
                 </a:tc>
-              </a:tr>
-              <a:tr h="419792">
                 <a:tc>
                   <a:txBody>
                     <a:bodyPr/>
@@ -6268,1571 +7832,7 @@
                         <a:spcAft>
                           <a:spcPts val="0"/>
                         </a:spcAft>
-                        <a:defRPr sz="1350" b="0">
-                          <a:solidFill>
-                            <a:srgbClr val="111111"/>
-                          </a:solidFill>
-                          <a:latin typeface="Noto Serif CJK SC"/>
-                        </a:defRPr>
-                      </a:pPr>
-                      <a:r>
-                        <a:t>空位 / 间隙 / Frenkel 对</a:t>
-                      </a:r>
-                    </a:p>
-                  </a:txBody>
-                  <a:tcPr marL="64008" marR="54864" marT="22860" marB="22860" anchor="ctr">
-                    <a:solidFill>
-                      <a:srgbClr val="FFFFFF"/>
-                    </a:solidFill>
-                    <a:lnL w="6350">
-                      <a:solidFill>
-                        <a:srgbClr val="555555"/>
-                      </a:solidFill>
-                    </a:lnL>
-                    <a:lnR w="6350">
-                      <a:solidFill>
-                        <a:srgbClr val="555555"/>
-                      </a:solidFill>
-                    </a:lnR>
-                    <a:lnT w="6350">
-                      <a:solidFill>
-                        <a:srgbClr val="555555"/>
-                      </a:solidFill>
-                    </a:lnT>
-                    <a:lnB w="6350">
-                      <a:solidFill>
-                        <a:srgbClr val="555555"/>
-                      </a:solidFill>
-                    </a:lnB>
-                  </a:tcPr>
-                </a:tc>
-                <a:tc>
-                  <a:txBody>
-                    <a:bodyPr/>
-                    <a:lstStyle/>
-                    <a:p>
-                      <a:pPr algn="l">
-                        <a:lnSpc>
-                          <a:spcPct val="100000"/>
-                        </a:lnSpc>
-                        <a:spcAft>
-                          <a:spcPts val="0"/>
-                        </a:spcAft>
-                        <a:defRPr sz="1350" b="0">
-                          <a:solidFill>
-                            <a:srgbClr val="111111"/>
-                          </a:solidFill>
-                          <a:latin typeface="Noto Serif CJK SC"/>
-                        </a:defRPr>
-                      </a:pPr>
-                      <a:r>
-                        <a:t>20</a:t>
-                      </a:r>
-                    </a:p>
-                  </a:txBody>
-                  <a:tcPr marL="64008" marR="54864" marT="22860" marB="22860" anchor="ctr">
-                    <a:solidFill>
-                      <a:srgbClr val="FFFFFF"/>
-                    </a:solidFill>
-                    <a:lnL w="6350">
-                      <a:solidFill>
-                        <a:srgbClr val="555555"/>
-                      </a:solidFill>
-                    </a:lnL>
-                    <a:lnR w="6350">
-                      <a:solidFill>
-                        <a:srgbClr val="555555"/>
-                      </a:solidFill>
-                    </a:lnR>
-                    <a:lnT w="6350">
-                      <a:solidFill>
-                        <a:srgbClr val="555555"/>
-                      </a:solidFill>
-                    </a:lnT>
-                    <a:lnB w="6350">
-                      <a:solidFill>
-                        <a:srgbClr val="555555"/>
-                      </a:solidFill>
-                    </a:lnB>
-                  </a:tcPr>
-                </a:tc>
-                <a:tc>
-                  <a:txBody>
-                    <a:bodyPr/>
-                    <a:lstStyle/>
-                    <a:p>
-                      <a:pPr algn="l">
-                        <a:lnSpc>
-                          <a:spcPct val="100000"/>
-                        </a:lnSpc>
-                        <a:spcAft>
-                          <a:spcPts val="0"/>
-                        </a:spcAft>
-                        <a:defRPr sz="1350" b="0">
-                          <a:solidFill>
-                            <a:srgbClr val="111111"/>
-                          </a:solidFill>
-                          <a:latin typeface="Noto Serif CJK SC"/>
-                        </a:defRPr>
-                      </a:pPr>
-                      <a:r>
-                        <a:t>6</a:t>
-                      </a:r>
-                    </a:p>
-                  </a:txBody>
-                  <a:tcPr marL="64008" marR="54864" marT="22860" marB="22860" anchor="ctr">
-                    <a:solidFill>
-                      <a:srgbClr val="FFFFFF"/>
-                    </a:solidFill>
-                    <a:lnL w="6350">
-                      <a:solidFill>
-                        <a:srgbClr val="555555"/>
-                      </a:solidFill>
-                    </a:lnL>
-                    <a:lnR w="6350">
-                      <a:solidFill>
-                        <a:srgbClr val="555555"/>
-                      </a:solidFill>
-                    </a:lnR>
-                    <a:lnT w="6350">
-                      <a:solidFill>
-                        <a:srgbClr val="555555"/>
-                      </a:solidFill>
-                    </a:lnT>
-                    <a:lnB w="6350">
-                      <a:solidFill>
-                        <a:srgbClr val="555555"/>
-                      </a:solidFill>
-                    </a:lnB>
-                  </a:tcPr>
-                </a:tc>
-                <a:tc>
-                  <a:txBody>
-                    <a:bodyPr/>
-                    <a:lstStyle/>
-                    <a:p>
-                      <a:pPr algn="l">
-                        <a:lnSpc>
-                          <a:spcPct val="100000"/>
-                        </a:lnSpc>
-                        <a:spcAft>
-                          <a:spcPts val="0"/>
-                        </a:spcAft>
-                        <a:defRPr sz="1350" b="0">
-                          <a:solidFill>
-                            <a:srgbClr val="111111"/>
-                          </a:solidFill>
-                          <a:latin typeface="Noto Serif CJK SC"/>
-                        </a:defRPr>
-                      </a:pPr>
-                      <a:r>
-                        <a:t>120</a:t>
-                      </a:r>
-                    </a:p>
-                  </a:txBody>
-                  <a:tcPr marL="64008" marR="54864" marT="22860" marB="22860" anchor="ctr">
-                    <a:solidFill>
-                      <a:srgbClr val="FFFFFF"/>
-                    </a:solidFill>
-                    <a:lnL w="6350">
-                      <a:solidFill>
-                        <a:srgbClr val="555555"/>
-                      </a:solidFill>
-                    </a:lnL>
-                    <a:lnR w="6350">
-                      <a:solidFill>
-                        <a:srgbClr val="555555"/>
-                      </a:solidFill>
-                    </a:lnR>
-                    <a:lnT w="6350">
-                      <a:solidFill>
-                        <a:srgbClr val="555555"/>
-                      </a:solidFill>
-                    </a:lnT>
-                    <a:lnB w="6350">
-                      <a:solidFill>
-                        <a:srgbClr val="555555"/>
-                      </a:solidFill>
-                    </a:lnB>
-                  </a:tcPr>
-                </a:tc>
-              </a:tr>
-              <a:tr h="419792">
-                <a:tc>
-                  <a:txBody>
-                    <a:bodyPr/>
-                    <a:lstStyle/>
-                    <a:p>
-                      <a:pPr algn="l">
-                        <a:lnSpc>
-                          <a:spcPct val="100000"/>
-                        </a:lnSpc>
-                        <a:spcAft>
-                          <a:spcPts val="0"/>
-                        </a:spcAft>
-                        <a:defRPr sz="1350" b="0">
-                          <a:solidFill>
-                            <a:srgbClr val="111111"/>
-                          </a:solidFill>
-                          <a:latin typeface="Noto Serif CJK SC"/>
-                        </a:defRPr>
-                      </a:pPr>
-                      <a:r>
-                        <a:t>位错 / 层错 / 孪晶</a:t>
-                      </a:r>
-                    </a:p>
-                  </a:txBody>
-                  <a:tcPr marL="64008" marR="54864" marT="22860" marB="22860" anchor="ctr">
-                    <a:solidFill>
-                      <a:srgbClr val="FFFFFF"/>
-                    </a:solidFill>
-                    <a:lnL w="6350">
-                      <a:solidFill>
-                        <a:srgbClr val="555555"/>
-                      </a:solidFill>
-                    </a:lnL>
-                    <a:lnR w="6350">
-                      <a:solidFill>
-                        <a:srgbClr val="555555"/>
-                      </a:solidFill>
-                    </a:lnR>
-                    <a:lnT w="6350">
-                      <a:solidFill>
-                        <a:srgbClr val="555555"/>
-                      </a:solidFill>
-                    </a:lnT>
-                    <a:lnB w="6350">
-                      <a:solidFill>
-                        <a:srgbClr val="555555"/>
-                      </a:solidFill>
-                    </a:lnB>
-                  </a:tcPr>
-                </a:tc>
-                <a:tc>
-                  <a:txBody>
-                    <a:bodyPr/>
-                    <a:lstStyle/>
-                    <a:p>
-                      <a:pPr algn="l">
-                        <a:lnSpc>
-                          <a:spcPct val="100000"/>
-                        </a:lnSpc>
-                        <a:spcAft>
-                          <a:spcPts val="0"/>
-                        </a:spcAft>
-                        <a:defRPr sz="1350" b="0">
-                          <a:solidFill>
-                            <a:srgbClr val="111111"/>
-                          </a:solidFill>
-                          <a:latin typeface="Noto Serif CJK SC"/>
-                        </a:defRPr>
-                      </a:pPr>
-                      <a:r>
-                        <a:t>10</a:t>
-                      </a:r>
-                    </a:p>
-                  </a:txBody>
-                  <a:tcPr marL="64008" marR="54864" marT="22860" marB="22860" anchor="ctr">
-                    <a:solidFill>
-                      <a:srgbClr val="FFFFFF"/>
-                    </a:solidFill>
-                    <a:lnL w="6350">
-                      <a:solidFill>
-                        <a:srgbClr val="555555"/>
-                      </a:solidFill>
-                    </a:lnL>
-                    <a:lnR w="6350">
-                      <a:solidFill>
-                        <a:srgbClr val="555555"/>
-                      </a:solidFill>
-                    </a:lnR>
-                    <a:lnT w="6350">
-                      <a:solidFill>
-                        <a:srgbClr val="555555"/>
-                      </a:solidFill>
-                    </a:lnT>
-                    <a:lnB w="6350">
-                      <a:solidFill>
-                        <a:srgbClr val="555555"/>
-                      </a:solidFill>
-                    </a:lnB>
-                  </a:tcPr>
-                </a:tc>
-                <a:tc>
-                  <a:txBody>
-                    <a:bodyPr/>
-                    <a:lstStyle/>
-                    <a:p>
-                      <a:pPr algn="l">
-                        <a:lnSpc>
-                          <a:spcPct val="100000"/>
-                        </a:lnSpc>
-                        <a:spcAft>
-                          <a:spcPts val="0"/>
-                        </a:spcAft>
-                        <a:defRPr sz="1350" b="0">
-                          <a:solidFill>
-                            <a:srgbClr val="111111"/>
-                          </a:solidFill>
-                          <a:latin typeface="Noto Serif CJK SC"/>
-                        </a:defRPr>
-                      </a:pPr>
-                      <a:r>
-                        <a:t>6</a:t>
-                      </a:r>
-                    </a:p>
-                  </a:txBody>
-                  <a:tcPr marL="64008" marR="54864" marT="22860" marB="22860" anchor="ctr">
-                    <a:solidFill>
-                      <a:srgbClr val="FFFFFF"/>
-                    </a:solidFill>
-                    <a:lnL w="6350">
-                      <a:solidFill>
-                        <a:srgbClr val="555555"/>
-                      </a:solidFill>
-                    </a:lnL>
-                    <a:lnR w="6350">
-                      <a:solidFill>
-                        <a:srgbClr val="555555"/>
-                      </a:solidFill>
-                    </a:lnR>
-                    <a:lnT w="6350">
-                      <a:solidFill>
-                        <a:srgbClr val="555555"/>
-                      </a:solidFill>
-                    </a:lnT>
-                    <a:lnB w="6350">
-                      <a:solidFill>
-                        <a:srgbClr val="555555"/>
-                      </a:solidFill>
-                    </a:lnB>
-                  </a:tcPr>
-                </a:tc>
-                <a:tc>
-                  <a:txBody>
-                    <a:bodyPr/>
-                    <a:lstStyle/>
-                    <a:p>
-                      <a:pPr algn="l">
-                        <a:lnSpc>
-                          <a:spcPct val="100000"/>
-                        </a:lnSpc>
-                        <a:spcAft>
-                          <a:spcPts val="0"/>
-                        </a:spcAft>
-                        <a:defRPr sz="1350" b="0">
-                          <a:solidFill>
-                            <a:srgbClr val="111111"/>
-                          </a:solidFill>
-                          <a:latin typeface="Noto Serif CJK SC"/>
-                        </a:defRPr>
-                      </a:pPr>
-                      <a:r>
-                        <a:t>60</a:t>
-                      </a:r>
-                    </a:p>
-                  </a:txBody>
-                  <a:tcPr marL="64008" marR="54864" marT="22860" marB="22860" anchor="ctr">
-                    <a:solidFill>
-                      <a:srgbClr val="FFFFFF"/>
-                    </a:solidFill>
-                    <a:lnL w="6350">
-                      <a:solidFill>
-                        <a:srgbClr val="555555"/>
-                      </a:solidFill>
-                    </a:lnL>
-                    <a:lnR w="6350">
-                      <a:solidFill>
-                        <a:srgbClr val="555555"/>
-                      </a:solidFill>
-                    </a:lnR>
-                    <a:lnT w="6350">
-                      <a:solidFill>
-                        <a:srgbClr val="555555"/>
-                      </a:solidFill>
-                    </a:lnT>
-                    <a:lnB w="6350">
-                      <a:solidFill>
-                        <a:srgbClr val="555555"/>
-                      </a:solidFill>
-                    </a:lnB>
-                  </a:tcPr>
-                </a:tc>
-              </a:tr>
-              <a:tr h="419792">
-                <a:tc>
-                  <a:txBody>
-                    <a:bodyPr/>
-                    <a:lstStyle/>
-                    <a:p>
-                      <a:pPr algn="l">
-                        <a:lnSpc>
-                          <a:spcPct val="100000"/>
-                        </a:lnSpc>
-                        <a:spcAft>
-                          <a:spcPts val="0"/>
-                        </a:spcAft>
-                        <a:defRPr sz="1350" b="0">
-                          <a:solidFill>
-                            <a:srgbClr val="111111"/>
-                          </a:solidFill>
-                          <a:latin typeface="Noto Serif CJK SC"/>
-                        </a:defRPr>
-                      </a:pPr>
-                      <a:r>
-                        <a:t>代表表面与近表面缺陷</a:t>
-                      </a:r>
-                    </a:p>
-                  </a:txBody>
-                  <a:tcPr marL="64008" marR="54864" marT="22860" marB="22860" anchor="ctr">
-                    <a:solidFill>
-                      <a:srgbClr val="FFFFFF"/>
-                    </a:solidFill>
-                    <a:lnL w="6350">
-                      <a:solidFill>
-                        <a:srgbClr val="555555"/>
-                      </a:solidFill>
-                    </a:lnL>
-                    <a:lnR w="6350">
-                      <a:solidFill>
-                        <a:srgbClr val="555555"/>
-                      </a:solidFill>
-                    </a:lnR>
-                    <a:lnT w="6350">
-                      <a:solidFill>
-                        <a:srgbClr val="555555"/>
-                      </a:solidFill>
-                    </a:lnT>
-                    <a:lnB w="6350">
-                      <a:solidFill>
-                        <a:srgbClr val="555555"/>
-                      </a:solidFill>
-                    </a:lnB>
-                  </a:tcPr>
-                </a:tc>
-                <a:tc>
-                  <a:txBody>
-                    <a:bodyPr/>
-                    <a:lstStyle/>
-                    <a:p>
-                      <a:pPr algn="l">
-                        <a:lnSpc>
-                          <a:spcPct val="100000"/>
-                        </a:lnSpc>
-                        <a:spcAft>
-                          <a:spcPts val="0"/>
-                        </a:spcAft>
-                        <a:defRPr sz="1350" b="0">
-                          <a:solidFill>
-                            <a:srgbClr val="111111"/>
-                          </a:solidFill>
-                          <a:latin typeface="Noto Serif CJK SC"/>
-                        </a:defRPr>
-                      </a:pPr>
-                      <a:r>
-                        <a:t>5</a:t>
-                      </a:r>
-                    </a:p>
-                  </a:txBody>
-                  <a:tcPr marL="64008" marR="54864" marT="22860" marB="22860" anchor="ctr">
-                    <a:solidFill>
-                      <a:srgbClr val="FFFFFF"/>
-                    </a:solidFill>
-                    <a:lnL w="6350">
-                      <a:solidFill>
-                        <a:srgbClr val="555555"/>
-                      </a:solidFill>
-                    </a:lnL>
-                    <a:lnR w="6350">
-                      <a:solidFill>
-                        <a:srgbClr val="555555"/>
-                      </a:solidFill>
-                    </a:lnR>
-                    <a:lnT w="6350">
-                      <a:solidFill>
-                        <a:srgbClr val="555555"/>
-                      </a:solidFill>
-                    </a:lnT>
-                    <a:lnB w="6350">
-                      <a:solidFill>
-                        <a:srgbClr val="555555"/>
-                      </a:solidFill>
-                    </a:lnB>
-                  </a:tcPr>
-                </a:tc>
-                <a:tc>
-                  <a:txBody>
-                    <a:bodyPr/>
-                    <a:lstStyle/>
-                    <a:p>
-                      <a:pPr algn="l">
-                        <a:lnSpc>
-                          <a:spcPct val="100000"/>
-                        </a:lnSpc>
-                        <a:spcAft>
-                          <a:spcPts val="0"/>
-                        </a:spcAft>
-                        <a:defRPr sz="1350" b="0">
-                          <a:solidFill>
-                            <a:srgbClr val="111111"/>
-                          </a:solidFill>
-                          <a:latin typeface="Noto Serif CJK SC"/>
-                        </a:defRPr>
-                      </a:pPr>
-                      <a:r>
-                        <a:t>6</a:t>
-                      </a:r>
-                    </a:p>
-                  </a:txBody>
-                  <a:tcPr marL="64008" marR="54864" marT="22860" marB="22860" anchor="ctr">
-                    <a:solidFill>
-                      <a:srgbClr val="FFFFFF"/>
-                    </a:solidFill>
-                    <a:lnL w="6350">
-                      <a:solidFill>
-                        <a:srgbClr val="555555"/>
-                      </a:solidFill>
-                    </a:lnL>
-                    <a:lnR w="6350">
-                      <a:solidFill>
-                        <a:srgbClr val="555555"/>
-                      </a:solidFill>
-                    </a:lnR>
-                    <a:lnT w="6350">
-                      <a:solidFill>
-                        <a:srgbClr val="555555"/>
-                      </a:solidFill>
-                    </a:lnT>
-                    <a:lnB w="6350">
-                      <a:solidFill>
-                        <a:srgbClr val="555555"/>
-                      </a:solidFill>
-                    </a:lnB>
-                  </a:tcPr>
-                </a:tc>
-                <a:tc>
-                  <a:txBody>
-                    <a:bodyPr/>
-                    <a:lstStyle/>
-                    <a:p>
-                      <a:pPr algn="l">
-                        <a:lnSpc>
-                          <a:spcPct val="100000"/>
-                        </a:lnSpc>
-                        <a:spcAft>
-                          <a:spcPts val="0"/>
-                        </a:spcAft>
-                        <a:defRPr sz="1350" b="0">
-                          <a:solidFill>
-                            <a:srgbClr val="111111"/>
-                          </a:solidFill>
-                          <a:latin typeface="Noto Serif CJK SC"/>
-                        </a:defRPr>
-                      </a:pPr>
-                      <a:r>
-                        <a:t>30</a:t>
-                      </a:r>
-                    </a:p>
-                  </a:txBody>
-                  <a:tcPr marL="64008" marR="54864" marT="22860" marB="22860" anchor="ctr">
-                    <a:solidFill>
-                      <a:srgbClr val="FFFFFF"/>
-                    </a:solidFill>
-                    <a:lnL w="6350">
-                      <a:solidFill>
-                        <a:srgbClr val="555555"/>
-                      </a:solidFill>
-                    </a:lnL>
-                    <a:lnR w="6350">
-                      <a:solidFill>
-                        <a:srgbClr val="555555"/>
-                      </a:solidFill>
-                    </a:lnR>
-                    <a:lnT w="6350">
-                      <a:solidFill>
-                        <a:srgbClr val="555555"/>
-                      </a:solidFill>
-                    </a:lnT>
-                    <a:lnB w="6350">
-                      <a:solidFill>
-                        <a:srgbClr val="555555"/>
-                      </a:solidFill>
-                    </a:lnB>
-                  </a:tcPr>
-                </a:tc>
-              </a:tr>
-              <a:tr h="419792">
-                <a:tc>
-                  <a:txBody>
-                    <a:bodyPr/>
-                    <a:lstStyle/>
-                    <a:p>
-                      <a:pPr algn="l">
-                        <a:lnSpc>
-                          <a:spcPct val="100000"/>
-                        </a:lnSpc>
-                        <a:spcAft>
-                          <a:spcPts val="0"/>
-                        </a:spcAft>
-                        <a:defRPr sz="1350" b="0">
-                          <a:solidFill>
-                            <a:srgbClr val="111111"/>
-                          </a:solidFill>
-                          <a:latin typeface="Noto Serif CJK SC"/>
-                        </a:defRPr>
-                      </a:pPr>
-                      <a:r>
-                        <a:t>非晶（两种淬火路径）</a:t>
-                      </a:r>
-                    </a:p>
-                  </a:txBody>
-                  <a:tcPr marL="64008" marR="54864" marT="22860" marB="22860" anchor="ctr">
-                    <a:solidFill>
-                      <a:srgbClr val="FFFFFF"/>
-                    </a:solidFill>
-                    <a:lnL w="6350">
-                      <a:solidFill>
-                        <a:srgbClr val="555555"/>
-                      </a:solidFill>
-                    </a:lnL>
-                    <a:lnR w="6350">
-                      <a:solidFill>
-                        <a:srgbClr val="555555"/>
-                      </a:solidFill>
-                    </a:lnR>
-                    <a:lnT w="6350">
-                      <a:solidFill>
-                        <a:srgbClr val="555555"/>
-                      </a:solidFill>
-                    </a:lnT>
-                    <a:lnB w="6350">
-                      <a:solidFill>
-                        <a:srgbClr val="555555"/>
-                      </a:solidFill>
-                    </a:lnB>
-                  </a:tcPr>
-                </a:tc>
-                <a:tc>
-                  <a:txBody>
-                    <a:bodyPr/>
-                    <a:lstStyle/>
-                    <a:p>
-                      <a:pPr algn="l">
-                        <a:lnSpc>
-                          <a:spcPct val="100000"/>
-                        </a:lnSpc>
-                        <a:spcAft>
-                          <a:spcPts val="0"/>
-                        </a:spcAft>
-                        <a:defRPr sz="1350" b="0">
-                          <a:solidFill>
-                            <a:srgbClr val="111111"/>
-                          </a:solidFill>
-                          <a:latin typeface="Noto Serif CJK SC"/>
-                        </a:defRPr>
-                      </a:pPr>
-                      <a:r>
-                        <a:t>10</a:t>
-                      </a:r>
-                    </a:p>
-                  </a:txBody>
-                  <a:tcPr marL="64008" marR="54864" marT="22860" marB="22860" anchor="ctr">
-                    <a:solidFill>
-                      <a:srgbClr val="FFFFFF"/>
-                    </a:solidFill>
-                    <a:lnL w="6350">
-                      <a:solidFill>
-                        <a:srgbClr val="555555"/>
-                      </a:solidFill>
-                    </a:lnL>
-                    <a:lnR w="6350">
-                      <a:solidFill>
-                        <a:srgbClr val="555555"/>
-                      </a:solidFill>
-                    </a:lnR>
-                    <a:lnT w="6350">
-                      <a:solidFill>
-                        <a:srgbClr val="555555"/>
-                      </a:solidFill>
-                    </a:lnT>
-                    <a:lnB w="6350">
-                      <a:solidFill>
-                        <a:srgbClr val="555555"/>
-                      </a:solidFill>
-                    </a:lnB>
-                  </a:tcPr>
-                </a:tc>
-                <a:tc>
-                  <a:txBody>
-                    <a:bodyPr/>
-                    <a:lstStyle/>
-                    <a:p>
-                      <a:pPr algn="l">
-                        <a:lnSpc>
-                          <a:spcPct val="100000"/>
-                        </a:lnSpc>
-                        <a:spcAft>
-                          <a:spcPts val="0"/>
-                        </a:spcAft>
-                        <a:defRPr sz="1350" b="0">
-                          <a:solidFill>
-                            <a:srgbClr val="111111"/>
-                          </a:solidFill>
-                          <a:latin typeface="Noto Serif CJK SC"/>
-                        </a:defRPr>
-                      </a:pPr>
-                      <a:r>
-                        <a:t>6</a:t>
-                      </a:r>
-                    </a:p>
-                  </a:txBody>
-                  <a:tcPr marL="64008" marR="54864" marT="22860" marB="22860" anchor="ctr">
-                    <a:solidFill>
-                      <a:srgbClr val="FFFFFF"/>
-                    </a:solidFill>
-                    <a:lnL w="6350">
-                      <a:solidFill>
-                        <a:srgbClr val="555555"/>
-                      </a:solidFill>
-                    </a:lnL>
-                    <a:lnR w="6350">
-                      <a:solidFill>
-                        <a:srgbClr val="555555"/>
-                      </a:solidFill>
-                    </a:lnR>
-                    <a:lnT w="6350">
-                      <a:solidFill>
-                        <a:srgbClr val="555555"/>
-                      </a:solidFill>
-                    </a:lnT>
-                    <a:lnB w="6350">
-                      <a:solidFill>
-                        <a:srgbClr val="555555"/>
-                      </a:solidFill>
-                    </a:lnB>
-                  </a:tcPr>
-                </a:tc>
-                <a:tc>
-                  <a:txBody>
-                    <a:bodyPr/>
-                    <a:lstStyle/>
-                    <a:p>
-                      <a:pPr algn="l">
-                        <a:lnSpc>
-                          <a:spcPct val="100000"/>
-                        </a:lnSpc>
-                        <a:spcAft>
-                          <a:spcPts val="0"/>
-                        </a:spcAft>
-                        <a:defRPr sz="1350" b="0">
-                          <a:solidFill>
-                            <a:srgbClr val="111111"/>
-                          </a:solidFill>
-                          <a:latin typeface="Noto Serif CJK SC"/>
-                        </a:defRPr>
-                      </a:pPr>
-                      <a:r>
-                        <a:t>60</a:t>
-                      </a:r>
-                    </a:p>
-                  </a:txBody>
-                  <a:tcPr marL="64008" marR="54864" marT="22860" marB="22860" anchor="ctr">
-                    <a:solidFill>
-                      <a:srgbClr val="FFFFFF"/>
-                    </a:solidFill>
-                    <a:lnL w="6350">
-                      <a:solidFill>
-                        <a:srgbClr val="555555"/>
-                      </a:solidFill>
-                    </a:lnL>
-                    <a:lnR w="6350">
-                      <a:solidFill>
-                        <a:srgbClr val="555555"/>
-                      </a:solidFill>
-                    </a:lnR>
-                    <a:lnT w="6350">
-                      <a:solidFill>
-                        <a:srgbClr val="555555"/>
-                      </a:solidFill>
-                    </a:lnT>
-                    <a:lnB w="6350">
-                      <a:solidFill>
-                        <a:srgbClr val="555555"/>
-                      </a:solidFill>
-                    </a:lnB>
-                  </a:tcPr>
-                </a:tc>
-              </a:tr>
-              <a:tr h="419792">
-                <a:tc>
-                  <a:txBody>
-                    <a:bodyPr/>
-                    <a:lstStyle/>
-                    <a:p>
-                      <a:pPr algn="l">
-                        <a:lnSpc>
-                          <a:spcPct val="100000"/>
-                        </a:lnSpc>
-                        <a:spcAft>
-                          <a:spcPts val="0"/>
-                        </a:spcAft>
-                        <a:defRPr sz="1350" b="0">
-                          <a:solidFill>
-                            <a:srgbClr val="111111"/>
-                          </a:solidFill>
-                          <a:latin typeface="Noto Serif CJK SC"/>
-                        </a:defRPr>
-                      </a:pPr>
-                      <a:r>
-                        <a:t>液态（两种晶格温度）</a:t>
-                      </a:r>
-                    </a:p>
-                  </a:txBody>
-                  <a:tcPr marL="64008" marR="54864" marT="22860" marB="22860" anchor="ctr">
-                    <a:solidFill>
-                      <a:srgbClr val="FFFFFF"/>
-                    </a:solidFill>
-                    <a:lnL w="6350">
-                      <a:solidFill>
-                        <a:srgbClr val="555555"/>
-                      </a:solidFill>
-                    </a:lnL>
-                    <a:lnR w="6350">
-                      <a:solidFill>
-                        <a:srgbClr val="555555"/>
-                      </a:solidFill>
-                    </a:lnR>
-                    <a:lnT w="6350">
-                      <a:solidFill>
-                        <a:srgbClr val="555555"/>
-                      </a:solidFill>
-                    </a:lnT>
-                    <a:lnB w="6350">
-                      <a:solidFill>
-                        <a:srgbClr val="555555"/>
-                      </a:solidFill>
-                    </a:lnB>
-                  </a:tcPr>
-                </a:tc>
-                <a:tc>
-                  <a:txBody>
-                    <a:bodyPr/>
-                    <a:lstStyle/>
-                    <a:p>
-                      <a:pPr algn="l">
-                        <a:lnSpc>
-                          <a:spcPct val="100000"/>
-                        </a:lnSpc>
-                        <a:spcAft>
-                          <a:spcPts val="0"/>
-                        </a:spcAft>
-                        <a:defRPr sz="1350" b="0">
-                          <a:solidFill>
-                            <a:srgbClr val="111111"/>
-                          </a:solidFill>
-                          <a:latin typeface="Noto Serif CJK SC"/>
-                        </a:defRPr>
-                      </a:pPr>
-                      <a:r>
-                        <a:t>10</a:t>
-                      </a:r>
-                    </a:p>
-                  </a:txBody>
-                  <a:tcPr marL="64008" marR="54864" marT="22860" marB="22860" anchor="ctr">
-                    <a:solidFill>
-                      <a:srgbClr val="FFFFFF"/>
-                    </a:solidFill>
-                    <a:lnL w="6350">
-                      <a:solidFill>
-                        <a:srgbClr val="555555"/>
-                      </a:solidFill>
-                    </a:lnL>
-                    <a:lnR w="6350">
-                      <a:solidFill>
-                        <a:srgbClr val="555555"/>
-                      </a:solidFill>
-                    </a:lnR>
-                    <a:lnT w="6350">
-                      <a:solidFill>
-                        <a:srgbClr val="555555"/>
-                      </a:solidFill>
-                    </a:lnT>
-                    <a:lnB w="6350">
-                      <a:solidFill>
-                        <a:srgbClr val="555555"/>
-                      </a:solidFill>
-                    </a:lnB>
-                  </a:tcPr>
-                </a:tc>
-                <a:tc>
-                  <a:txBody>
-                    <a:bodyPr/>
-                    <a:lstStyle/>
-                    <a:p>
-                      <a:pPr algn="l">
-                        <a:lnSpc>
-                          <a:spcPct val="100000"/>
-                        </a:lnSpc>
-                        <a:spcAft>
-                          <a:spcPts val="0"/>
-                        </a:spcAft>
-                        <a:defRPr sz="1350" b="0">
-                          <a:solidFill>
-                            <a:srgbClr val="111111"/>
-                          </a:solidFill>
-                          <a:latin typeface="Noto Serif CJK SC"/>
-                        </a:defRPr>
-                      </a:pPr>
-                      <a:r>
-                        <a:t>6</a:t>
-                      </a:r>
-                    </a:p>
-                  </a:txBody>
-                  <a:tcPr marL="64008" marR="54864" marT="22860" marB="22860" anchor="ctr">
-                    <a:solidFill>
-                      <a:srgbClr val="FFFFFF"/>
-                    </a:solidFill>
-                    <a:lnL w="6350">
-                      <a:solidFill>
-                        <a:srgbClr val="555555"/>
-                      </a:solidFill>
-                    </a:lnL>
-                    <a:lnR w="6350">
-                      <a:solidFill>
-                        <a:srgbClr val="555555"/>
-                      </a:solidFill>
-                    </a:lnR>
-                    <a:lnT w="6350">
-                      <a:solidFill>
-                        <a:srgbClr val="555555"/>
-                      </a:solidFill>
-                    </a:lnT>
-                    <a:lnB w="6350">
-                      <a:solidFill>
-                        <a:srgbClr val="555555"/>
-                      </a:solidFill>
-                    </a:lnB>
-                  </a:tcPr>
-                </a:tc>
-                <a:tc>
-                  <a:txBody>
-                    <a:bodyPr/>
-                    <a:lstStyle/>
-                    <a:p>
-                      <a:pPr algn="l">
-                        <a:lnSpc>
-                          <a:spcPct val="100000"/>
-                        </a:lnSpc>
-                        <a:spcAft>
-                          <a:spcPts val="0"/>
-                        </a:spcAft>
-                        <a:defRPr sz="1350" b="0">
-                          <a:solidFill>
-                            <a:srgbClr val="111111"/>
-                          </a:solidFill>
-                          <a:latin typeface="Noto Serif CJK SC"/>
-                        </a:defRPr>
-                      </a:pPr>
-                      <a:r>
-                        <a:t>60</a:t>
-                      </a:r>
-                    </a:p>
-                  </a:txBody>
-                  <a:tcPr marL="64008" marR="54864" marT="22860" marB="22860" anchor="ctr">
-                    <a:solidFill>
-                      <a:srgbClr val="FFFFFF"/>
-                    </a:solidFill>
-                    <a:lnL w="6350">
-                      <a:solidFill>
-                        <a:srgbClr val="555555"/>
-                      </a:solidFill>
-                    </a:lnL>
-                    <a:lnR w="6350">
-                      <a:solidFill>
-                        <a:srgbClr val="555555"/>
-                      </a:solidFill>
-                    </a:lnR>
-                    <a:lnT w="6350">
-                      <a:solidFill>
-                        <a:srgbClr val="555555"/>
-                      </a:solidFill>
-                    </a:lnT>
-                    <a:lnB w="6350">
-                      <a:solidFill>
-                        <a:srgbClr val="555555"/>
-                      </a:solidFill>
-                    </a:lnB>
-                  </a:tcPr>
-                </a:tc>
-              </a:tr>
-              <a:tr h="419792">
-                <a:tc>
-                  <a:txBody>
-                    <a:bodyPr/>
-                    <a:lstStyle/>
-                    <a:p>
-                      <a:pPr algn="l">
-                        <a:lnSpc>
-                          <a:spcPct val="100000"/>
-                        </a:lnSpc>
-                        <a:spcAft>
-                          <a:spcPts val="0"/>
-                        </a:spcAft>
-                        <a:defRPr sz="1350" b="0">
-                          <a:solidFill>
-                            <a:srgbClr val="111111"/>
-                          </a:solidFill>
-                          <a:latin typeface="Noto Serif CJK SC"/>
-                        </a:defRPr>
-                      </a:pPr>
-                      <a:r>
-                        <a:t>固液界面 / 空位诱导熔化</a:t>
-                      </a:r>
-                    </a:p>
-                  </a:txBody>
-                  <a:tcPr marL="64008" marR="54864" marT="22860" marB="22860" anchor="ctr">
-                    <a:solidFill>
-                      <a:srgbClr val="FFFFFF"/>
-                    </a:solidFill>
-                    <a:lnL w="6350">
-                      <a:solidFill>
-                        <a:srgbClr val="555555"/>
-                      </a:solidFill>
-                    </a:lnL>
-                    <a:lnR w="6350">
-                      <a:solidFill>
-                        <a:srgbClr val="555555"/>
-                      </a:solidFill>
-                    </a:lnR>
-                    <a:lnT w="6350">
-                      <a:solidFill>
-                        <a:srgbClr val="555555"/>
-                      </a:solidFill>
-                    </a:lnT>
-                    <a:lnB w="6350">
-                      <a:solidFill>
-                        <a:srgbClr val="555555"/>
-                      </a:solidFill>
-                    </a:lnB>
-                  </a:tcPr>
-                </a:tc>
-                <a:tc>
-                  <a:txBody>
-                    <a:bodyPr/>
-                    <a:lstStyle/>
-                    <a:p>
-                      <a:pPr algn="l">
-                        <a:lnSpc>
-                          <a:spcPct val="100000"/>
-                        </a:lnSpc>
-                        <a:spcAft>
-                          <a:spcPts val="0"/>
-                        </a:spcAft>
-                        <a:defRPr sz="1350" b="0">
-                          <a:solidFill>
-                            <a:srgbClr val="111111"/>
-                          </a:solidFill>
-                          <a:latin typeface="Noto Serif CJK SC"/>
-                        </a:defRPr>
-                      </a:pPr>
-                      <a:r>
-                        <a:t>10</a:t>
-                      </a:r>
-                    </a:p>
-                  </a:txBody>
-                  <a:tcPr marL="64008" marR="54864" marT="22860" marB="22860" anchor="ctr">
-                    <a:solidFill>
-                      <a:srgbClr val="FFFFFF"/>
-                    </a:solidFill>
-                    <a:lnL w="6350">
-                      <a:solidFill>
-                        <a:srgbClr val="555555"/>
-                      </a:solidFill>
-                    </a:lnL>
-                    <a:lnR w="6350">
-                      <a:solidFill>
-                        <a:srgbClr val="555555"/>
-                      </a:solidFill>
-                    </a:lnR>
-                    <a:lnT w="6350">
-                      <a:solidFill>
-                        <a:srgbClr val="555555"/>
-                      </a:solidFill>
-                    </a:lnT>
-                    <a:lnB w="6350">
-                      <a:solidFill>
-                        <a:srgbClr val="555555"/>
-                      </a:solidFill>
-                    </a:lnB>
-                  </a:tcPr>
-                </a:tc>
-                <a:tc>
-                  <a:txBody>
-                    <a:bodyPr/>
-                    <a:lstStyle/>
-                    <a:p>
-                      <a:pPr algn="l">
-                        <a:lnSpc>
-                          <a:spcPct val="100000"/>
-                        </a:lnSpc>
-                        <a:spcAft>
-                          <a:spcPts val="0"/>
-                        </a:spcAft>
-                        <a:defRPr sz="1350" b="0">
-                          <a:solidFill>
-                            <a:srgbClr val="111111"/>
-                          </a:solidFill>
-                          <a:latin typeface="Noto Serif CJK SC"/>
-                        </a:defRPr>
-                      </a:pPr>
-                      <a:r>
-                        <a:t>6</a:t>
-                      </a:r>
-                    </a:p>
-                  </a:txBody>
-                  <a:tcPr marL="64008" marR="54864" marT="22860" marB="22860" anchor="ctr">
-                    <a:solidFill>
-                      <a:srgbClr val="FFFFFF"/>
-                    </a:solidFill>
-                    <a:lnL w="6350">
-                      <a:solidFill>
-                        <a:srgbClr val="555555"/>
-                      </a:solidFill>
-                    </a:lnL>
-                    <a:lnR w="6350">
-                      <a:solidFill>
-                        <a:srgbClr val="555555"/>
-                      </a:solidFill>
-                    </a:lnR>
-                    <a:lnT w="6350">
-                      <a:solidFill>
-                        <a:srgbClr val="555555"/>
-                      </a:solidFill>
-                    </a:lnT>
-                    <a:lnB w="6350">
-                      <a:solidFill>
-                        <a:srgbClr val="555555"/>
-                      </a:solidFill>
-                    </a:lnB>
-                  </a:tcPr>
-                </a:tc>
-                <a:tc>
-                  <a:txBody>
-                    <a:bodyPr/>
-                    <a:lstStyle/>
-                    <a:p>
-                      <a:pPr algn="l">
-                        <a:lnSpc>
-                          <a:spcPct val="100000"/>
-                        </a:lnSpc>
-                        <a:spcAft>
-                          <a:spcPts val="0"/>
-                        </a:spcAft>
-                        <a:defRPr sz="1350" b="0">
-                          <a:solidFill>
-                            <a:srgbClr val="111111"/>
-                          </a:solidFill>
-                          <a:latin typeface="Noto Serif CJK SC"/>
-                        </a:defRPr>
-                      </a:pPr>
-                      <a:r>
-                        <a:t>60</a:t>
-                      </a:r>
-                    </a:p>
-                  </a:txBody>
-                  <a:tcPr marL="64008" marR="54864" marT="22860" marB="22860" anchor="ctr">
-                    <a:solidFill>
-                      <a:srgbClr val="FFFFFF"/>
-                    </a:solidFill>
-                    <a:lnL w="6350">
-                      <a:solidFill>
-                        <a:srgbClr val="555555"/>
-                      </a:solidFill>
-                    </a:lnL>
-                    <a:lnR w="6350">
-                      <a:solidFill>
-                        <a:srgbClr val="555555"/>
-                      </a:solidFill>
-                    </a:lnR>
-                    <a:lnT w="6350">
-                      <a:solidFill>
-                        <a:srgbClr val="555555"/>
-                      </a:solidFill>
-                    </a:lnT>
-                    <a:lnB w="6350">
-                      <a:solidFill>
-                        <a:srgbClr val="555555"/>
-                      </a:solidFill>
-                    </a:lnB>
-                  </a:tcPr>
-                </a:tc>
-              </a:tr>
-              <a:tr h="419792">
-                <a:tc>
-                  <a:txBody>
-                    <a:bodyPr/>
-                    <a:lstStyle/>
-                    <a:p>
-                      <a:pPr algn="l">
-                        <a:lnSpc>
-                          <a:spcPct val="100000"/>
-                        </a:lnSpc>
-                        <a:spcAft>
-                          <a:spcPts val="0"/>
-                        </a:spcAft>
-                        <a:defRPr sz="1350" b="0">
-                          <a:solidFill>
-                            <a:srgbClr val="111111"/>
-                          </a:solidFill>
-                          <a:latin typeface="Noto Serif CJK SC"/>
-                        </a:defRPr>
-                      </a:pPr>
-                      <a:r>
-                        <a:t>迁移路径中间态</a:t>
-                      </a:r>
-                    </a:p>
-                  </a:txBody>
-                  <a:tcPr marL="64008" marR="54864" marT="22860" marB="22860" anchor="ctr">
-                    <a:solidFill>
-                      <a:srgbClr val="FFFFFF"/>
-                    </a:solidFill>
-                    <a:lnL w="6350">
-                      <a:solidFill>
-                        <a:srgbClr val="555555"/>
-                      </a:solidFill>
-                    </a:lnL>
-                    <a:lnR w="6350">
-                      <a:solidFill>
-                        <a:srgbClr val="555555"/>
-                      </a:solidFill>
-                    </a:lnR>
-                    <a:lnT w="6350">
-                      <a:solidFill>
-                        <a:srgbClr val="555555"/>
-                      </a:solidFill>
-                    </a:lnT>
-                    <a:lnB w="6350">
-                      <a:solidFill>
-                        <a:srgbClr val="555555"/>
-                      </a:solidFill>
-                    </a:lnB>
-                  </a:tcPr>
-                </a:tc>
-                <a:tc>
-                  <a:txBody>
-                    <a:bodyPr/>
-                    <a:lstStyle/>
-                    <a:p>
-                      <a:pPr algn="l">
-                        <a:lnSpc>
-                          <a:spcPct val="100000"/>
-                        </a:lnSpc>
-                        <a:spcAft>
-                          <a:spcPts val="0"/>
-                        </a:spcAft>
-                        <a:defRPr sz="1350" b="0">
-                          <a:solidFill>
-                            <a:srgbClr val="111111"/>
-                          </a:solidFill>
-                          <a:latin typeface="Noto Serif CJK SC"/>
-                        </a:defRPr>
-                      </a:pPr>
-                      <a:r>
-                        <a:t>15</a:t>
-                      </a:r>
-                    </a:p>
-                  </a:txBody>
-                  <a:tcPr marL="64008" marR="54864" marT="22860" marB="22860" anchor="ctr">
-                    <a:solidFill>
-                      <a:srgbClr val="FFFFFF"/>
-                    </a:solidFill>
-                    <a:lnL w="6350">
-                      <a:solidFill>
-                        <a:srgbClr val="555555"/>
-                      </a:solidFill>
-                    </a:lnL>
-                    <a:lnR w="6350">
-                      <a:solidFill>
-                        <a:srgbClr val="555555"/>
-                      </a:solidFill>
-                    </a:lnR>
-                    <a:lnT w="6350">
-                      <a:solidFill>
-                        <a:srgbClr val="555555"/>
-                      </a:solidFill>
-                    </a:lnT>
-                    <a:lnB w="6350">
-                      <a:solidFill>
-                        <a:srgbClr val="555555"/>
-                      </a:solidFill>
-                    </a:lnB>
-                  </a:tcPr>
-                </a:tc>
-                <a:tc>
-                  <a:txBody>
-                    <a:bodyPr/>
-                    <a:lstStyle/>
-                    <a:p>
-                      <a:pPr algn="l">
-                        <a:lnSpc>
-                          <a:spcPct val="100000"/>
-                        </a:lnSpc>
-                        <a:spcAft>
-                          <a:spcPts val="0"/>
-                        </a:spcAft>
-                        <a:defRPr sz="1350" b="0">
-                          <a:solidFill>
-                            <a:srgbClr val="111111"/>
-                          </a:solidFill>
-                          <a:latin typeface="Noto Serif CJK SC"/>
-                        </a:defRPr>
-                      </a:pPr>
-                      <a:r>
-                        <a:t>6</a:t>
-                      </a:r>
-                    </a:p>
-                  </a:txBody>
-                  <a:tcPr marL="64008" marR="54864" marT="22860" marB="22860" anchor="ctr">
-                    <a:solidFill>
-                      <a:srgbClr val="FFFFFF"/>
-                    </a:solidFill>
-                    <a:lnL w="6350">
-                      <a:solidFill>
-                        <a:srgbClr val="555555"/>
-                      </a:solidFill>
-                    </a:lnL>
-                    <a:lnR w="6350">
-                      <a:solidFill>
-                        <a:srgbClr val="555555"/>
-                      </a:solidFill>
-                    </a:lnR>
-                    <a:lnT w="6350">
-                      <a:solidFill>
-                        <a:srgbClr val="555555"/>
-                      </a:solidFill>
-                    </a:lnT>
-                    <a:lnB w="6350">
-                      <a:solidFill>
-                        <a:srgbClr val="555555"/>
-                      </a:solidFill>
-                    </a:lnB>
-                  </a:tcPr>
-                </a:tc>
-                <a:tc>
-                  <a:txBody>
-                    <a:bodyPr/>
-                    <a:lstStyle/>
-                    <a:p>
-                      <a:pPr algn="l">
-                        <a:lnSpc>
-                          <a:spcPct val="100000"/>
-                        </a:lnSpc>
-                        <a:spcAft>
-                          <a:spcPts val="0"/>
-                        </a:spcAft>
-                        <a:defRPr sz="1350" b="0">
-                          <a:solidFill>
-                            <a:srgbClr val="111111"/>
-                          </a:solidFill>
-                          <a:latin typeface="Noto Serif CJK SC"/>
-                        </a:defRPr>
-                      </a:pPr>
-                      <a:r>
-                        <a:t>90</a:t>
-                      </a:r>
-                    </a:p>
-                  </a:txBody>
-                  <a:tcPr marL="64008" marR="54864" marT="22860" marB="22860" anchor="ctr">
-                    <a:solidFill>
-                      <a:srgbClr val="FFFFFF"/>
-                    </a:solidFill>
-                    <a:lnL w="6350">
-                      <a:solidFill>
-                        <a:srgbClr val="555555"/>
-                      </a:solidFill>
-                    </a:lnL>
-                    <a:lnR w="6350">
-                      <a:solidFill>
-                        <a:srgbClr val="555555"/>
-                      </a:solidFill>
-                    </a:lnR>
-                    <a:lnT w="6350">
-                      <a:solidFill>
-                        <a:srgbClr val="555555"/>
-                      </a:solidFill>
-                    </a:lnT>
-                    <a:lnB w="6350">
-                      <a:solidFill>
-                        <a:srgbClr val="555555"/>
-                      </a:solidFill>
-                    </a:lnB>
-                  </a:tcPr>
-                </a:tc>
-              </a:tr>
-              <a:tr h="419800">
-                <a:tc>
-                  <a:txBody>
-                    <a:bodyPr/>
-                    <a:lstStyle/>
-                    <a:p>
-                      <a:pPr algn="l">
-                        <a:lnSpc>
-                          <a:spcPct val="100000"/>
-                        </a:lnSpc>
-                        <a:spcAft>
-                          <a:spcPts val="0"/>
-                        </a:spcAft>
-                        <a:defRPr sz="1350" b="0">
-                          <a:solidFill>
-                            <a:srgbClr val="111111"/>
-                          </a:solidFill>
-                          <a:latin typeface="Noto Serif CJK SC"/>
-                        </a:defRPr>
-                      </a:pPr>
-                      <a:r>
-                        <a:t>合计</a:t>
-                      </a:r>
-                    </a:p>
-                  </a:txBody>
-                  <a:tcPr marL="64008" marR="54864" marT="22860" marB="22860" anchor="ctr">
-                    <a:solidFill>
-                      <a:srgbClr val="FFFFFF"/>
-                    </a:solidFill>
-                    <a:lnL w="6350">
-                      <a:solidFill>
-                        <a:srgbClr val="555555"/>
-                      </a:solidFill>
-                    </a:lnL>
-                    <a:lnR w="6350">
-                      <a:solidFill>
-                        <a:srgbClr val="555555"/>
-                      </a:solidFill>
-                    </a:lnR>
-                    <a:lnT w="6350">
-                      <a:solidFill>
-                        <a:srgbClr val="555555"/>
-                      </a:solidFill>
-                    </a:lnT>
-                    <a:lnB w="6350">
-                      <a:solidFill>
-                        <a:srgbClr val="555555"/>
-                      </a:solidFill>
-                    </a:lnB>
-                  </a:tcPr>
-                </a:tc>
-                <a:tc>
-                  <a:txBody>
-                    <a:bodyPr/>
-                    <a:lstStyle/>
-                    <a:p>
-                      <a:pPr algn="l">
-                        <a:lnSpc>
-                          <a:spcPct val="100000"/>
-                        </a:lnSpc>
-                        <a:spcAft>
-                          <a:spcPts val="0"/>
-                        </a:spcAft>
-                        <a:defRPr sz="1350" b="0">
-                          <a:solidFill>
-                            <a:srgbClr val="111111"/>
-                          </a:solidFill>
-                          <a:latin typeface="Noto Serif CJK SC"/>
-                        </a:defRPr>
-                      </a:pPr>
-                      <a:r>
-                        <a:t>120</a:t>
-                      </a:r>
-                    </a:p>
-                  </a:txBody>
-                  <a:tcPr marL="64008" marR="54864" marT="22860" marB="22860" anchor="ctr">
-                    <a:solidFill>
-                      <a:srgbClr val="FFFFFF"/>
-                    </a:solidFill>
-                    <a:lnL w="6350">
-                      <a:solidFill>
-                        <a:srgbClr val="555555"/>
-                      </a:solidFill>
-                    </a:lnL>
-                    <a:lnR w="6350">
-                      <a:solidFill>
-                        <a:srgbClr val="555555"/>
-                      </a:solidFill>
-                    </a:lnR>
-                    <a:lnT w="6350">
-                      <a:solidFill>
-                        <a:srgbClr val="555555"/>
-                      </a:solidFill>
-                    </a:lnT>
-                    <a:lnB w="6350">
-                      <a:solidFill>
-                        <a:srgbClr val="555555"/>
-                      </a:solidFill>
-                    </a:lnB>
-                  </a:tcPr>
-                </a:tc>
-                <a:tc>
-                  <a:txBody>
-                    <a:bodyPr/>
-                    <a:lstStyle/>
-                    <a:p>
-                      <a:pPr algn="l">
-                        <a:lnSpc>
-                          <a:spcPct val="100000"/>
-                        </a:lnSpc>
-                        <a:spcAft>
-                          <a:spcPts val="0"/>
-                        </a:spcAft>
-                        <a:defRPr sz="1350" b="0">
-                          <a:solidFill>
-                            <a:srgbClr val="111111"/>
-                          </a:solidFill>
-                          <a:latin typeface="Noto Serif CJK SC"/>
-                        </a:defRPr>
-                      </a:pPr>
-                      <a:r>
-                        <a:t>6</a:t>
-                      </a:r>
-                    </a:p>
-                  </a:txBody>
-                  <a:tcPr marL="64008" marR="54864" marT="22860" marB="22860" anchor="ctr">
-                    <a:solidFill>
-                      <a:srgbClr val="FFFFFF"/>
-                    </a:solidFill>
-                    <a:lnL w="6350">
-                      <a:solidFill>
-                        <a:srgbClr val="555555"/>
-                      </a:solidFill>
-                    </a:lnL>
-                    <a:lnR w="6350">
-                      <a:solidFill>
-                        <a:srgbClr val="555555"/>
-                      </a:solidFill>
-                    </a:lnR>
-                    <a:lnT w="6350">
-                      <a:solidFill>
-                        <a:srgbClr val="555555"/>
-                      </a:solidFill>
-                    </a:lnT>
-                    <a:lnB w="6350">
-                      <a:solidFill>
-                        <a:srgbClr val="555555"/>
-                      </a:solidFill>
-                    </a:lnB>
-                  </a:tcPr>
-                </a:tc>
-                <a:tc>
-                  <a:txBody>
-                    <a:bodyPr/>
-                    <a:lstStyle/>
-                    <a:p>
-                      <a:pPr algn="l">
-                        <a:lnSpc>
-                          <a:spcPct val="100000"/>
-                        </a:lnSpc>
-                        <a:spcAft>
-                          <a:spcPts val="0"/>
-                        </a:spcAft>
-                        <a:defRPr sz="1350" b="0">
+                        <a:defRPr sz="1280" b="0">
                           <a:solidFill>
                             <a:srgbClr val="111111"/>
                           </a:solidFill>
@@ -7884,8 +7884,8 @@
           <p:nvPr/>
         </p:nvGraphicFramePr>
         <p:xfrm>
-          <a:off x="6876288" y="1463040"/>
-          <a:ext cx="5074918" cy="3520440"/>
+          <a:off x="7571231" y="1435608"/>
+          <a:ext cx="4407407" cy="3520440"/>
         </p:xfrm>
         <a:graphic>
           <a:graphicData uri="http://schemas.openxmlformats.org/drawingml/2006/table">
@@ -7894,9 +7894,9 @@
                 <a:tableStyleId>{5C22544A-7EE6-4342-B048-85BDC9FD1C3A}</a:tableStyleId>
               </a:tblPr>
               <a:tblGrid>
-                <a:gridCol w="1522475"/>
-                <a:gridCol w="1826971"/>
-                <a:gridCol w="1725472"/>
+                <a:gridCol w="1410370"/>
+                <a:gridCol w="1674815"/>
+                <a:gridCol w="1322222"/>
               </a:tblGrid>
               <a:tr h="440055">
                 <a:tc>
@@ -7911,7 +7911,7 @@
                         <a:spcAft>
                           <a:spcPts val="0"/>
                         </a:spcAft>
-                        <a:defRPr sz="1500" b="1">
+                        <a:defRPr sz="1400" b="1">
                           <a:solidFill>
                             <a:srgbClr val="111111"/>
                           </a:solidFill>
@@ -7961,7 +7961,7 @@
                         <a:spcAft>
                           <a:spcPts val="0"/>
                         </a:spcAft>
-                        <a:defRPr sz="1500" b="1">
+                        <a:defRPr sz="1400" b="1">
                           <a:solidFill>
                             <a:srgbClr val="111111"/>
                           </a:solidFill>
@@ -8011,15 +8011,15 @@
                         <a:spcAft>
                           <a:spcPts val="0"/>
                         </a:spcAft>
-                        <a:defRPr sz="1500" b="1">
-                          <a:solidFill>
-                            <a:srgbClr val="111111"/>
-                          </a:solidFill>
-                          <a:latin typeface="Noto Serif CJK SC"/>
-                        </a:defRPr>
-                      </a:pPr>
-                      <a:r>
-                        <a:t>标注组数</a:t>
+                        <a:defRPr sz="1400" b="1">
+                          <a:solidFill>
+                            <a:srgbClr val="111111"/>
+                          </a:solidFill>
+                          <a:latin typeface="Noto Serif CJK SC"/>
+                        </a:defRPr>
+                      </a:pPr>
+                      <a:r>
+                        <a:t>标注数</a:t>
                       </a:r>
                     </a:p>
                   </a:txBody>
@@ -8063,7 +8063,7 @@
                         <a:spcAft>
                           <a:spcPts val="0"/>
                         </a:spcAft>
-                        <a:defRPr sz="1500" b="0">
+                        <a:defRPr sz="1400" b="0">
                           <a:solidFill>
                             <a:srgbClr val="111111"/>
                           </a:solidFill>
@@ -8113,7 +8113,7 @@
                         <a:spcAft>
                           <a:spcPts val="0"/>
                         </a:spcAft>
-                        <a:defRPr sz="1500" b="0">
+                        <a:defRPr sz="1400" b="0">
                           <a:solidFill>
                             <a:srgbClr val="111111"/>
                           </a:solidFill>
@@ -8163,7 +8163,7 @@
                         <a:spcAft>
                           <a:spcPts val="0"/>
                         </a:spcAft>
-                        <a:defRPr sz="1500" b="0">
+                        <a:defRPr sz="1400" b="0">
                           <a:solidFill>
                             <a:srgbClr val="111111"/>
                           </a:solidFill>
@@ -8215,7 +8215,7 @@
                         <a:spcAft>
                           <a:spcPts val="0"/>
                         </a:spcAft>
-                        <a:defRPr sz="1500" b="0">
+                        <a:defRPr sz="1400" b="0">
                           <a:solidFill>
                             <a:srgbClr val="111111"/>
                           </a:solidFill>
@@ -8265,7 +8265,7 @@
                         <a:spcAft>
                           <a:spcPts val="0"/>
                         </a:spcAft>
-                        <a:defRPr sz="1500" b="0">
+                        <a:defRPr sz="1400" b="0">
                           <a:solidFill>
                             <a:srgbClr val="111111"/>
                           </a:solidFill>
@@ -8315,7 +8315,7 @@
                         <a:spcAft>
                           <a:spcPts val="0"/>
                         </a:spcAft>
-                        <a:defRPr sz="1500" b="0">
+                        <a:defRPr sz="1400" b="0">
                           <a:solidFill>
                             <a:srgbClr val="111111"/>
                           </a:solidFill>
@@ -8367,7 +8367,7 @@
                         <a:spcAft>
                           <a:spcPts val="0"/>
                         </a:spcAft>
-                        <a:defRPr sz="1500" b="0">
+                        <a:defRPr sz="1400" b="0">
                           <a:solidFill>
                             <a:srgbClr val="111111"/>
                           </a:solidFill>
@@ -8417,7 +8417,7 @@
                         <a:spcAft>
                           <a:spcPts val="0"/>
                         </a:spcAft>
-                        <a:defRPr sz="1500" b="0">
+                        <a:defRPr sz="1400" b="0">
                           <a:solidFill>
                             <a:srgbClr val="111111"/>
                           </a:solidFill>
@@ -8467,7 +8467,7 @@
                         <a:spcAft>
                           <a:spcPts val="0"/>
                         </a:spcAft>
-                        <a:defRPr sz="1500" b="0">
+                        <a:defRPr sz="1400" b="0">
                           <a:solidFill>
                             <a:srgbClr val="111111"/>
                           </a:solidFill>
@@ -8519,7 +8519,7 @@
                         <a:spcAft>
                           <a:spcPts val="0"/>
                         </a:spcAft>
-                        <a:defRPr sz="1500" b="0">
+                        <a:defRPr sz="1400" b="0">
                           <a:solidFill>
                             <a:srgbClr val="111111"/>
                           </a:solidFill>
@@ -8569,7 +8569,7 @@
                         <a:spcAft>
                           <a:spcPts val="0"/>
                         </a:spcAft>
-                        <a:defRPr sz="1500" b="0">
+                        <a:defRPr sz="1400" b="0">
                           <a:solidFill>
                             <a:srgbClr val="111111"/>
                           </a:solidFill>
@@ -8619,7 +8619,7 @@
                         <a:spcAft>
                           <a:spcPts val="0"/>
                         </a:spcAft>
-                        <a:defRPr sz="1500" b="0">
+                        <a:defRPr sz="1400" b="0">
                           <a:solidFill>
                             <a:srgbClr val="111111"/>
                           </a:solidFill>
@@ -8671,7 +8671,7 @@
                         <a:spcAft>
                           <a:spcPts val="0"/>
                         </a:spcAft>
-                        <a:defRPr sz="1500" b="0">
+                        <a:defRPr sz="1400" b="0">
                           <a:solidFill>
                             <a:srgbClr val="111111"/>
                           </a:solidFill>
@@ -8721,7 +8721,7 @@
                         <a:spcAft>
                           <a:spcPts val="0"/>
                         </a:spcAft>
-                        <a:defRPr sz="1500" b="0">
+                        <a:defRPr sz="1400" b="0">
                           <a:solidFill>
                             <a:srgbClr val="111111"/>
                           </a:solidFill>
@@ -8771,7 +8771,7 @@
                         <a:spcAft>
                           <a:spcPts val="0"/>
                         </a:spcAft>
-                        <a:defRPr sz="1500" b="0">
+                        <a:defRPr sz="1400" b="0">
                           <a:solidFill>
                             <a:srgbClr val="111111"/>
                           </a:solidFill>
@@ -8823,7 +8823,7 @@
                         <a:spcAft>
                           <a:spcPts val="0"/>
                         </a:spcAft>
-                        <a:defRPr sz="1500" b="0">
+                        <a:defRPr sz="1400" b="0">
                           <a:solidFill>
                             <a:srgbClr val="111111"/>
                           </a:solidFill>
@@ -8873,7 +8873,7 @@
                         <a:spcAft>
                           <a:spcPts val="0"/>
                         </a:spcAft>
-                        <a:defRPr sz="1500" b="0">
+                        <a:defRPr sz="1400" b="0">
                           <a:solidFill>
                             <a:srgbClr val="111111"/>
                           </a:solidFill>
@@ -8923,7 +8923,7 @@
                         <a:spcAft>
                           <a:spcPts val="0"/>
                         </a:spcAft>
-                        <a:defRPr sz="1500" b="0">
+                        <a:defRPr sz="1400" b="0">
                           <a:solidFill>
                             <a:srgbClr val="111111"/>
                           </a:solidFill>
@@ -8975,7 +8975,7 @@
                         <a:spcAft>
                           <a:spcPts val="0"/>
                         </a:spcAft>
-                        <a:defRPr sz="1500" b="0">
+                        <a:defRPr sz="1400" b="0">
                           <a:solidFill>
                             <a:srgbClr val="111111"/>
                           </a:solidFill>
@@ -9025,15 +9025,15 @@
                         <a:spcAft>
                           <a:spcPts val="0"/>
                         </a:spcAft>
-                        <a:defRPr sz="1500" b="0">
-                          <a:solidFill>
-                            <a:srgbClr val="111111"/>
-                          </a:solidFill>
-                          <a:latin typeface="Noto Serif CJK SC"/>
-                        </a:defRPr>
-                      </a:pPr>
-                      <a:r>
-                        <a:t>6 个温度</a:t>
+                        <a:defRPr sz="1400" b="0">
+                          <a:solidFill>
+                            <a:srgbClr val="111111"/>
+                          </a:solidFill>
+                          <a:latin typeface="Noto Serif CJK SC"/>
+                        </a:defRPr>
+                      </a:pPr>
+                      <a:r>
+                        <a:t>6个温度</a:t>
                       </a:r>
                     </a:p>
                   </a:txBody>
@@ -9075,15 +9075,15 @@
                         <a:spcAft>
                           <a:spcPts val="0"/>
                         </a:spcAft>
-                        <a:defRPr sz="1500" b="0">
-                          <a:solidFill>
-                            <a:srgbClr val="111111"/>
-                          </a:solidFill>
-                          <a:latin typeface="Noto Serif CJK SC"/>
-                        </a:defRPr>
-                      </a:pPr>
-                      <a:r>
-                        <a:t>720 组标签</a:t>
+                        <a:defRPr sz="1400" b="0">
+                          <a:solidFill>
+                            <a:srgbClr val="111111"/>
+                          </a:solidFill>
+                          <a:latin typeface="Noto Serif CJK SC"/>
+                        </a:defRPr>
+                      </a:pPr>
+                      <a:r>
+                        <a:t>720</a:t>
                       </a:r>
                     </a:p>
                   </a:txBody>
@@ -9126,8 +9126,8 @@
         </p:nvSpPr>
         <p:spPr>
           <a:xfrm>
-            <a:off x="6931152" y="5230368"/>
-            <a:ext cx="4937760" cy="731520"/>
+            <a:off x="7607808" y="5212080"/>
+            <a:ext cx="4297680" cy="777240"/>
           </a:xfrm>
           <a:prstGeom prst="rect">
             <a:avLst/>
@@ -9147,7 +9147,7 @@
               <a:spcAft>
                 <a:spcPts val="0"/>
               </a:spcAft>
-              <a:defRPr sz="1600" b="0">
+              <a:defRPr sz="1500" b="0">
                 <a:solidFill>
                   <a:srgbClr val="002060"/>
                 </a:solidFill>
@@ -9155,7 +9155,26 @@
               </a:defRPr>
             </a:pPr>
             <a:r>
-              <a:t>固定 R、晶胞和原子数，仅改变 Tₑ；不在每个 Tₑ 重新弛豫同一锚点。</a:t>
+              <a:t>同一 R 不随 Tₑ 重弛豫。</a:t>
+            </a:r>
+          </a:p>
+          <a:p>
+            <a:pPr algn="l">
+              <a:lnSpc>
+                <a:spcPct val="100000"/>
+              </a:lnSpc>
+              <a:spcAft>
+                <a:spcPts val="0"/>
+              </a:spcAft>
+              <a:defRPr sz="1500" b="0">
+                <a:solidFill>
+                  <a:srgbClr val="002060"/>
+                </a:solidFill>
+                <a:latin typeface="Noto Serif CJK SC"/>
+              </a:defRPr>
+            </a:pPr>
+            <a:r>
+              <a:t>跨类重复只计一次；不足按原生成规则补足。</a:t>
             </a:r>
           </a:p>
         </p:txBody>
@@ -9197,7 +9216,7 @@
               </a:defRPr>
             </a:pPr>
             <a:r>
-              <a:t>图表：沿用原模板并列统计表。数量为建议预算；跨类去重，路径端点不重复计数。高 Tₑ 范围经试算后调整。</a:t>
+              <a:t>图表：原模板并列数量表。路径端点归母构型，不重复计数；固定R多Tₑ标签保持在同一结构数据分组。</a:t>
             </a:r>
           </a:p>
         </p:txBody>
@@ -9270,7 +9289,7 @@
               </a:defRPr>
             </a:pPr>
             <a:r>
-              <a:t>数据产生｜构型生成 + 固定结构多 Tₑ 标注</a:t>
+              <a:t>数据产生Ⅰ｜晶相、缺陷与表面的具体做法</a:t>
             </a:r>
           </a:p>
         </p:txBody>
@@ -9327,8 +9346,8 @@
           <p:nvPr/>
         </p:nvGraphicFramePr>
         <p:xfrm>
-          <a:off x="219456" y="1115568"/>
-          <a:ext cx="11740895" cy="4956048"/>
+          <a:off x="182880" y="1078992"/>
+          <a:ext cx="11832335" cy="5074920"/>
         </p:xfrm>
         <a:graphic>
           <a:graphicData uri="http://schemas.openxmlformats.org/drawingml/2006/table">
@@ -9337,11 +9356,11 @@
                 <a:tableStyleId>{5C22544A-7EE6-4342-B048-85BDC9FD1C3A}</a:tableStyleId>
               </a:tblPr>
               <a:tblGrid>
-                <a:gridCol w="2113361"/>
-                <a:gridCol w="2817815"/>
-                <a:gridCol w="6809719"/>
+                <a:gridCol w="2011497"/>
+                <a:gridCol w="2721437"/>
+                <a:gridCol w="7099401"/>
               </a:tblGrid>
-              <a:tr h="826008">
+              <a:tr h="845820">
                 <a:tc>
                   <a:txBody>
                     <a:bodyPr/>
@@ -9354,7 +9373,7 @@
                         <a:spcAft>
                           <a:spcPts val="0"/>
                         </a:spcAft>
-                        <a:defRPr sz="1500" b="1">
+                        <a:defRPr sz="1450" b="1">
                           <a:solidFill>
                             <a:srgbClr val="111111"/>
                           </a:solidFill>
@@ -9404,7 +9423,7 @@
                         <a:spcAft>
                           <a:spcPts val="0"/>
                         </a:spcAft>
-                        <a:defRPr sz="1500" b="1">
+                        <a:defRPr sz="1450" b="1">
                           <a:solidFill>
                             <a:srgbClr val="111111"/>
                           </a:solidFill>
@@ -9454,7 +9473,7 @@
                         <a:spcAft>
                           <a:spcPts val="0"/>
                         </a:spcAft>
-                        <a:defRPr sz="1500" b="1">
+                        <a:defRPr sz="1450" b="1">
                           <a:solidFill>
                             <a:srgbClr val="111111"/>
                           </a:solidFill>
@@ -9493,7 +9512,7 @@
                   </a:tcPr>
                 </a:tc>
               </a:tr>
-              <a:tr h="826008">
+              <a:tr h="845820">
                 <a:tc>
                   <a:txBody>
                     <a:bodyPr/>
@@ -9506,15 +9525,15 @@
                         <a:spcAft>
                           <a:spcPts val="0"/>
                         </a:spcAft>
-                        <a:defRPr sz="1500" b="0">
-                          <a:solidFill>
-                            <a:srgbClr val="111111"/>
-                          </a:solidFill>
-                          <a:latin typeface="Noto Serif CJK SC"/>
-                        </a:defRPr>
-                      </a:pPr>
-                      <a:r>
-                        <a:t>晶相、扰动与应变</a:t>
+                        <a:defRPr sz="1450" b="0">
+                          <a:solidFill>
+                            <a:srgbClr val="111111"/>
+                          </a:solidFill>
+                          <a:latin typeface="Noto Serif CJK SC"/>
+                        </a:defRPr>
+                      </a:pPr>
+                      <a:r>
+                        <a:t>晶相参考｜20</a:t>
                       </a:r>
                     </a:p>
                   </a:txBody>
@@ -9556,15 +9575,15 @@
                         <a:spcAft>
                           <a:spcPts val="0"/>
                         </a:spcAft>
-                        <a:defRPr sz="1500" b="0">
-                          <a:solidFill>
-                            <a:srgbClr val="111111"/>
-                          </a:solidFill>
-                          <a:latin typeface="Noto Serif CJK SC"/>
-                        </a:defRPr>
-                      </a:pPr>
-                      <a:r>
-                        <a:t>代表晶胞 + 小幅缩放 / 扰动</a:t>
+                        <a:defRPr sz="1450" b="0">
+                          <a:solidFill>
+                            <a:srgbClr val="111111"/>
+                          </a:solidFill>
+                          <a:latin typeface="Noto Serif CJK SC"/>
+                        </a:defRPr>
+                      </a:pPr>
+                      <a:r>
+                        <a:t>5 个晶相 × 4 个体积点</a:t>
                       </a:r>
                     </a:p>
                   </a:txBody>
@@ -9606,15 +9625,15 @@
                         <a:spcAft>
                           <a:spcPts val="0"/>
                         </a:spcAft>
-                        <a:defRPr sz="1500" b="0">
-                          <a:solidFill>
-                            <a:srgbClr val="111111"/>
-                          </a:solidFill>
-                          <a:latin typeface="Noto Serif CJK SC"/>
-                        </a:defRPr>
-                      </a:pPr>
-                      <a:r>
-                        <a:t>各相以适用密度为中心；选择体积、剪切与独立随机扰动。先取少量差异明显的结构，不穷举相 / 缺陷组合。</a:t>
+                        <a:defRPr sz="1450" b="0">
+                          <a:solidFill>
+                            <a:srgbClr val="111111"/>
+                          </a:solidFill>
+                          <a:latin typeface="Noto Serif CJK SC"/>
+                        </a:defRPr>
+                      </a:pPr>
+                      <a:r>
+                        <a:t>导入dc/β-Sn/sh/BC8/R8；dc、BC8/R8以0 GPa，β-Sn以12 GPa，sh以20 GPa试弛豫。再线性缩放 s=0.97/0.99/1.01/1.03、固定分数坐标；5×4=20。</a:t>
                       </a:r>
                     </a:p>
                   </a:txBody>
@@ -9645,7 +9664,7 @@
                   </a:tcPr>
                 </a:tc>
               </a:tr>
-              <a:tr h="826008">
+              <a:tr h="845820">
                 <a:tc>
                   <a:txBody>
                     <a:bodyPr/>
@@ -9658,15 +9677,15 @@
                         <a:spcAft>
                           <a:spcPts val="0"/>
                         </a:spcAft>
-                        <a:defRPr sz="1500" b="0">
-                          <a:solidFill>
-                            <a:srgbClr val="111111"/>
-                          </a:solidFill>
-                          <a:latin typeface="Noto Serif CJK SC"/>
-                        </a:defRPr>
-                      </a:pPr>
-                      <a:r>
-                        <a:t>点缺陷与扩展缺陷</a:t>
+                        <a:defRPr sz="1450" b="0">
+                          <a:solidFill>
+                            <a:srgbClr val="111111"/>
+                          </a:solidFill>
+                          <a:latin typeface="Noto Serif CJK SC"/>
+                        </a:defRPr>
+                      </a:pPr>
+                      <a:r>
+                        <a:t>扰动 / 应变｜20</a:t>
                       </a:r>
                     </a:p>
                   </a:txBody>
@@ -9708,15 +9727,15 @@
                         <a:spcAft>
                           <a:spcPts val="0"/>
                         </a:spcAft>
-                        <a:defRPr sz="1500" b="0">
-                          <a:solidFill>
-                            <a:srgbClr val="111111"/>
-                          </a:solidFill>
-                          <a:latin typeface="Noto Serif CJK SC"/>
-                        </a:defRPr>
-                      </a:pPr>
-                      <a:r>
-                        <a:t>删 / 插原子；位错 / 面缺陷构建</a:t>
+                        <a:defRPr sz="1450" b="0">
+                          <a:solidFill>
+                            <a:srgbClr val="111111"/>
+                          </a:solidFill>
+                          <a:latin typeface="Noto Serif CJK SC"/>
+                        </a:defRPr>
+                      </a:pPr>
+                      <a:r>
+                        <a:t>dc 64 原子；15 个扰动 + 5 个剪切</a:t>
                       </a:r>
                     </a:p>
                   </a:txBody>
@@ -9758,15 +9777,15 @@
                         <a:spcAft>
                           <a:spcPts val="0"/>
                         </a:spcAft>
-                        <a:defRPr sz="1500" b="0">
-                          <a:solidFill>
-                            <a:srgbClr val="111111"/>
-                          </a:solidFill>
-                          <a:latin typeface="Noto Serif CJK SC"/>
-                        </a:defRPr>
-                      </a:pPr>
-                      <a:r>
-                        <a:t>空位、间隙、Frenkel 对取弛豫态和少量热扰动态；位错选代表核环境。表面、位错分别检查真空、周期兼容性与镜像效应。</a:t>
+                        <a:defRPr sz="1450" b="0">
+                          <a:solidFill>
+                            <a:srgbClr val="111111"/>
+                          </a:solidFill>
+                          <a:latin typeface="Noto Serif CJK SC"/>
+                        </a:defRPr>
+                      </a:pPr>
+                      <a:r>
+                        <a:t>dc 常规胞扩为 2×2×2；s=0.97/1.00/1.03，各做 5 次独立高斯位移（σ=0.03 Å），得15个；再施加 γxy=−4/−2/0/2/4% 得5个。不再整体弛豫。</a:t>
                       </a:r>
                     </a:p>
                   </a:txBody>
@@ -9797,7 +9816,7 @@
                   </a:tcPr>
                 </a:tc>
               </a:tr>
-              <a:tr h="826008">
+              <a:tr h="845820">
                 <a:tc>
                   <a:txBody>
                     <a:bodyPr/>
@@ -9810,15 +9829,15 @@
                         <a:spcAft>
                           <a:spcPts val="0"/>
                         </a:spcAft>
-                        <a:defRPr sz="1500" b="0">
-                          <a:solidFill>
-                            <a:srgbClr val="111111"/>
-                          </a:solidFill>
-                          <a:latin typeface="Noto Serif CJK SC"/>
-                        </a:defRPr>
-                      </a:pPr>
-                      <a:r>
-                        <a:t>非晶、熔体与熔化邻域</a:t>
+                        <a:defRPr sz="1450" b="0">
+                          <a:solidFill>
+                            <a:srgbClr val="111111"/>
+                          </a:solidFill>
+                          <a:latin typeface="Noto Serif CJK SC"/>
+                        </a:defRPr>
+                      </a:pPr>
+                      <a:r>
+                        <a:t>点缺陷｜20</a:t>
                       </a:r>
                     </a:p>
                   </a:txBody>
@@ -9860,15 +9879,15 @@
                         <a:spcAft>
                           <a:spcPts val="0"/>
                         </a:spcAft>
-                        <a:defRPr sz="1500" b="0">
-                          <a:solidFill>
-                            <a:srgbClr val="111111"/>
-                          </a:solidFill>
-                          <a:latin typeface="Noto Serif CJK SC"/>
-                        </a:defRPr>
-                      </a:pPr>
-                      <a:r>
-                        <a:t>熔化—淬火；固液共存与含空位加热</a:t>
+                        <a:defRPr sz="1450" b="0">
+                          <a:solidFill>
+                            <a:srgbClr val="111111"/>
+                          </a:solidFill>
+                          <a:latin typeface="Noto Serif CJK SC"/>
+                        </a:defRPr>
+                      </a:pPr>
+                      <a:r>
+                        <a:t>dc 216 原子；4 类 × 5 个</a:t>
                       </a:r>
                     </a:p>
                   </a:txBody>
@@ -9910,15 +9929,15 @@
                         <a:spcAft>
                           <a:spcPts val="0"/>
                         </a:spcAft>
-                        <a:defRPr sz="1500" b="0">
-                          <a:solidFill>
-                            <a:srgbClr val="111111"/>
-                          </a:solidFill>
-                          <a:latin typeface="Noto Serif CJK SC"/>
-                        </a:defRPr>
-                      </a:pPr>
-                      <a:r>
-                        <a:t>两种淬火路径生成非晶；两个 Tᵢ 生成液态。AIMD 平衡后去相关抽帧；液态按配位 / 自由体积描述，不直接定义晶格空位。</a:t>
+                        <a:defRPr sz="1450" b="0">
+                          <a:solidFill>
+                            <a:srgbClr val="111111"/>
+                          </a:solidFill>
+                          <a:latin typeface="Noto Serif CJK SC"/>
+                        </a:defRPr>
+                      </a:pPr>
+                      <a:r>
+                        <a:t>3×3×3常规胞构建单空位、近邻双空位、〈110〉分裂间隙、Frenkel对（间距4–8 Å）。母态弛豫至|F|&lt;0.02 eV/Å，再各取5个 σ=0.02 Å扰动态；若复合，改存弛豫前的前驱态。</a:t>
                       </a:r>
                     </a:p>
                   </a:txBody>
@@ -9949,7 +9968,7 @@
                   </a:tcPr>
                 </a:tc>
               </a:tr>
-              <a:tr h="826008">
+              <a:tr h="845820">
                 <a:tc>
                   <a:txBody>
                     <a:bodyPr/>
@@ -9962,15 +9981,15 @@
                         <a:spcAft>
                           <a:spcPts val="0"/>
                         </a:spcAft>
-                        <a:defRPr sz="1500" b="0">
-                          <a:solidFill>
-                            <a:srgbClr val="111111"/>
-                          </a:solidFill>
-                          <a:latin typeface="Noto Serif CJK SC"/>
-                        </a:defRPr>
-                      </a:pPr>
-                      <a:r>
-                        <a:t>迁移路径</a:t>
+                        <a:defRPr sz="1450" b="0">
+                          <a:solidFill>
+                            <a:srgbClr val="111111"/>
+                          </a:solidFill>
+                          <a:latin typeface="Noto Serif CJK SC"/>
+                        </a:defRPr>
+                      </a:pPr>
+                      <a:r>
+                        <a:t>位错 / 面缺陷｜10</a:t>
                       </a:r>
                     </a:p>
                   </a:txBody>
@@ -10012,15 +10031,15 @@
                         <a:spcAft>
                           <a:spcPts val="0"/>
                         </a:spcAft>
-                        <a:defRPr sz="1500" b="0">
-                          <a:solidFill>
-                            <a:srgbClr val="111111"/>
-                          </a:solidFill>
-                          <a:latin typeface="Noto Serif CJK SC"/>
-                        </a:defRPr>
-                      </a:pPr>
-                      <a:r>
-                        <a:t>弛豫端点 + 固定 Tₑ NEB</a:t>
+                        <a:defRPr sz="1450" b="0">
+                          <a:solidFill>
+                            <a:srgbClr val="111111"/>
+                          </a:solidFill>
+                          <a:latin typeface="Noto Serif CJK SC"/>
+                        </a:defRPr>
+                      </a:pPr>
+                      <a:r>
+                        <a:t>两类位错 × 3 个；层错2、孪晶2</a:t>
                       </a:r>
                     </a:p>
                   </a:txBody>
@@ -10062,15 +10081,15 @@
                         <a:spcAft>
                           <a:spcPts val="0"/>
                         </a:spcAft>
-                        <a:defRPr sz="1500" b="0">
-                          <a:solidFill>
-                            <a:srgbClr val="111111"/>
-                          </a:solidFill>
-                          <a:latin typeface="Noto Serif CJK SC"/>
-                        </a:defRPr>
-                      </a:pPr>
-                      <a:r>
-                        <a:t>选择空位 / 间隙的代表迁移路径，筛选约 15 个中间态；检查图像数收敛。生成后固定中间态 R，分别进行多 Tₑ 单点。</a:t>
+                        <a:defRPr sz="1450" b="0">
+                          <a:solidFill>
+                            <a:srgbClr val="111111"/>
+                          </a:solidFill>
+                          <a:latin typeface="Noto Serif CJK SC"/>
+                        </a:defRPr>
+                      </a:pPr>
+                      <a:r>
+                        <a:t>(111) 面选 b=a/2[1 −1 0]：螺型及60°位错各建净 b=0 的周期偶极；弛豫后取 −2/0/2% 剪切态，共6个。再取2个层错位移、2个孪晶厚度态。</a:t>
                       </a:r>
                     </a:p>
                   </a:txBody>
@@ -10101,7 +10120,7 @@
                   </a:tcPr>
                 </a:tc>
               </a:tr>
-              <a:tr h="826008">
+              <a:tr h="845820">
                 <a:tc>
                   <a:txBody>
                     <a:bodyPr/>
@@ -10114,15 +10133,15 @@
                         <a:spcAft>
                           <a:spcPts val="0"/>
                         </a:spcAft>
-                        <a:defRPr sz="1500" b="0">
-                          <a:solidFill>
-                            <a:srgbClr val="111111"/>
-                          </a:solidFill>
-                          <a:latin typeface="Noto Serif CJK SC"/>
-                        </a:defRPr>
-                      </a:pPr>
-                      <a:r>
-                        <a:t>电子温度维度</a:t>
+                        <a:defRPr sz="1450" b="0">
+                          <a:solidFill>
+                            <a:srgbClr val="111111"/>
+                          </a:solidFill>
+                          <a:latin typeface="Noto Serif CJK SC"/>
+                        </a:defRPr>
+                      </a:pPr>
+                      <a:r>
+                        <a:t>表面｜5</a:t>
                       </a:r>
                     </a:p>
                   </a:txBody>
@@ -10164,15 +10183,15 @@
                         <a:spcAft>
                           <a:spcPts val="0"/>
                         </a:spcAft>
-                        <a:defRPr sz="1500" b="0">
-                          <a:solidFill>
-                            <a:srgbClr val="111111"/>
-                          </a:solidFill>
-                          <a:latin typeface="Noto Serif CJK SC"/>
-                        </a:defRPr>
-                      </a:pPr>
-                      <a:r>
-                        <a:t>同一 R 扫描全部六个 Tₑ</a:t>
+                        <a:defRPr sz="1450" b="0">
+                          <a:solidFill>
+                            <a:srgbClr val="111111"/>
+                          </a:solidFill>
+                          <a:latin typeface="Noto Serif CJK SC"/>
+                        </a:defRPr>
+                      </a:pPr>
+                      <a:r>
+                        <a:t>(001) 三种 + (111) 两种</a:t>
                       </a:r>
                     </a:p>
                   </a:txBody>
@@ -10214,15 +10233,15 @@
                         <a:spcAft>
                           <a:spcPts val="0"/>
                         </a:spcAft>
-                        <a:defRPr sz="1500" b="0">
-                          <a:solidFill>
-                            <a:srgbClr val="111111"/>
-                          </a:solidFill>
-                          <a:latin typeface="Noto Serif CJK SC"/>
-                        </a:defRPr>
-                      </a:pPr>
-                      <a:r>
-                        <a:t>固定结构 → 设置 Fermi–Dirac 占据 → 逐 Tₑ 自洽 → 导出 A、原子力、应力；构成一一对应的 R×Tₑ 数据矩阵。</a:t>
+                        <a:defRPr sz="1450" b="0">
+                          <a:solidFill>
+                            <a:srgbClr val="111111"/>
+                          </a:solidFill>
+                          <a:latin typeface="Noto Serif CJK SC"/>
+                        </a:defRPr>
+                      </a:pPr>
+                      <a:r>
+                        <a:t>构建 ≥12 层 Si、15 Å 真空的 slab，固定底部4层。(001)：2×1重构完整/表面空位/Si加原子；(111)：代表完整/空位，共5个；检查厚度与真空收敛。</a:t>
                       </a:r>
                     </a:p>
                   </a:txBody>
@@ -10294,7 +10313,7 @@
               </a:defRPr>
             </a:pPr>
             <a:r>
-              <a:t>图表：沿用原模板生成策略表。Tᵢ 控制几何采样；Tₑ 控制电子标注。单步 AIMD 不作为平衡热构型采样。</a:t>
+              <a:t>图表：严格沿用原模板“任务 / 如何构建 / 具体做法”。数值为首轮起点；局域拓扑、相关性、尺寸和数值精度需检查。</a:t>
             </a:r>
           </a:p>
         </p:txBody>
@@ -10367,7 +10386,7 @@
               </a:defRPr>
             </a:pPr>
             <a:r>
-              <a:t>DFT 泛函选型｜统一主标签与独立验证</a:t>
+              <a:t>数据产生Ⅱ｜无序结构、路径与 Tₑ 标注</a:t>
             </a:r>
           </a:p>
         </p:txBody>
@@ -10424,8 +10443,8 @@
           <p:nvPr/>
         </p:nvGraphicFramePr>
         <p:xfrm>
-          <a:off x="146304" y="1143000"/>
-          <a:ext cx="11887200" cy="4480560"/>
+          <a:off x="182880" y="1078992"/>
+          <a:ext cx="11832335" cy="5074920"/>
         </p:xfrm>
         <a:graphic>
           <a:graphicData uri="http://schemas.openxmlformats.org/drawingml/2006/table">
@@ -10434,13 +10453,11 @@
                 <a:tableStyleId>{5C22544A-7EE6-4342-B048-85BDC9FD1C3A}</a:tableStyleId>
               </a:tblPr>
               <a:tblGrid>
-                <a:gridCol w="1069848"/>
-                <a:gridCol w="2734056"/>
-                <a:gridCol w="2971800"/>
-                <a:gridCol w="3209544"/>
-                <a:gridCol w="1901952"/>
+                <a:gridCol w="2011497"/>
+                <a:gridCol w="2721437"/>
+                <a:gridCol w="7099401"/>
               </a:tblGrid>
-              <a:tr h="640080">
+              <a:tr h="845820">
                 <a:tc>
                   <a:txBody>
                     <a:bodyPr/>
@@ -10453,15 +10470,15 @@
                         <a:spcAft>
                           <a:spcPts val="0"/>
                         </a:spcAft>
-                        <a:defRPr sz="1400" b="1">
-                          <a:solidFill>
-                            <a:srgbClr val="111111"/>
-                          </a:solidFill>
-                          <a:latin typeface="Noto Serif CJK SC"/>
-                        </a:defRPr>
-                      </a:pPr>
-                      <a:r>
-                        <a:t>泛函</a:t>
+                        <a:defRPr sz="1450" b="1">
+                          <a:solidFill>
+                            <a:srgbClr val="111111"/>
+                          </a:solidFill>
+                          <a:latin typeface="Noto Serif CJK SC"/>
+                        </a:defRPr>
+                      </a:pPr>
+                      <a:r>
+                        <a:t>任务</a:t>
                       </a:r>
                     </a:p>
                   </a:txBody>
@@ -10503,15 +10520,15 @@
                         <a:spcAft>
                           <a:spcPts val="0"/>
                         </a:spcAft>
-                        <a:defRPr sz="1400" b="1">
-                          <a:solidFill>
-                            <a:srgbClr val="111111"/>
-                          </a:solidFill>
-                          <a:latin typeface="Noto Serif CJK SC"/>
-                        </a:defRPr>
-                      </a:pPr>
-                      <a:r>
-                        <a:t>优点</a:t>
+                        <a:defRPr sz="1450" b="1">
+                          <a:solidFill>
+                            <a:srgbClr val="111111"/>
+                          </a:solidFill>
+                          <a:latin typeface="Noto Serif CJK SC"/>
+                        </a:defRPr>
+                      </a:pPr>
+                      <a:r>
+                        <a:t>如何构建</a:t>
                       </a:r>
                     </a:p>
                   </a:txBody>
@@ -10553,115 +10570,15 @@
                         <a:spcAft>
                           <a:spcPts val="0"/>
                         </a:spcAft>
-                        <a:defRPr sz="1400" b="1">
-                          <a:solidFill>
-                            <a:srgbClr val="111111"/>
-                          </a:solidFill>
-                          <a:latin typeface="Noto Serif CJK SC"/>
-                        </a:defRPr>
-                      </a:pPr>
-                      <a:r>
-                        <a:t>缺点</a:t>
-                      </a:r>
-                    </a:p>
-                  </a:txBody>
-                  <a:tcPr marL="64008" marR="54864" marT="22860" marB="22860" anchor="ctr">
-                    <a:solidFill>
-                      <a:srgbClr val="FFFFFF"/>
-                    </a:solidFill>
-                    <a:lnL w="6350">
-                      <a:solidFill>
-                        <a:srgbClr val="555555"/>
-                      </a:solidFill>
-                    </a:lnL>
-                    <a:lnR w="6350">
-                      <a:solidFill>
-                        <a:srgbClr val="555555"/>
-                      </a:solidFill>
-                    </a:lnR>
-                    <a:lnT w="6350">
-                      <a:solidFill>
-                        <a:srgbClr val="555555"/>
-                      </a:solidFill>
-                    </a:lnT>
-                    <a:lnB w="6350">
-                      <a:solidFill>
-                        <a:srgbClr val="555555"/>
-                      </a:solidFill>
-                    </a:lnB>
-                  </a:tcPr>
-                </a:tc>
-                <a:tc>
-                  <a:txBody>
-                    <a:bodyPr/>
-                    <a:lstStyle/>
-                    <a:p>
-                      <a:pPr algn="ctr">
-                        <a:lnSpc>
-                          <a:spcPct val="100000"/>
-                        </a:lnSpc>
-                        <a:spcAft>
-                          <a:spcPts val="0"/>
-                        </a:spcAft>
-                        <a:defRPr sz="1400" b="1">
-                          <a:solidFill>
-                            <a:srgbClr val="111111"/>
-                          </a:solidFill>
-                          <a:latin typeface="Noto Serif CJK SC"/>
-                        </a:defRPr>
-                      </a:pPr>
-                      <a:r>
-                        <a:t>适合方向</a:t>
-                      </a:r>
-                    </a:p>
-                  </a:txBody>
-                  <a:tcPr marL="64008" marR="54864" marT="22860" marB="22860" anchor="ctr">
-                    <a:solidFill>
-                      <a:srgbClr val="FFFFFF"/>
-                    </a:solidFill>
-                    <a:lnL w="6350">
-                      <a:solidFill>
-                        <a:srgbClr val="555555"/>
-                      </a:solidFill>
-                    </a:lnL>
-                    <a:lnR w="6350">
-                      <a:solidFill>
-                        <a:srgbClr val="555555"/>
-                      </a:solidFill>
-                    </a:lnR>
-                    <a:lnT w="6350">
-                      <a:solidFill>
-                        <a:srgbClr val="555555"/>
-                      </a:solidFill>
-                    </a:lnT>
-                    <a:lnB w="6350">
-                      <a:solidFill>
-                        <a:srgbClr val="555555"/>
-                      </a:solidFill>
-                    </a:lnB>
-                  </a:tcPr>
-                </a:tc>
-                <a:tc>
-                  <a:txBody>
-                    <a:bodyPr/>
-                    <a:lstStyle/>
-                    <a:p>
-                      <a:pPr algn="ctr">
-                        <a:lnSpc>
-                          <a:spcPct val="100000"/>
-                        </a:lnSpc>
-                        <a:spcAft>
-                          <a:spcPts val="0"/>
-                        </a:spcAft>
-                        <a:defRPr sz="1400" b="1">
-                          <a:solidFill>
-                            <a:srgbClr val="111111"/>
-                          </a:solidFill>
-                          <a:latin typeface="Noto Serif CJK SC"/>
-                        </a:defRPr>
-                      </a:pPr>
-                      <a:r>
-                        <a:t>相对计算成本</a:t>
+                        <a:defRPr sz="1450" b="1">
+                          <a:solidFill>
+                            <a:srgbClr val="111111"/>
+                          </a:solidFill>
+                          <a:latin typeface="Noto Serif CJK SC"/>
+                        </a:defRPr>
+                      </a:pPr>
+                      <a:r>
+                        <a:t>具体做法</a:t>
                       </a:r>
                     </a:p>
                   </a:txBody>
@@ -10692,7 +10609,7 @@
                   </a:tcPr>
                 </a:tc>
               </a:tr>
-              <a:tr h="640080">
+              <a:tr h="845820">
                 <a:tc>
                   <a:txBody>
                     <a:bodyPr/>
@@ -10705,15 +10622,15 @@
                         <a:spcAft>
                           <a:spcPts val="0"/>
                         </a:spcAft>
-                        <a:defRPr sz="1400" b="0">
-                          <a:solidFill>
-                            <a:srgbClr val="111111"/>
-                          </a:solidFill>
-                          <a:latin typeface="Noto Serif CJK SC"/>
-                        </a:defRPr>
-                      </a:pPr>
-                      <a:r>
-                        <a:t>LDA</a:t>
+                        <a:defRPr sz="1450" b="0">
+                          <a:solidFill>
+                            <a:srgbClr val="111111"/>
+                          </a:solidFill>
+                          <a:latin typeface="Noto Serif CJK SC"/>
+                        </a:defRPr>
+                      </a:pPr>
+                      <a:r>
+                        <a:t>非晶｜10</a:t>
                       </a:r>
                     </a:p>
                   </a:txBody>
@@ -10755,15 +10672,15 @@
                         <a:spcAft>
                           <a:spcPts val="0"/>
                         </a:spcAft>
-                        <a:defRPr sz="1400" b="0">
-                          <a:solidFill>
-                            <a:srgbClr val="111111"/>
-                          </a:solidFill>
-                          <a:latin typeface="Noto Serif CJK SC"/>
-                        </a:defRPr>
-                      </a:pPr>
-                      <a:r>
-                        <a:t>传统固体基准；成本较低</a:t>
+                        <a:defRPr sz="1450" b="0">
+                          <a:solidFill>
+                            <a:srgbClr val="111111"/>
+                          </a:solidFill>
+                          <a:latin typeface="Noto Serif CJK SC"/>
+                        </a:defRPr>
+                      </a:pPr>
+                      <a:r>
+                        <a:t>2 条淬火速率 × 5 个随机种子</a:t>
                       </a:r>
                     </a:p>
                   </a:txBody>
@@ -10805,44 +10722,46 @@
                         <a:spcAft>
                           <a:spcPts val="0"/>
                         </a:spcAft>
-                        <a:defRPr sz="1400" b="0">
-                          <a:solidFill>
-                            <a:srgbClr val="111111"/>
-                          </a:solidFill>
-                          <a:latin typeface="Noto Serif CJK SC"/>
-                        </a:defRPr>
-                      </a:pPr>
-                      <a:r>
-                        <a:t>过结合、带隙低估</a:t>
-                      </a:r>
-                    </a:p>
-                  </a:txBody>
-                  <a:tcPr marL="64008" marR="54864" marT="22860" marB="22860" anchor="ctr">
-                    <a:solidFill>
-                      <a:srgbClr val="FFFFFF"/>
-                    </a:solidFill>
-                    <a:lnL w="6350">
-                      <a:solidFill>
-                        <a:srgbClr val="555555"/>
-                      </a:solidFill>
-                    </a:lnL>
-                    <a:lnR w="6350">
-                      <a:solidFill>
-                        <a:srgbClr val="555555"/>
-                      </a:solidFill>
-                    </a:lnR>
-                    <a:lnT w="6350">
-                      <a:solidFill>
-                        <a:srgbClr val="555555"/>
-                      </a:solidFill>
-                    </a:lnT>
-                    <a:lnB w="6350">
-                      <a:solidFill>
-                        <a:srgbClr val="555555"/>
-                      </a:solidFill>
-                    </a:lnB>
-                  </a:tcPr>
-                </a:tc>
+                        <a:defRPr sz="1450" b="0">
+                          <a:solidFill>
+                            <a:srgbClr val="111111"/>
+                          </a:solidFill>
+                          <a:latin typeface="Noto Serif CJK SC"/>
+                        </a:defRPr>
+                      </a:pPr>
+                      <a:r>
+                        <a:t>64 原子 Si；SW-MD 候选生成，Δt=1 fs。3500 K 熔化20 ps；按10¹³/10¹⁴ K·s⁻¹淬火至300 K（约320/32 ps），各5种子，末态平衡5 ps，每种子取1帧。</a:t>
+                      </a:r>
+                    </a:p>
+                  </a:txBody>
+                  <a:tcPr marL="64008" marR="54864" marT="22860" marB="22860" anchor="ctr">
+                    <a:solidFill>
+                      <a:srgbClr val="FFFFFF"/>
+                    </a:solidFill>
+                    <a:lnL w="6350">
+                      <a:solidFill>
+                        <a:srgbClr val="555555"/>
+                      </a:solidFill>
+                    </a:lnL>
+                    <a:lnR w="6350">
+                      <a:solidFill>
+                        <a:srgbClr val="555555"/>
+                      </a:solidFill>
+                    </a:lnR>
+                    <a:lnT w="6350">
+                      <a:solidFill>
+                        <a:srgbClr val="555555"/>
+                      </a:solidFill>
+                    </a:lnT>
+                    <a:lnB w="6350">
+                      <a:solidFill>
+                        <a:srgbClr val="555555"/>
+                      </a:solidFill>
+                    </a:lnB>
+                  </a:tcPr>
+                </a:tc>
+              </a:tr>
+              <a:tr h="845820">
                 <a:tc>
                   <a:txBody>
                     <a:bodyPr/>
@@ -10855,15 +10774,15 @@
                         <a:spcAft>
                           <a:spcPts val="0"/>
                         </a:spcAft>
-                        <a:defRPr sz="1400" b="0">
-                          <a:solidFill>
-                            <a:srgbClr val="111111"/>
-                          </a:solidFill>
-                          <a:latin typeface="Noto Serif CJK SC"/>
-                        </a:defRPr>
-                      </a:pPr>
-                      <a:r>
-                        <a:t>体积与相对能对照</a:t>
+                        <a:defRPr sz="1450" b="0">
+                          <a:solidFill>
+                            <a:srgbClr val="111111"/>
+                          </a:solidFill>
+                          <a:latin typeface="Noto Serif CJK SC"/>
+                        </a:defRPr>
+                      </a:pPr>
+                      <a:r>
+                        <a:t>液态｜10</a:t>
                       </a:r>
                     </a:p>
                   </a:txBody>
@@ -10905,15 +10824,65 @@
                         <a:spcAft>
                           <a:spcPts val="0"/>
                         </a:spcAft>
-                        <a:defRPr sz="1400" b="0">
-                          <a:solidFill>
-                            <a:srgbClr val="111111"/>
-                          </a:solidFill>
-                          <a:latin typeface="Noto Serif CJK SC"/>
-                        </a:defRPr>
-                      </a:pPr>
-                      <a:r>
-                        <a:t>较低，Si 实测</a:t>
+                        <a:defRPr sz="1450" b="0">
+                          <a:solidFill>
+                            <a:srgbClr val="111111"/>
+                          </a:solidFill>
+                          <a:latin typeface="Noto Serif CJK SC"/>
+                        </a:defRPr>
+                      </a:pPr>
+                      <a:r>
+                        <a:t>两个 Tᵢ × 5 帧</a:t>
+                      </a:r>
+                    </a:p>
+                  </a:txBody>
+                  <a:tcPr marL="64008" marR="54864" marT="22860" marB="22860" anchor="ctr">
+                    <a:solidFill>
+                      <a:srgbClr val="FFFFFF"/>
+                    </a:solidFill>
+                    <a:lnL w="6350">
+                      <a:solidFill>
+                        <a:srgbClr val="555555"/>
+                      </a:solidFill>
+                    </a:lnL>
+                    <a:lnR w="6350">
+                      <a:solidFill>
+                        <a:srgbClr val="555555"/>
+                      </a:solidFill>
+                    </a:lnR>
+                    <a:lnT w="6350">
+                      <a:solidFill>
+                        <a:srgbClr val="555555"/>
+                      </a:solidFill>
+                    </a:lnT>
+                    <a:lnB w="6350">
+                      <a:solidFill>
+                        <a:srgbClr val="555555"/>
+                      </a:solidFill>
+                    </a:lnB>
+                  </a:tcPr>
+                </a:tc>
+                <a:tc>
+                  <a:txBody>
+                    <a:bodyPr/>
+                    <a:lstStyle/>
+                    <a:p>
+                      <a:pPr algn="l">
+                        <a:lnSpc>
+                          <a:spcPct val="100000"/>
+                        </a:lnSpc>
+                        <a:spcAft>
+                          <a:spcPts val="0"/>
+                        </a:spcAft>
+                        <a:defRPr sz="1450" b="0">
+                          <a:solidFill>
+                            <a:srgbClr val="111111"/>
+                          </a:solidFill>
+                          <a:latin typeface="Noto Serif CJK SC"/>
+                        </a:defRPr>
+                      </a:pPr>
+                      <a:r>
+                        <a:t>64原子先熔化；在2000/3000 K各以 NPT、0 bar 平衡10 ps，再固定平均体积做NVT 10 ps；每2 ps取1帧，得2×5=10。相关性未衰减则延长间隔，不增加配额。</a:t>
                       </a:r>
                     </a:p>
                   </a:txBody>
@@ -10944,7 +10913,7 @@
                   </a:tcPr>
                 </a:tc>
               </a:tr>
-              <a:tr h="640080">
+              <a:tr h="845820">
                 <a:tc>
                   <a:txBody>
                     <a:bodyPr/>
@@ -10957,15 +10926,15 @@
                         <a:spcAft>
                           <a:spcPts val="0"/>
                         </a:spcAft>
-                        <a:defRPr sz="1400" b="0">
-                          <a:solidFill>
-                            <a:srgbClr val="111111"/>
-                          </a:solidFill>
-                          <a:latin typeface="Noto Serif CJK SC"/>
-                        </a:defRPr>
-                      </a:pPr>
-                      <a:r>
-                        <a:t>PBE</a:t>
+                        <a:defRPr sz="1450" b="0">
+                          <a:solidFill>
+                            <a:srgbClr val="111111"/>
+                          </a:solidFill>
+                          <a:latin typeface="Noto Serif CJK SC"/>
+                        </a:defRPr>
+                      </a:pPr>
+                      <a:r>
+                        <a:t>界面 / 局部熔化｜10</a:t>
                       </a:r>
                     </a:p>
                   </a:txBody>
@@ -11007,15 +10976,15 @@
                         <a:spcAft>
                           <a:spcPts val="0"/>
                         </a:spcAft>
-                        <a:defRPr sz="1400" b="0">
-                          <a:solidFill>
-                            <a:srgbClr val="111111"/>
-                          </a:solidFill>
-                          <a:latin typeface="Noto Serif CJK SC"/>
-                        </a:defRPr>
-                      </a:pPr>
-                      <a:r>
-                        <a:t>通用，适合批量标注</a:t>
+                        <a:defRPr sz="1450" b="0">
+                          <a:solidFill>
+                            <a:srgbClr val="111111"/>
+                          </a:solidFill>
+                          <a:latin typeface="Noto Serif CJK SC"/>
+                        </a:defRPr>
+                      </a:pPr>
+                      <a:r>
+                        <a:t>固液界面5帧 + 含空位升温5帧</a:t>
                       </a:r>
                     </a:p>
                   </a:txBody>
@@ -11057,44 +11026,46 @@
                         <a:spcAft>
                           <a:spcPts val="0"/>
                         </a:spcAft>
-                        <a:defRPr sz="1400" b="0">
-                          <a:solidFill>
-                            <a:srgbClr val="111111"/>
-                          </a:solidFill>
-                          <a:latin typeface="Noto Serif CJK SC"/>
-                        </a:defRPr>
-                      </a:pPr>
-                      <a:r>
-                        <a:t>缺陷 / 相对能和带隙需验证</a:t>
-                      </a:r>
-                    </a:p>
-                  </a:txBody>
-                  <a:tcPr marL="64008" marR="54864" marT="22860" marB="22860" anchor="ctr">
-                    <a:solidFill>
-                      <a:srgbClr val="FFFFFF"/>
-                    </a:solidFill>
-                    <a:lnL w="6350">
-                      <a:solidFill>
-                        <a:srgbClr val="555555"/>
-                      </a:solidFill>
-                    </a:lnL>
-                    <a:lnR w="6350">
-                      <a:solidFill>
-                        <a:srgbClr val="555555"/>
-                      </a:solidFill>
-                    </a:lnR>
-                    <a:lnT w="6350">
-                      <a:solidFill>
-                        <a:srgbClr val="555555"/>
-                      </a:solidFill>
-                    </a:lnT>
-                    <a:lnB w="6350">
-                      <a:solidFill>
-                        <a:srgbClr val="555555"/>
-                      </a:solidFill>
-                    </a:lnB>
-                  </a:tcPr>
-                </a:tc>
+                        <a:defRPr sz="1450" b="0">
+                          <a:solidFill>
+                            <a:srgbClr val="111111"/>
+                          </a:solidFill>
+                          <a:latin typeface="Noto Serif CJK SC"/>
+                        </a:defRPr>
+                      </a:pPr>
+                      <a:r>
+                        <a:t>216原子沿z分半，固定一半、另一半3500 K 15 ps；解冻后1700 K取5帧。另删3个相隔≥5 Å的原子，以100 K/ps升温，在1600/1750/1900/2050/2200 K各取1帧。</a:t>
+                      </a:r>
+                    </a:p>
+                  </a:txBody>
+                  <a:tcPr marL="64008" marR="54864" marT="22860" marB="22860" anchor="ctr">
+                    <a:solidFill>
+                      <a:srgbClr val="FFFFFF"/>
+                    </a:solidFill>
+                    <a:lnL w="6350">
+                      <a:solidFill>
+                        <a:srgbClr val="555555"/>
+                      </a:solidFill>
+                    </a:lnL>
+                    <a:lnR w="6350">
+                      <a:solidFill>
+                        <a:srgbClr val="555555"/>
+                      </a:solidFill>
+                    </a:lnR>
+                    <a:lnT w="6350">
+                      <a:solidFill>
+                        <a:srgbClr val="555555"/>
+                      </a:solidFill>
+                    </a:lnT>
+                    <a:lnB w="6350">
+                      <a:solidFill>
+                        <a:srgbClr val="555555"/>
+                      </a:solidFill>
+                    </a:lnB>
+                  </a:tcPr>
+                </a:tc>
+              </a:tr>
+              <a:tr h="845820">
                 <a:tc>
                   <a:txBody>
                     <a:bodyPr/>
@@ -11107,15 +11078,15 @@
                         <a:spcAft>
                           <a:spcPts val="0"/>
                         </a:spcAft>
-                        <a:defRPr sz="1400" b="0">
-                          <a:solidFill>
-                            <a:srgbClr val="111111"/>
-                          </a:solidFill>
-                          <a:latin typeface="Noto Serif CJK SC"/>
-                        </a:defRPr>
-                      </a:pPr>
-                      <a:r>
-                        <a:t>拟定统一主标签；先做基准</a:t>
+                        <a:defRPr sz="1450" b="0">
+                          <a:solidFill>
+                            <a:srgbClr val="111111"/>
+                          </a:solidFill>
+                          <a:latin typeface="Noto Serif CJK SC"/>
+                        </a:defRPr>
+                      </a:pPr>
+                      <a:r>
+                        <a:t>迁移路径｜15</a:t>
                       </a:r>
                     </a:p>
                   </a:txBody>
@@ -11157,15 +11128,65 @@
                         <a:spcAft>
                           <a:spcPts val="0"/>
                         </a:spcAft>
-                        <a:defRPr sz="1400" b="0">
-                          <a:solidFill>
-                            <a:srgbClr val="111111"/>
-                          </a:solidFill>
-                          <a:latin typeface="Noto Serif CJK SC"/>
-                        </a:defRPr>
-                      </a:pPr>
-                      <a:r>
-                        <a:t>GGA 基线</a:t>
+                        <a:defRPr sz="1450" b="0">
+                          <a:solidFill>
+                            <a:srgbClr val="111111"/>
+                          </a:solidFill>
+                          <a:latin typeface="Noto Serif CJK SC"/>
+                        </a:defRPr>
+                      </a:pPr>
+                      <a:r>
+                        <a:t>3 条路径 × 5 个中间态</a:t>
+                      </a:r>
+                    </a:p>
+                  </a:txBody>
+                  <a:tcPr marL="64008" marR="54864" marT="22860" marB="22860" anchor="ctr">
+                    <a:solidFill>
+                      <a:srgbClr val="FFFFFF"/>
+                    </a:solidFill>
+                    <a:lnL w="6350">
+                      <a:solidFill>
+                        <a:srgbClr val="555555"/>
+                      </a:solidFill>
+                    </a:lnL>
+                    <a:lnR w="6350">
+                      <a:solidFill>
+                        <a:srgbClr val="555555"/>
+                      </a:solidFill>
+                    </a:lnR>
+                    <a:lnT w="6350">
+                      <a:solidFill>
+                        <a:srgbClr val="555555"/>
+                      </a:solidFill>
+                    </a:lnT>
+                    <a:lnB w="6350">
+                      <a:solidFill>
+                        <a:srgbClr val="555555"/>
+                      </a:solidFill>
+                    </a:lnB>
+                  </a:tcPr>
+                </a:tc>
+                <a:tc>
+                  <a:txBody>
+                    <a:bodyPr/>
+                    <a:lstStyle/>
+                    <a:p>
+                      <a:pPr algn="l">
+                        <a:lnSpc>
+                          <a:spcPct val="100000"/>
+                        </a:lnSpc>
+                        <a:spcAft>
+                          <a:spcPts val="0"/>
+                        </a:spcAft>
+                        <a:defRPr sz="1450" b="0">
+                          <a:solidFill>
+                            <a:srgbClr val="111111"/>
+                          </a:solidFill>
+                          <a:latin typeface="Noto Serif CJK SC"/>
+                        </a:defRPr>
+                      </a:pPr>
+                      <a:r>
+                        <a:t>单空位近邻迁移、分裂间隙迁移、Frenkel复合各1条；端点弛豫，IDPP插值5个中间图像；Tₑ=300 K做NEB至 F⊥&lt;0.05 eV/Å。检查图像数，最终每条选5帧，端点不计。</a:t>
                       </a:r>
                     </a:p>
                   </a:txBody>
@@ -11196,7 +11217,7 @@
                   </a:tcPr>
                 </a:tc>
               </a:tr>
-              <a:tr h="640080">
+              <a:tr h="845820">
                 <a:tc>
                   <a:txBody>
                     <a:bodyPr/>
@@ -11209,15 +11230,15 @@
                         <a:spcAft>
                           <a:spcPts val="0"/>
                         </a:spcAft>
-                        <a:defRPr sz="1400" b="0">
-                          <a:solidFill>
-                            <a:srgbClr val="111111"/>
-                          </a:solidFill>
-                          <a:latin typeface="Noto Serif CJK SC"/>
-                        </a:defRPr>
-                      </a:pPr>
-                      <a:r>
-                        <a:t>PBEsol</a:t>
+                        <a:defRPr sz="1450" b="0">
+                          <a:solidFill>
+                            <a:srgbClr val="111111"/>
+                          </a:solidFill>
+                          <a:latin typeface="Noto Serif CJK SC"/>
+                        </a:defRPr>
+                      </a:pPr>
+                      <a:r>
+                        <a:t>统一 Tₑ 标注｜720</a:t>
                       </a:r>
                     </a:p>
                   </a:txBody>
@@ -11259,15 +11280,15 @@
                         <a:spcAft>
                           <a:spcPts val="0"/>
                         </a:spcAft>
-                        <a:defRPr sz="1400" b="0">
-                          <a:solidFill>
-                            <a:srgbClr val="111111"/>
-                          </a:solidFill>
-                          <a:latin typeface="Noto Serif CJK SC"/>
-                        </a:defRPr>
-                      </a:pPr>
-                      <a:r>
-                        <a:t>结构、弹性与应力基准</a:t>
+                        <a:defRPr sz="1450" b="0">
+                          <a:solidFill>
+                            <a:srgbClr val="111111"/>
+                          </a:solidFill>
+                          <a:latin typeface="Noto Serif CJK SC"/>
+                        </a:defRPr>
+                      </a:pPr>
+                      <a:r>
+                        <a:t>固定120个 R × 6个 Tₑ</a:t>
                       </a:r>
                     </a:p>
                   </a:txBody>
@@ -11309,871 +11330,15 @@
                         <a:spcAft>
                           <a:spcPts val="0"/>
                         </a:spcAft>
-                        <a:defRPr sz="1400" b="0">
-                          <a:solidFill>
-                            <a:srgbClr val="111111"/>
-                          </a:solidFill>
-                          <a:latin typeface="Noto Serif CJK SC"/>
-                        </a:defRPr>
-                      </a:pPr>
-                      <a:r>
-                        <a:t>相变 / 缺陷能未必更优</a:t>
-                      </a:r>
-                    </a:p>
-                  </a:txBody>
-                  <a:tcPr marL="64008" marR="54864" marT="22860" marB="22860" anchor="ctr">
-                    <a:solidFill>
-                      <a:srgbClr val="FFFFFF"/>
-                    </a:solidFill>
-                    <a:lnL w="6350">
-                      <a:solidFill>
-                        <a:srgbClr val="555555"/>
-                      </a:solidFill>
-                    </a:lnL>
-                    <a:lnR w="6350">
-                      <a:solidFill>
-                        <a:srgbClr val="555555"/>
-                      </a:solidFill>
-                    </a:lnR>
-                    <a:lnT w="6350">
-                      <a:solidFill>
-                        <a:srgbClr val="555555"/>
-                      </a:solidFill>
-                    </a:lnT>
-                    <a:lnB w="6350">
-                      <a:solidFill>
-                        <a:srgbClr val="555555"/>
-                      </a:solidFill>
-                    </a:lnB>
-                  </a:tcPr>
-                </a:tc>
-                <a:tc>
-                  <a:txBody>
-                    <a:bodyPr/>
-                    <a:lstStyle/>
-                    <a:p>
-                      <a:pPr algn="l">
-                        <a:lnSpc>
-                          <a:spcPct val="100000"/>
-                        </a:lnSpc>
-                        <a:spcAft>
-                          <a:spcPts val="0"/>
-                        </a:spcAft>
-                        <a:defRPr sz="1400" b="0">
-                          <a:solidFill>
-                            <a:srgbClr val="111111"/>
-                          </a:solidFill>
-                          <a:latin typeface="Noto Serif CJK SC"/>
-                        </a:defRPr>
-                      </a:pPr>
-                      <a:r>
-                        <a:t>结构、状态方程对照</a:t>
-                      </a:r>
-                    </a:p>
-                  </a:txBody>
-                  <a:tcPr marL="64008" marR="54864" marT="22860" marB="22860" anchor="ctr">
-                    <a:solidFill>
-                      <a:srgbClr val="FFFFFF"/>
-                    </a:solidFill>
-                    <a:lnL w="6350">
-                      <a:solidFill>
-                        <a:srgbClr val="555555"/>
-                      </a:solidFill>
-                    </a:lnL>
-                    <a:lnR w="6350">
-                      <a:solidFill>
-                        <a:srgbClr val="555555"/>
-                      </a:solidFill>
-                    </a:lnR>
-                    <a:lnT w="6350">
-                      <a:solidFill>
-                        <a:srgbClr val="555555"/>
-                      </a:solidFill>
-                    </a:lnT>
-                    <a:lnB w="6350">
-                      <a:solidFill>
-                        <a:srgbClr val="555555"/>
-                      </a:solidFill>
-                    </a:lnB>
-                  </a:tcPr>
-                </a:tc>
-                <a:tc>
-                  <a:txBody>
-                    <a:bodyPr/>
-                    <a:lstStyle/>
-                    <a:p>
-                      <a:pPr algn="l">
-                        <a:lnSpc>
-                          <a:spcPct val="100000"/>
-                        </a:lnSpc>
-                        <a:spcAft>
-                          <a:spcPts val="0"/>
-                        </a:spcAft>
-                        <a:defRPr sz="1400" b="0">
-                          <a:solidFill>
-                            <a:srgbClr val="111111"/>
-                          </a:solidFill>
-                          <a:latin typeface="Noto Serif CJK SC"/>
-                        </a:defRPr>
-                      </a:pPr>
-                      <a:r>
-                        <a:t>与 GGA 同量级</a:t>
-                      </a:r>
-                    </a:p>
-                  </a:txBody>
-                  <a:tcPr marL="64008" marR="54864" marT="22860" marB="22860" anchor="ctr">
-                    <a:solidFill>
-                      <a:srgbClr val="FFFFFF"/>
-                    </a:solidFill>
-                    <a:lnL w="6350">
-                      <a:solidFill>
-                        <a:srgbClr val="555555"/>
-                      </a:solidFill>
-                    </a:lnL>
-                    <a:lnR w="6350">
-                      <a:solidFill>
-                        <a:srgbClr val="555555"/>
-                      </a:solidFill>
-                    </a:lnR>
-                    <a:lnT w="6350">
-                      <a:solidFill>
-                        <a:srgbClr val="555555"/>
-                      </a:solidFill>
-                    </a:lnT>
-                    <a:lnB w="6350">
-                      <a:solidFill>
-                        <a:srgbClr val="555555"/>
-                      </a:solidFill>
-                    </a:lnB>
-                  </a:tcPr>
-                </a:tc>
-              </a:tr>
-              <a:tr h="640080">
-                <a:tc>
-                  <a:txBody>
-                    <a:bodyPr/>
-                    <a:lstStyle/>
-                    <a:p>
-                      <a:pPr algn="l">
-                        <a:lnSpc>
-                          <a:spcPct val="100000"/>
-                        </a:lnSpc>
-                        <a:spcAft>
-                          <a:spcPts val="0"/>
-                        </a:spcAft>
-                        <a:defRPr sz="1400" b="0">
-                          <a:solidFill>
-                            <a:srgbClr val="111111"/>
-                          </a:solidFill>
-                          <a:latin typeface="Noto Serif CJK SC"/>
-                        </a:defRPr>
-                      </a:pPr>
-                      <a:r>
-                        <a:t>SCAN</a:t>
-                      </a:r>
-                    </a:p>
-                  </a:txBody>
-                  <a:tcPr marL="64008" marR="54864" marT="22860" marB="22860" anchor="ctr">
-                    <a:solidFill>
-                      <a:srgbClr val="FFFFFF"/>
-                    </a:solidFill>
-                    <a:lnL w="6350">
-                      <a:solidFill>
-                        <a:srgbClr val="555555"/>
-                      </a:solidFill>
-                    </a:lnL>
-                    <a:lnR w="6350">
-                      <a:solidFill>
-                        <a:srgbClr val="555555"/>
-                      </a:solidFill>
-                    </a:lnR>
-                    <a:lnT w="6350">
-                      <a:solidFill>
-                        <a:srgbClr val="555555"/>
-                      </a:solidFill>
-                    </a:lnT>
-                    <a:lnB w="6350">
-                      <a:solidFill>
-                        <a:srgbClr val="555555"/>
-                      </a:solidFill>
-                    </a:lnB>
-                  </a:tcPr>
-                </a:tc>
-                <a:tc>
-                  <a:txBody>
-                    <a:bodyPr/>
-                    <a:lstStyle/>
-                    <a:p>
-                      <a:pPr algn="l">
-                        <a:lnSpc>
-                          <a:spcPct val="100000"/>
-                        </a:lnSpc>
-                        <a:spcAft>
-                          <a:spcPts val="0"/>
-                        </a:spcAft>
-                        <a:defRPr sz="1400" b="0">
-                          <a:solidFill>
-                            <a:srgbClr val="111111"/>
-                          </a:solidFill>
-                          <a:latin typeface="Noto Serif CJK SC"/>
-                        </a:defRPr>
-                      </a:pPr>
-                      <a:r>
-                        <a:t>部分相对能量可改善</a:t>
-                      </a:r>
-                    </a:p>
-                  </a:txBody>
-                  <a:tcPr marL="64008" marR="54864" marT="22860" marB="22860" anchor="ctr">
-                    <a:solidFill>
-                      <a:srgbClr val="FFFFFF"/>
-                    </a:solidFill>
-                    <a:lnL w="6350">
-                      <a:solidFill>
-                        <a:srgbClr val="555555"/>
-                      </a:solidFill>
-                    </a:lnL>
-                    <a:lnR w="6350">
-                      <a:solidFill>
-                        <a:srgbClr val="555555"/>
-                      </a:solidFill>
-                    </a:lnR>
-                    <a:lnT w="6350">
-                      <a:solidFill>
-                        <a:srgbClr val="555555"/>
-                      </a:solidFill>
-                    </a:lnT>
-                    <a:lnB w="6350">
-                      <a:solidFill>
-                        <a:srgbClr val="555555"/>
-                      </a:solidFill>
-                    </a:lnB>
-                  </a:tcPr>
-                </a:tc>
-                <a:tc>
-                  <a:txBody>
-                    <a:bodyPr/>
-                    <a:lstStyle/>
-                    <a:p>
-                      <a:pPr algn="l">
-                        <a:lnSpc>
-                          <a:spcPct val="100000"/>
-                        </a:lnSpc>
-                        <a:spcAft>
-                          <a:spcPts val="0"/>
-                        </a:spcAft>
-                        <a:defRPr sz="1400" b="0">
-                          <a:solidFill>
-                            <a:srgbClr val="111111"/>
-                          </a:solidFill>
-                          <a:latin typeface="Noto Serif CJK SC"/>
-                        </a:defRPr>
-                      </a:pPr>
-                      <a:r>
-                        <a:t>数值收敛要求高</a:t>
-                      </a:r>
-                    </a:p>
-                  </a:txBody>
-                  <a:tcPr marL="64008" marR="54864" marT="22860" marB="22860" anchor="ctr">
-                    <a:solidFill>
-                      <a:srgbClr val="FFFFFF"/>
-                    </a:solidFill>
-                    <a:lnL w="6350">
-                      <a:solidFill>
-                        <a:srgbClr val="555555"/>
-                      </a:solidFill>
-                    </a:lnL>
-                    <a:lnR w="6350">
-                      <a:solidFill>
-                        <a:srgbClr val="555555"/>
-                      </a:solidFill>
-                    </a:lnR>
-                    <a:lnT w="6350">
-                      <a:solidFill>
-                        <a:srgbClr val="555555"/>
-                      </a:solidFill>
-                    </a:lnT>
-                    <a:lnB w="6350">
-                      <a:solidFill>
-                        <a:srgbClr val="555555"/>
-                      </a:solidFill>
-                    </a:lnB>
-                  </a:tcPr>
-                </a:tc>
-                <a:tc>
-                  <a:txBody>
-                    <a:bodyPr/>
-                    <a:lstStyle/>
-                    <a:p>
-                      <a:pPr algn="l">
-                        <a:lnSpc>
-                          <a:spcPct val="100000"/>
-                        </a:lnSpc>
-                        <a:spcAft>
-                          <a:spcPts val="0"/>
-                        </a:spcAft>
-                        <a:defRPr sz="1400" b="0">
-                          <a:solidFill>
-                            <a:srgbClr val="111111"/>
-                          </a:solidFill>
-                          <a:latin typeface="Noto Serif CJK SC"/>
-                        </a:defRPr>
-                      </a:pPr>
-                      <a:r>
-                        <a:t>少量晶相 / 缺陷校验</a:t>
-                      </a:r>
-                    </a:p>
-                  </a:txBody>
-                  <a:tcPr marL="64008" marR="54864" marT="22860" marB="22860" anchor="ctr">
-                    <a:solidFill>
-                      <a:srgbClr val="FFFFFF"/>
-                    </a:solidFill>
-                    <a:lnL w="6350">
-                      <a:solidFill>
-                        <a:srgbClr val="555555"/>
-                      </a:solidFill>
-                    </a:lnL>
-                    <a:lnR w="6350">
-                      <a:solidFill>
-                        <a:srgbClr val="555555"/>
-                      </a:solidFill>
-                    </a:lnR>
-                    <a:lnT w="6350">
-                      <a:solidFill>
-                        <a:srgbClr val="555555"/>
-                      </a:solidFill>
-                    </a:lnT>
-                    <a:lnB w="6350">
-                      <a:solidFill>
-                        <a:srgbClr val="555555"/>
-                      </a:solidFill>
-                    </a:lnB>
-                  </a:tcPr>
-                </a:tc>
-                <a:tc>
-                  <a:txBody>
-                    <a:bodyPr/>
-                    <a:lstStyle/>
-                    <a:p>
-                      <a:pPr algn="l">
-                        <a:lnSpc>
-                          <a:spcPct val="100000"/>
-                        </a:lnSpc>
-                        <a:spcAft>
-                          <a:spcPts val="0"/>
-                        </a:spcAft>
-                        <a:defRPr sz="1400" b="0">
-                          <a:solidFill>
-                            <a:srgbClr val="111111"/>
-                          </a:solidFill>
-                          <a:latin typeface="Noto Serif CJK SC"/>
-                        </a:defRPr>
-                      </a:pPr>
-                      <a:r>
-                        <a:t>高于 GGA，实测</a:t>
-                      </a:r>
-                    </a:p>
-                  </a:txBody>
-                  <a:tcPr marL="64008" marR="54864" marT="22860" marB="22860" anchor="ctr">
-                    <a:solidFill>
-                      <a:srgbClr val="FFFFFF"/>
-                    </a:solidFill>
-                    <a:lnL w="6350">
-                      <a:solidFill>
-                        <a:srgbClr val="555555"/>
-                      </a:solidFill>
-                    </a:lnL>
-                    <a:lnR w="6350">
-                      <a:solidFill>
-                        <a:srgbClr val="555555"/>
-                      </a:solidFill>
-                    </a:lnR>
-                    <a:lnT w="6350">
-                      <a:solidFill>
-                        <a:srgbClr val="555555"/>
-                      </a:solidFill>
-                    </a:lnT>
-                    <a:lnB w="6350">
-                      <a:solidFill>
-                        <a:srgbClr val="555555"/>
-                      </a:solidFill>
-                    </a:lnB>
-                  </a:tcPr>
-                </a:tc>
-              </a:tr>
-              <a:tr h="640080">
-                <a:tc>
-                  <a:txBody>
-                    <a:bodyPr/>
-                    <a:lstStyle/>
-                    <a:p>
-                      <a:pPr algn="l">
-                        <a:lnSpc>
-                          <a:spcPct val="100000"/>
-                        </a:lnSpc>
-                        <a:spcAft>
-                          <a:spcPts val="0"/>
-                        </a:spcAft>
-                        <a:defRPr sz="1400" b="0">
-                          <a:solidFill>
-                            <a:srgbClr val="111111"/>
-                          </a:solidFill>
-                          <a:latin typeface="Noto Serif CJK SC"/>
-                        </a:defRPr>
-                      </a:pPr>
-                      <a:r>
-                        <a:t>r²SCAN</a:t>
-                      </a:r>
-                    </a:p>
-                  </a:txBody>
-                  <a:tcPr marL="64008" marR="54864" marT="22860" marB="22860" anchor="ctr">
-                    <a:solidFill>
-                      <a:srgbClr val="FFFFFF"/>
-                    </a:solidFill>
-                    <a:lnL w="6350">
-                      <a:solidFill>
-                        <a:srgbClr val="555555"/>
-                      </a:solidFill>
-                    </a:lnL>
-                    <a:lnR w="6350">
-                      <a:solidFill>
-                        <a:srgbClr val="555555"/>
-                      </a:solidFill>
-                    </a:lnR>
-                    <a:lnT w="6350">
-                      <a:solidFill>
-                        <a:srgbClr val="555555"/>
-                      </a:solidFill>
-                    </a:lnT>
-                    <a:lnB w="6350">
-                      <a:solidFill>
-                        <a:srgbClr val="555555"/>
-                      </a:solidFill>
-                    </a:lnB>
-                  </a:tcPr>
-                </a:tc>
-                <a:tc>
-                  <a:txBody>
-                    <a:bodyPr/>
-                    <a:lstStyle/>
-                    <a:p>
-                      <a:pPr algn="l">
-                        <a:lnSpc>
-                          <a:spcPct val="100000"/>
-                        </a:lnSpc>
-                        <a:spcAft>
-                          <a:spcPts val="0"/>
-                        </a:spcAft>
-                        <a:defRPr sz="1400" b="0">
-                          <a:solidFill>
-                            <a:srgbClr val="111111"/>
-                          </a:solidFill>
-                          <a:latin typeface="Noto Serif CJK SC"/>
-                        </a:defRPr>
-                      </a:pPr>
-                      <a:r>
-                        <a:t>正则化后通常更易计算</a:t>
-                      </a:r>
-                    </a:p>
-                  </a:txBody>
-                  <a:tcPr marL="64008" marR="54864" marT="22860" marB="22860" anchor="ctr">
-                    <a:solidFill>
-                      <a:srgbClr val="FFFFFF"/>
-                    </a:solidFill>
-                    <a:lnL w="6350">
-                      <a:solidFill>
-                        <a:srgbClr val="555555"/>
-                      </a:solidFill>
-                    </a:lnL>
-                    <a:lnR w="6350">
-                      <a:solidFill>
-                        <a:srgbClr val="555555"/>
-                      </a:solidFill>
-                    </a:lnR>
-                    <a:lnT w="6350">
-                      <a:solidFill>
-                        <a:srgbClr val="555555"/>
-                      </a:solidFill>
-                    </a:lnT>
-                    <a:lnB w="6350">
-                      <a:solidFill>
-                        <a:srgbClr val="555555"/>
-                      </a:solidFill>
-                    </a:lnB>
-                  </a:tcPr>
-                </a:tc>
-                <a:tc>
-                  <a:txBody>
-                    <a:bodyPr/>
-                    <a:lstStyle/>
-                    <a:p>
-                      <a:pPr algn="l">
-                        <a:lnSpc>
-                          <a:spcPct val="100000"/>
-                        </a:lnSpc>
-                        <a:spcAft>
-                          <a:spcPts val="0"/>
-                        </a:spcAft>
-                        <a:defRPr sz="1400" b="0">
-                          <a:solidFill>
-                            <a:srgbClr val="111111"/>
-                          </a:solidFill>
-                          <a:latin typeface="Noto Serif CJK SC"/>
-                        </a:defRPr>
-                      </a:pPr>
-                      <a:r>
-                        <a:t>仍需网格和截断能验证</a:t>
-                      </a:r>
-                    </a:p>
-                  </a:txBody>
-                  <a:tcPr marL="64008" marR="54864" marT="22860" marB="22860" anchor="ctr">
-                    <a:solidFill>
-                      <a:srgbClr val="FFFFFF"/>
-                    </a:solidFill>
-                    <a:lnL w="6350">
-                      <a:solidFill>
-                        <a:srgbClr val="555555"/>
-                      </a:solidFill>
-                    </a:lnL>
-                    <a:lnR w="6350">
-                      <a:solidFill>
-                        <a:srgbClr val="555555"/>
-                      </a:solidFill>
-                    </a:lnR>
-                    <a:lnT w="6350">
-                      <a:solidFill>
-                        <a:srgbClr val="555555"/>
-                      </a:solidFill>
-                    </a:lnT>
-                    <a:lnB w="6350">
-                      <a:solidFill>
-                        <a:srgbClr val="555555"/>
-                      </a:solidFill>
-                    </a:lnB>
-                  </a:tcPr>
-                </a:tc>
-                <a:tc>
-                  <a:txBody>
-                    <a:bodyPr/>
-                    <a:lstStyle/>
-                    <a:p>
-                      <a:pPr algn="l">
-                        <a:lnSpc>
-                          <a:spcPct val="100000"/>
-                        </a:lnSpc>
-                        <a:spcAft>
-                          <a:spcPts val="0"/>
-                        </a:spcAft>
-                        <a:defRPr sz="1400" b="0">
-                          <a:solidFill>
-                            <a:srgbClr val="111111"/>
-                          </a:solidFill>
-                          <a:latin typeface="Noto Serif CJK SC"/>
-                        </a:defRPr>
-                      </a:pPr>
-                      <a:r>
-                        <a:t>关键结构独立校验</a:t>
-                      </a:r>
-                    </a:p>
-                  </a:txBody>
-                  <a:tcPr marL="64008" marR="54864" marT="22860" marB="22860" anchor="ctr">
-                    <a:solidFill>
-                      <a:srgbClr val="FFFFFF"/>
-                    </a:solidFill>
-                    <a:lnL w="6350">
-                      <a:solidFill>
-                        <a:srgbClr val="555555"/>
-                      </a:solidFill>
-                    </a:lnL>
-                    <a:lnR w="6350">
-                      <a:solidFill>
-                        <a:srgbClr val="555555"/>
-                      </a:solidFill>
-                    </a:lnR>
-                    <a:lnT w="6350">
-                      <a:solidFill>
-                        <a:srgbClr val="555555"/>
-                      </a:solidFill>
-                    </a:lnT>
-                    <a:lnB w="6350">
-                      <a:solidFill>
-                        <a:srgbClr val="555555"/>
-                      </a:solidFill>
-                    </a:lnB>
-                  </a:tcPr>
-                </a:tc>
-                <a:tc>
-                  <a:txBody>
-                    <a:bodyPr/>
-                    <a:lstStyle/>
-                    <a:p>
-                      <a:pPr algn="l">
-                        <a:lnSpc>
-                          <a:spcPct val="100000"/>
-                        </a:lnSpc>
-                        <a:spcAft>
-                          <a:spcPts val="0"/>
-                        </a:spcAft>
-                        <a:defRPr sz="1400" b="0">
-                          <a:solidFill>
-                            <a:srgbClr val="111111"/>
-                          </a:solidFill>
-                          <a:latin typeface="Noto Serif CJK SC"/>
-                        </a:defRPr>
-                      </a:pPr>
-                      <a:r>
-                        <a:t>高于 GGA，实测</a:t>
-                      </a:r>
-                    </a:p>
-                  </a:txBody>
-                  <a:tcPr marL="64008" marR="54864" marT="22860" marB="22860" anchor="ctr">
-                    <a:solidFill>
-                      <a:srgbClr val="FFFFFF"/>
-                    </a:solidFill>
-                    <a:lnL w="6350">
-                      <a:solidFill>
-                        <a:srgbClr val="555555"/>
-                      </a:solidFill>
-                    </a:lnL>
-                    <a:lnR w="6350">
-                      <a:solidFill>
-                        <a:srgbClr val="555555"/>
-                      </a:solidFill>
-                    </a:lnR>
-                    <a:lnT w="6350">
-                      <a:solidFill>
-                        <a:srgbClr val="555555"/>
-                      </a:solidFill>
-                    </a:lnT>
-                    <a:lnB w="6350">
-                      <a:solidFill>
-                        <a:srgbClr val="555555"/>
-                      </a:solidFill>
-                    </a:lnB>
-                  </a:tcPr>
-                </a:tc>
-              </a:tr>
-              <a:tr h="640080">
-                <a:tc>
-                  <a:txBody>
-                    <a:bodyPr/>
-                    <a:lstStyle/>
-                    <a:p>
-                      <a:pPr algn="l">
-                        <a:lnSpc>
-                          <a:spcPct val="100000"/>
-                        </a:lnSpc>
-                        <a:spcAft>
-                          <a:spcPts val="0"/>
-                        </a:spcAft>
-                        <a:defRPr sz="1400" b="0">
-                          <a:solidFill>
-                            <a:srgbClr val="111111"/>
-                          </a:solidFill>
-                          <a:latin typeface="Noto Serif CJK SC"/>
-                        </a:defRPr>
-                      </a:pPr>
-                      <a:r>
-                        <a:t>HSE06</a:t>
-                      </a:r>
-                    </a:p>
-                  </a:txBody>
-                  <a:tcPr marL="64008" marR="54864" marT="22860" marB="22860" anchor="ctr">
-                    <a:solidFill>
-                      <a:srgbClr val="FFFFFF"/>
-                    </a:solidFill>
-                    <a:lnL w="6350">
-                      <a:solidFill>
-                        <a:srgbClr val="555555"/>
-                      </a:solidFill>
-                    </a:lnL>
-                    <a:lnR w="6350">
-                      <a:solidFill>
-                        <a:srgbClr val="555555"/>
-                      </a:solidFill>
-                    </a:lnR>
-                    <a:lnT w="6350">
-                      <a:solidFill>
-                        <a:srgbClr val="555555"/>
-                      </a:solidFill>
-                    </a:lnT>
-                    <a:lnB w="6350">
-                      <a:solidFill>
-                        <a:srgbClr val="555555"/>
-                      </a:solidFill>
-                    </a:lnB>
-                  </a:tcPr>
-                </a:tc>
-                <a:tc>
-                  <a:txBody>
-                    <a:bodyPr/>
-                    <a:lstStyle/>
-                    <a:p>
-                      <a:pPr algn="l">
-                        <a:lnSpc>
-                          <a:spcPct val="100000"/>
-                        </a:lnSpc>
-                        <a:spcAft>
-                          <a:spcPts val="0"/>
-                        </a:spcAft>
-                        <a:defRPr sz="1400" b="0">
-                          <a:solidFill>
-                            <a:srgbClr val="111111"/>
-                          </a:solidFill>
-                          <a:latin typeface="Noto Serif CJK SC"/>
-                        </a:defRPr>
-                      </a:pPr>
-                      <a:r>
-                        <a:t>带隙、缺陷态校验</a:t>
-                      </a:r>
-                    </a:p>
-                  </a:txBody>
-                  <a:tcPr marL="64008" marR="54864" marT="22860" marB="22860" anchor="ctr">
-                    <a:solidFill>
-                      <a:srgbClr val="FFFFFF"/>
-                    </a:solidFill>
-                    <a:lnL w="6350">
-                      <a:solidFill>
-                        <a:srgbClr val="555555"/>
-                      </a:solidFill>
-                    </a:lnL>
-                    <a:lnR w="6350">
-                      <a:solidFill>
-                        <a:srgbClr val="555555"/>
-                      </a:solidFill>
-                    </a:lnR>
-                    <a:lnT w="6350">
-                      <a:solidFill>
-                        <a:srgbClr val="555555"/>
-                      </a:solidFill>
-                    </a:lnT>
-                    <a:lnB w="6350">
-                      <a:solidFill>
-                        <a:srgbClr val="555555"/>
-                      </a:solidFill>
-                    </a:lnB>
-                  </a:tcPr>
-                </a:tc>
-                <a:tc>
-                  <a:txBody>
-                    <a:bodyPr/>
-                    <a:lstStyle/>
-                    <a:p>
-                      <a:pPr algn="l">
-                        <a:lnSpc>
-                          <a:spcPct val="100000"/>
-                        </a:lnSpc>
-                        <a:spcAft>
-                          <a:spcPts val="0"/>
-                        </a:spcAft>
-                        <a:defRPr sz="1400" b="0">
-                          <a:solidFill>
-                            <a:srgbClr val="111111"/>
-                          </a:solidFill>
-                          <a:latin typeface="Noto Serif CJK SC"/>
-                        </a:defRPr>
-                      </a:pPr>
-                      <a:r>
-                        <a:t>昂贵；高 Tₑ 应用需验证</a:t>
-                      </a:r>
-                    </a:p>
-                  </a:txBody>
-                  <a:tcPr marL="64008" marR="54864" marT="22860" marB="22860" anchor="ctr">
-                    <a:solidFill>
-                      <a:srgbClr val="FFFFFF"/>
-                    </a:solidFill>
-                    <a:lnL w="6350">
-                      <a:solidFill>
-                        <a:srgbClr val="555555"/>
-                      </a:solidFill>
-                    </a:lnL>
-                    <a:lnR w="6350">
-                      <a:solidFill>
-                        <a:srgbClr val="555555"/>
-                      </a:solidFill>
-                    </a:lnR>
-                    <a:lnT w="6350">
-                      <a:solidFill>
-                        <a:srgbClr val="555555"/>
-                      </a:solidFill>
-                    </a:lnT>
-                    <a:lnB w="6350">
-                      <a:solidFill>
-                        <a:srgbClr val="555555"/>
-                      </a:solidFill>
-                    </a:lnB>
-                  </a:tcPr>
-                </a:tc>
-                <a:tc>
-                  <a:txBody>
-                    <a:bodyPr/>
-                    <a:lstStyle/>
-                    <a:p>
-                      <a:pPr algn="l">
-                        <a:lnSpc>
-                          <a:spcPct val="100000"/>
-                        </a:lnSpc>
-                        <a:spcAft>
-                          <a:spcPts val="0"/>
-                        </a:spcAft>
-                        <a:defRPr sz="1400" b="0">
-                          <a:solidFill>
-                            <a:srgbClr val="111111"/>
-                          </a:solidFill>
-                          <a:latin typeface="Noto Serif CJK SC"/>
-                        </a:defRPr>
-                      </a:pPr>
-                      <a:r>
-                        <a:t>少量代表结构光学校验</a:t>
-                      </a:r>
-                    </a:p>
-                  </a:txBody>
-                  <a:tcPr marL="64008" marR="54864" marT="22860" marB="22860" anchor="ctr">
-                    <a:solidFill>
-                      <a:srgbClr val="FFFFFF"/>
-                    </a:solidFill>
-                    <a:lnL w="6350">
-                      <a:solidFill>
-                        <a:srgbClr val="555555"/>
-                      </a:solidFill>
-                    </a:lnL>
-                    <a:lnR w="6350">
-                      <a:solidFill>
-                        <a:srgbClr val="555555"/>
-                      </a:solidFill>
-                    </a:lnR>
-                    <a:lnT w="6350">
-                      <a:solidFill>
-                        <a:srgbClr val="555555"/>
-                      </a:solidFill>
-                    </a:lnT>
-                    <a:lnB w="6350">
-                      <a:solidFill>
-                        <a:srgbClr val="555555"/>
-                      </a:solidFill>
-                    </a:lnB>
-                  </a:tcPr>
-                </a:tc>
-                <a:tc>
-                  <a:txBody>
-                    <a:bodyPr/>
-                    <a:lstStyle/>
-                    <a:p>
-                      <a:pPr algn="l">
-                        <a:lnSpc>
-                          <a:spcPct val="100000"/>
-                        </a:lnSpc>
-                        <a:spcAft>
-                          <a:spcPts val="0"/>
-                        </a:spcAft>
-                        <a:defRPr sz="1400" b="0">
-                          <a:solidFill>
-                            <a:srgbClr val="111111"/>
-                          </a:solidFill>
-                          <a:latin typeface="Noto Serif CJK SC"/>
-                        </a:defRPr>
-                      </a:pPr>
-                      <a:r>
-                        <a:t>显著较高，实测</a:t>
+                        <a:defRPr sz="1450" b="0">
+                          <a:solidFill>
+                            <a:srgbClr val="111111"/>
+                          </a:solidFill>
+                          <a:latin typeface="Noto Serif CJK SC"/>
+                        </a:defRPr>
+                      </a:pPr>
+                      <a:r>
+                        <a:t>每个R冻结原子、晶胞与原子数，依次算 Tₑ=300/3000/6000/9000/12000/15000 K；导出 A、力、应力。所有最终标签来自同一套PBE-DFT，SW只生成候选。</a:t>
                       </a:r>
                     </a:p>
                   </a:txBody>
@@ -12211,48 +11376,6 @@
       <p:sp>
         <p:nvSpPr>
           <p:cNvPr id="5" name="TextBox 4"/>
-          <p:cNvSpPr txBox="1"/>
-          <p:nvPr/>
-        </p:nvSpPr>
-        <p:spPr>
-          <a:xfrm>
-            <a:off x="256032" y="5806440"/>
-            <a:ext cx="11612880" cy="365760"/>
-          </a:xfrm>
-          <a:prstGeom prst="rect">
-            <a:avLst/>
-          </a:prstGeom>
-          <a:noFill/>
-        </p:spPr>
-        <p:txBody>
-          <a:bodyPr wrap="square" lIns="22860" rIns="22860" tIns="0" bIns="0">
-            <a:spAutoFit/>
-          </a:bodyPr>
-          <a:lstStyle/>
-          <a:p>
-            <a:pPr algn="l">
-              <a:lnSpc>
-                <a:spcPct val="100000"/>
-              </a:lnSpc>
-              <a:spcAft>
-                <a:spcPts val="0"/>
-              </a:spcAft>
-              <a:defRPr sz="1600" b="0">
-                <a:solidFill>
-                  <a:srgbClr val="002060"/>
-                </a:solidFill>
-                <a:latin typeface="Noto Serif CJK SC"/>
-              </a:defRPr>
-            </a:pPr>
-            <a:r>
-              <a:t>PBE 暂作首轮基线；全部 Tₑ 使用同一泛函和赝势，不直接混合不同泛函的训练标签。</a:t>
-            </a:r>
-          </a:p>
-        </p:txBody>
-      </p:sp>
-      <p:sp>
-        <p:nvSpPr>
-          <p:cNvPr id="6" name="TextBox 5"/>
           <p:cNvSpPr txBox="1"/>
           <p:nvPr/>
         </p:nvSpPr>
@@ -12287,7 +11410,7 @@
               </a:defRPr>
             </a:pPr>
             <a:r>
-              <a:t>图表：沿用原模板泛函选型表；氧化物案例的耗时与固定倍数不直接用于 Si。光学量独立计算，不作为势训练标签。</a:t>
+              <a:t>图表：严格沿用原模板“任务 / 如何构建 / 具体做法”。数值为首轮起点；局域拓扑、相关性、尺寸和数值精度需检查。</a:t>
             </a:r>
           </a:p>
         </p:txBody>
@@ -12353,7 +11476,7 @@
               </a:defRPr>
             </a:pPr>
             <a:r>
-              <a:t>Tₑ 依赖标注与训练｜输入、标签、验证</a:t>
+              <a:t>DFT 选型与标注设置｜先试算，再统一批量</a:t>
             </a:r>
           </a:p>
         </p:txBody>
@@ -12410,8 +11533,8 @@
           <p:nvPr/>
         </p:nvGraphicFramePr>
         <p:xfrm>
-          <a:off x="164592" y="1115568"/>
-          <a:ext cx="11868911" cy="4974336"/>
+          <a:off x="146304" y="1060704"/>
+          <a:ext cx="11887200" cy="2971800"/>
         </p:xfrm>
         <a:graphic>
           <a:graphicData uri="http://schemas.openxmlformats.org/drawingml/2006/table">
@@ -12420,11 +11543,13 @@
                 <a:tableStyleId>{5C22544A-7EE6-4342-B048-85BDC9FD1C3A}</a:tableStyleId>
               </a:tblPr>
               <a:tblGrid>
-                <a:gridCol w="2136404"/>
-                <a:gridCol w="3085917"/>
-                <a:gridCol w="6646590"/>
+                <a:gridCol w="1545336"/>
+                <a:gridCol w="2615184"/>
+                <a:gridCol w="2971800"/>
+                <a:gridCol w="3090672"/>
+                <a:gridCol w="1664208"/>
               </a:tblGrid>
-              <a:tr h="710619">
+              <a:tr h="495300">
                 <a:tc>
                   <a:txBody>
                     <a:bodyPr/>
@@ -12437,15 +11562,15 @@
                         <a:spcAft>
                           <a:spcPts val="0"/>
                         </a:spcAft>
-                        <a:defRPr sz="1450" b="1">
-                          <a:solidFill>
-                            <a:srgbClr val="111111"/>
-                          </a:solidFill>
-                          <a:latin typeface="Noto Serif CJK SC"/>
-                        </a:defRPr>
-                      </a:pPr>
-                      <a:r>
-                        <a:t>项目</a:t>
+                        <a:defRPr sz="1300" b="1">
+                          <a:solidFill>
+                            <a:srgbClr val="111111"/>
+                          </a:solidFill>
+                          <a:latin typeface="Noto Serif CJK SC"/>
+                        </a:defRPr>
+                      </a:pPr>
+                      <a:r>
+                        <a:t>泛函</a:t>
                       </a:r>
                     </a:p>
                   </a:txBody>
@@ -12487,15 +11612,15 @@
                         <a:spcAft>
                           <a:spcPts val="0"/>
                         </a:spcAft>
-                        <a:defRPr sz="1450" b="1">
-                          <a:solidFill>
-                            <a:srgbClr val="111111"/>
-                          </a:solidFill>
-                          <a:latin typeface="Noto Serif CJK SC"/>
-                        </a:defRPr>
-                      </a:pPr>
-                      <a:r>
-                        <a:t>核心设置</a:t>
+                        <a:defRPr sz="1300" b="1">
+                          <a:solidFill>
+                            <a:srgbClr val="111111"/>
+                          </a:solidFill>
+                          <a:latin typeface="Noto Serif CJK SC"/>
+                        </a:defRPr>
+                      </a:pPr>
+                      <a:r>
+                        <a:t>优点</a:t>
                       </a:r>
                     </a:p>
                   </a:txBody>
@@ -12537,15 +11662,115 @@
                         <a:spcAft>
                           <a:spcPts val="0"/>
                         </a:spcAft>
-                        <a:defRPr sz="1450" b="1">
-                          <a:solidFill>
-                            <a:srgbClr val="111111"/>
-                          </a:solidFill>
-                          <a:latin typeface="Noto Serif CJK SC"/>
-                        </a:defRPr>
-                      </a:pPr>
-                      <a:r>
-                        <a:t>具体执行与验收</a:t>
+                        <a:defRPr sz="1300" b="1">
+                          <a:solidFill>
+                            <a:srgbClr val="111111"/>
+                          </a:solidFill>
+                          <a:latin typeface="Noto Serif CJK SC"/>
+                        </a:defRPr>
+                      </a:pPr>
+                      <a:r>
+                        <a:t>缺点</a:t>
+                      </a:r>
+                    </a:p>
+                  </a:txBody>
+                  <a:tcPr marL="64008" marR="54864" marT="22860" marB="22860" anchor="ctr">
+                    <a:solidFill>
+                      <a:srgbClr val="FFFFFF"/>
+                    </a:solidFill>
+                    <a:lnL w="6350">
+                      <a:solidFill>
+                        <a:srgbClr val="555555"/>
+                      </a:solidFill>
+                    </a:lnL>
+                    <a:lnR w="6350">
+                      <a:solidFill>
+                        <a:srgbClr val="555555"/>
+                      </a:solidFill>
+                    </a:lnR>
+                    <a:lnT w="6350">
+                      <a:solidFill>
+                        <a:srgbClr val="555555"/>
+                      </a:solidFill>
+                    </a:lnT>
+                    <a:lnB w="6350">
+                      <a:solidFill>
+                        <a:srgbClr val="555555"/>
+                      </a:solidFill>
+                    </a:lnB>
+                  </a:tcPr>
+                </a:tc>
+                <a:tc>
+                  <a:txBody>
+                    <a:bodyPr/>
+                    <a:lstStyle/>
+                    <a:p>
+                      <a:pPr algn="ctr">
+                        <a:lnSpc>
+                          <a:spcPct val="100000"/>
+                        </a:lnSpc>
+                        <a:spcAft>
+                          <a:spcPts val="0"/>
+                        </a:spcAft>
+                        <a:defRPr sz="1300" b="1">
+                          <a:solidFill>
+                            <a:srgbClr val="111111"/>
+                          </a:solidFill>
+                          <a:latin typeface="Noto Serif CJK SC"/>
+                        </a:defRPr>
+                      </a:pPr>
+                      <a:r>
+                        <a:t>适合方向</a:t>
+                      </a:r>
+                    </a:p>
+                  </a:txBody>
+                  <a:tcPr marL="64008" marR="54864" marT="22860" marB="22860" anchor="ctr">
+                    <a:solidFill>
+                      <a:srgbClr val="FFFFFF"/>
+                    </a:solidFill>
+                    <a:lnL w="6350">
+                      <a:solidFill>
+                        <a:srgbClr val="555555"/>
+                      </a:solidFill>
+                    </a:lnL>
+                    <a:lnR w="6350">
+                      <a:solidFill>
+                        <a:srgbClr val="555555"/>
+                      </a:solidFill>
+                    </a:lnR>
+                    <a:lnT w="6350">
+                      <a:solidFill>
+                        <a:srgbClr val="555555"/>
+                      </a:solidFill>
+                    </a:lnT>
+                    <a:lnB w="6350">
+                      <a:solidFill>
+                        <a:srgbClr val="555555"/>
+                      </a:solidFill>
+                    </a:lnB>
+                  </a:tcPr>
+                </a:tc>
+                <a:tc>
+                  <a:txBody>
+                    <a:bodyPr/>
+                    <a:lstStyle/>
+                    <a:p>
+                      <a:pPr algn="ctr">
+                        <a:lnSpc>
+                          <a:spcPct val="100000"/>
+                        </a:lnSpc>
+                        <a:spcAft>
+                          <a:spcPts val="0"/>
+                        </a:spcAft>
+                        <a:defRPr sz="1300" b="1">
+                          <a:solidFill>
+                            <a:srgbClr val="111111"/>
+                          </a:solidFill>
+                          <a:latin typeface="Noto Serif CJK SC"/>
+                        </a:defRPr>
+                      </a:pPr>
+                      <a:r>
+                        <a:t>相对成本</a:t>
                       </a:r>
                     </a:p>
                   </a:txBody>
@@ -12576,7 +11801,7 @@
                   </a:tcPr>
                 </a:tc>
               </a:tr>
-              <a:tr h="710619">
+              <a:tr h="495300">
                 <a:tc>
                   <a:txBody>
                     <a:bodyPr/>
@@ -12589,15 +11814,15 @@
                         <a:spcAft>
                           <a:spcPts val="0"/>
                         </a:spcAft>
-                        <a:defRPr sz="1450" b="0">
-                          <a:solidFill>
-                            <a:srgbClr val="111111"/>
-                          </a:solidFill>
-                          <a:latin typeface="Noto Serif CJK SC"/>
-                        </a:defRPr>
-                      </a:pPr>
-                      <a:r>
-                        <a:t>Tₑ 如何进入 DFT</a:t>
+                        <a:defRPr sz="1300" b="0">
+                          <a:solidFill>
+                            <a:srgbClr val="111111"/>
+                          </a:solidFill>
+                          <a:latin typeface="Noto Serif CJK SC"/>
+                        </a:defRPr>
+                      </a:pPr>
+                      <a:r>
+                        <a:t>LDA</a:t>
                       </a:r>
                     </a:p>
                   </a:txBody>
@@ -12639,15 +11864,15 @@
                         <a:spcAft>
                           <a:spcPts val="0"/>
                         </a:spcAft>
-                        <a:defRPr sz="1450" b="0">
-                          <a:solidFill>
-                            <a:srgbClr val="111111"/>
-                          </a:solidFill>
-                          <a:latin typeface="Noto Serif CJK SC"/>
-                        </a:defRPr>
-                      </a:pPr>
-                      <a:r>
-                        <a:t>Fermi–Dirac 占据，电子热化假设</a:t>
+                        <a:defRPr sz="1300" b="0">
+                          <a:solidFill>
+                            <a:srgbClr val="111111"/>
+                          </a:solidFill>
+                          <a:latin typeface="Noto Serif CJK SC"/>
+                        </a:defRPr>
+                      </a:pPr>
+                      <a:r>
+                        <a:t>便宜；传统结构基准</a:t>
                       </a:r>
                     </a:p>
                   </a:txBody>
@@ -12689,15 +11914,115 @@
                         <a:spcAft>
                           <a:spcPts val="0"/>
                         </a:spcAft>
-                        <a:defRPr sz="1450" b="0">
-                          <a:solidFill>
-                            <a:srgbClr val="111111"/>
-                          </a:solidFill>
-                          <a:latin typeface="Noto Serif CJK SC"/>
-                        </a:defRPr>
-                      </a:pPr>
-                      <a:r>
-                        <a:t>若使用 VASP：ISMEAR = −1，SIGMA = kBTₑ（eV）；不是任意数值展宽。</a:t>
+                        <a:defRPr sz="1300" b="0">
+                          <a:solidFill>
+                            <a:srgbClr val="111111"/>
+                          </a:solidFill>
+                          <a:latin typeface="Noto Serif CJK SC"/>
+                        </a:defRPr>
+                      </a:pPr>
+                      <a:r>
+                        <a:t>过结合；带隙低估</a:t>
+                      </a:r>
+                    </a:p>
+                  </a:txBody>
+                  <a:tcPr marL="64008" marR="54864" marT="22860" marB="22860" anchor="ctr">
+                    <a:solidFill>
+                      <a:srgbClr val="FFFFFF"/>
+                    </a:solidFill>
+                    <a:lnL w="6350">
+                      <a:solidFill>
+                        <a:srgbClr val="555555"/>
+                      </a:solidFill>
+                    </a:lnL>
+                    <a:lnR w="6350">
+                      <a:solidFill>
+                        <a:srgbClr val="555555"/>
+                      </a:solidFill>
+                    </a:lnR>
+                    <a:lnT w="6350">
+                      <a:solidFill>
+                        <a:srgbClr val="555555"/>
+                      </a:solidFill>
+                    </a:lnT>
+                    <a:lnB w="6350">
+                      <a:solidFill>
+                        <a:srgbClr val="555555"/>
+                      </a:solidFill>
+                    </a:lnB>
+                  </a:tcPr>
+                </a:tc>
+                <a:tc>
+                  <a:txBody>
+                    <a:bodyPr/>
+                    <a:lstStyle/>
+                    <a:p>
+                      <a:pPr algn="l">
+                        <a:lnSpc>
+                          <a:spcPct val="100000"/>
+                        </a:lnSpc>
+                        <a:spcAft>
+                          <a:spcPts val="0"/>
+                        </a:spcAft>
+                        <a:defRPr sz="1300" b="0">
+                          <a:solidFill>
+                            <a:srgbClr val="111111"/>
+                          </a:solidFill>
+                          <a:latin typeface="Noto Serif CJK SC"/>
+                        </a:defRPr>
+                      </a:pPr>
+                      <a:r>
+                        <a:t>仅作体积 / 相对能对照</a:t>
+                      </a:r>
+                    </a:p>
+                  </a:txBody>
+                  <a:tcPr marL="64008" marR="54864" marT="22860" marB="22860" anchor="ctr">
+                    <a:solidFill>
+                      <a:srgbClr val="FFFFFF"/>
+                    </a:solidFill>
+                    <a:lnL w="6350">
+                      <a:solidFill>
+                        <a:srgbClr val="555555"/>
+                      </a:solidFill>
+                    </a:lnL>
+                    <a:lnR w="6350">
+                      <a:solidFill>
+                        <a:srgbClr val="555555"/>
+                      </a:solidFill>
+                    </a:lnR>
+                    <a:lnT w="6350">
+                      <a:solidFill>
+                        <a:srgbClr val="555555"/>
+                      </a:solidFill>
+                    </a:lnT>
+                    <a:lnB w="6350">
+                      <a:solidFill>
+                        <a:srgbClr val="555555"/>
+                      </a:solidFill>
+                    </a:lnB>
+                  </a:tcPr>
+                </a:tc>
+                <a:tc>
+                  <a:txBody>
+                    <a:bodyPr/>
+                    <a:lstStyle/>
+                    <a:p>
+                      <a:pPr algn="l">
+                        <a:lnSpc>
+                          <a:spcPct val="100000"/>
+                        </a:lnSpc>
+                        <a:spcAft>
+                          <a:spcPts val="0"/>
+                        </a:spcAft>
+                        <a:defRPr sz="1300" b="0">
+                          <a:solidFill>
+                            <a:srgbClr val="111111"/>
+                          </a:solidFill>
+                          <a:latin typeface="Noto Serif CJK SC"/>
+                        </a:defRPr>
+                      </a:pPr>
+                      <a:r>
+                        <a:t>较低，实测</a:t>
                       </a:r>
                     </a:p>
                   </a:txBody>
@@ -12728,7 +12053,7 @@
                   </a:tcPr>
                 </a:tc>
               </a:tr>
-              <a:tr h="710619">
+              <a:tr h="495300">
                 <a:tc>
                   <a:txBody>
                     <a:bodyPr/>
@@ -12741,15 +12066,15 @@
                         <a:spcAft>
                           <a:spcPts val="0"/>
                         </a:spcAft>
-                        <a:defRPr sz="1450" b="0">
-                          <a:solidFill>
-                            <a:srgbClr val="111111"/>
-                          </a:solidFill>
-                          <a:latin typeface="Noto Serif CJK SC"/>
-                        </a:defRPr>
-                      </a:pPr>
-                      <a:r>
-                        <a:t>训练目标是什么</a:t>
+                        <a:defRPr sz="1300" b="0">
+                          <a:solidFill>
+                            <a:srgbClr val="111111"/>
+                          </a:solidFill>
+                          <a:latin typeface="Noto Serif CJK SC"/>
+                        </a:defRPr>
+                      </a:pPr>
+                      <a:r>
+                        <a:t>PBE</a:t>
                       </a:r>
                     </a:p>
                   </a:txBody>
@@ -12791,15 +12116,15 @@
                         <a:spcAft>
                           <a:spcPts val="0"/>
                         </a:spcAft>
-                        <a:defRPr sz="1450" b="0">
-                          <a:solidFill>
-                            <a:srgbClr val="111111"/>
-                          </a:solidFill>
-                          <a:latin typeface="Noto Serif CJK SC"/>
-                        </a:defRPr>
-                      </a:pPr>
-                      <a:r>
-                        <a:t>电子 Helmholtz 自由能及其导数</a:t>
+                        <a:defRPr sz="1300" b="0">
+                          <a:solidFill>
+                            <a:srgbClr val="111111"/>
+                          </a:solidFill>
+                          <a:latin typeface="Noto Serif CJK SC"/>
+                        </a:defRPr>
+                      </a:pPr>
+                      <a:r>
+                        <a:t>通用、便于批量标注</a:t>
                       </a:r>
                     </a:p>
                   </a:txBody>
@@ -12841,15 +12166,115 @@
                         <a:spcAft>
                           <a:spcPts val="0"/>
                         </a:spcAft>
-                        <a:defRPr sz="1450" b="0">
-                          <a:solidFill>
-                            <a:srgbClr val="111111"/>
-                          </a:solidFill>
-                          <a:latin typeface="Noto Serif CJK SC"/>
-                        </a:defRPr>
-                      </a:pPr>
-                      <a:r>
-                        <a:t>A(R,Tₑ) = E − TₑSₑ；原子力 F = −∂A/∂R｜Tₑ；记录与之对应的应力。</a:t>
+                        <a:defRPr sz="1300" b="0">
+                          <a:solidFill>
+                            <a:srgbClr val="111111"/>
+                          </a:solidFill>
+                          <a:latin typeface="Noto Serif CJK SC"/>
+                        </a:defRPr>
+                      </a:pPr>
+                      <a:r>
+                        <a:t>缺陷能与相序需验证</a:t>
+                      </a:r>
+                    </a:p>
+                  </a:txBody>
+                  <a:tcPr marL="64008" marR="54864" marT="22860" marB="22860" anchor="ctr">
+                    <a:solidFill>
+                      <a:srgbClr val="FFFFFF"/>
+                    </a:solidFill>
+                    <a:lnL w="6350">
+                      <a:solidFill>
+                        <a:srgbClr val="555555"/>
+                      </a:solidFill>
+                    </a:lnL>
+                    <a:lnR w="6350">
+                      <a:solidFill>
+                        <a:srgbClr val="555555"/>
+                      </a:solidFill>
+                    </a:lnR>
+                    <a:lnT w="6350">
+                      <a:solidFill>
+                        <a:srgbClr val="555555"/>
+                      </a:solidFill>
+                    </a:lnT>
+                    <a:lnB w="6350">
+                      <a:solidFill>
+                        <a:srgbClr val="555555"/>
+                      </a:solidFill>
+                    </a:lnB>
+                  </a:tcPr>
+                </a:tc>
+                <a:tc>
+                  <a:txBody>
+                    <a:bodyPr/>
+                    <a:lstStyle/>
+                    <a:p>
+                      <a:pPr algn="l">
+                        <a:lnSpc>
+                          <a:spcPct val="100000"/>
+                        </a:lnSpc>
+                        <a:spcAft>
+                          <a:spcPts val="0"/>
+                        </a:spcAft>
+                        <a:defRPr sz="1300" b="0">
+                          <a:solidFill>
+                            <a:srgbClr val="111111"/>
+                          </a:solidFill>
+                          <a:latin typeface="Noto Serif CJK SC"/>
+                        </a:defRPr>
+                      </a:pPr>
+                      <a:r>
+                        <a:t>拟用统一主标签</a:t>
+                      </a:r>
+                    </a:p>
+                  </a:txBody>
+                  <a:tcPr marL="64008" marR="54864" marT="22860" marB="22860" anchor="ctr">
+                    <a:solidFill>
+                      <a:srgbClr val="FFFFFF"/>
+                    </a:solidFill>
+                    <a:lnL w="6350">
+                      <a:solidFill>
+                        <a:srgbClr val="555555"/>
+                      </a:solidFill>
+                    </a:lnL>
+                    <a:lnR w="6350">
+                      <a:solidFill>
+                        <a:srgbClr val="555555"/>
+                      </a:solidFill>
+                    </a:lnR>
+                    <a:lnT w="6350">
+                      <a:solidFill>
+                        <a:srgbClr val="555555"/>
+                      </a:solidFill>
+                    </a:lnT>
+                    <a:lnB w="6350">
+                      <a:solidFill>
+                        <a:srgbClr val="555555"/>
+                      </a:solidFill>
+                    </a:lnB>
+                  </a:tcPr>
+                </a:tc>
+                <a:tc>
+                  <a:txBody>
+                    <a:bodyPr/>
+                    <a:lstStyle/>
+                    <a:p>
+                      <a:pPr algn="l">
+                        <a:lnSpc>
+                          <a:spcPct val="100000"/>
+                        </a:lnSpc>
+                        <a:spcAft>
+                          <a:spcPts val="0"/>
+                        </a:spcAft>
+                        <a:defRPr sz="1300" b="0">
+                          <a:solidFill>
+                            <a:srgbClr val="111111"/>
+                          </a:solidFill>
+                          <a:latin typeface="Noto Serif CJK SC"/>
+                        </a:defRPr>
+                      </a:pPr>
+                      <a:r>
+                        <a:t>GGA基线</a:t>
                       </a:r>
                     </a:p>
                   </a:txBody>
@@ -12880,7 +12305,7 @@
                   </a:tcPr>
                 </a:tc>
               </a:tr>
-              <a:tr h="710619">
+              <a:tr h="495300">
                 <a:tc>
                   <a:txBody>
                     <a:bodyPr/>
@@ -12893,15 +12318,15 @@
                         <a:spcAft>
                           <a:spcPts val="0"/>
                         </a:spcAft>
-                        <a:defRPr sz="1450" b="0">
-                          <a:solidFill>
-                            <a:srgbClr val="111111"/>
-                          </a:solidFill>
-                          <a:latin typeface="Noto Serif CJK SC"/>
-                        </a:defRPr>
-                      </a:pPr>
-                      <a:r>
-                        <a:t>Tₑ 如何进入模型</a:t>
+                        <a:defRPr sz="1300" b="0">
+                          <a:solidFill>
+                            <a:srgbClr val="111111"/>
+                          </a:solidFill>
+                          <a:latin typeface="Noto Serif CJK SC"/>
+                        </a:defRPr>
+                      </a:pPr>
+                      <a:r>
+                        <a:t>PBEsol</a:t>
                       </a:r>
                     </a:p>
                   </a:txBody>
@@ -12943,15 +12368,15 @@
                         <a:spcAft>
                           <a:spcPts val="0"/>
                         </a:spcAft>
-                        <a:defRPr sz="1450" b="0">
-                          <a:solidFill>
-                            <a:srgbClr val="111111"/>
-                          </a:solidFill>
-                          <a:latin typeface="Noto Serif CJK SC"/>
-                        </a:defRPr>
-                      </a:pPr>
-                      <a:r>
-                        <a:t>Tₑ 作为显式条件输入</a:t>
+                        <a:defRPr sz="1300" b="0">
+                          <a:solidFill>
+                            <a:srgbClr val="111111"/>
+                          </a:solidFill>
+                          <a:latin typeface="Noto Serif CJK SC"/>
+                        </a:defRPr>
+                      </a:pPr>
+                      <a:r>
+                        <a:t>结构与应力基准</a:t>
                       </a:r>
                     </a:p>
                   </a:txBody>
@@ -12993,15 +12418,115 @@
                         <a:spcAft>
                           <a:spcPts val="0"/>
                         </a:spcAft>
-                        <a:defRPr sz="1450" b="0">
-                          <a:solidFill>
-                            <a:srgbClr val="111111"/>
-                          </a:solidFill>
-                          <a:latin typeface="Noto Serif CJK SC"/>
-                        </a:defRPr>
-                      </a:pPr>
-                      <a:r>
-                        <a:t>Aθ(R,Tₑ) = Σᵢ aθ(Dᵢ(R),Tₑ)；联合拟合 A、原子力与应力。</a:t>
+                        <a:defRPr sz="1300" b="0">
+                          <a:solidFill>
+                            <a:srgbClr val="111111"/>
+                          </a:solidFill>
+                          <a:latin typeface="Noto Serif CJK SC"/>
+                        </a:defRPr>
+                      </a:pPr>
+                      <a:r>
+                        <a:t>缺陷能未必更好</a:t>
+                      </a:r>
+                    </a:p>
+                  </a:txBody>
+                  <a:tcPr marL="64008" marR="54864" marT="22860" marB="22860" anchor="ctr">
+                    <a:solidFill>
+                      <a:srgbClr val="FFFFFF"/>
+                    </a:solidFill>
+                    <a:lnL w="6350">
+                      <a:solidFill>
+                        <a:srgbClr val="555555"/>
+                      </a:solidFill>
+                    </a:lnL>
+                    <a:lnR w="6350">
+                      <a:solidFill>
+                        <a:srgbClr val="555555"/>
+                      </a:solidFill>
+                    </a:lnR>
+                    <a:lnT w="6350">
+                      <a:solidFill>
+                        <a:srgbClr val="555555"/>
+                      </a:solidFill>
+                    </a:lnT>
+                    <a:lnB w="6350">
+                      <a:solidFill>
+                        <a:srgbClr val="555555"/>
+                      </a:solidFill>
+                    </a:lnB>
+                  </a:tcPr>
+                </a:tc>
+                <a:tc>
+                  <a:txBody>
+                    <a:bodyPr/>
+                    <a:lstStyle/>
+                    <a:p>
+                      <a:pPr algn="l">
+                        <a:lnSpc>
+                          <a:spcPct val="100000"/>
+                        </a:lnSpc>
+                        <a:spcAft>
+                          <a:spcPts val="0"/>
+                        </a:spcAft>
+                        <a:defRPr sz="1300" b="0">
+                          <a:solidFill>
+                            <a:srgbClr val="111111"/>
+                          </a:solidFill>
+                          <a:latin typeface="Noto Serif CJK SC"/>
+                        </a:defRPr>
+                      </a:pPr>
+                      <a:r>
+                        <a:t>状态方程 / 弹性对照</a:t>
+                      </a:r>
+                    </a:p>
+                  </a:txBody>
+                  <a:tcPr marL="64008" marR="54864" marT="22860" marB="22860" anchor="ctr">
+                    <a:solidFill>
+                      <a:srgbClr val="FFFFFF"/>
+                    </a:solidFill>
+                    <a:lnL w="6350">
+                      <a:solidFill>
+                        <a:srgbClr val="555555"/>
+                      </a:solidFill>
+                    </a:lnL>
+                    <a:lnR w="6350">
+                      <a:solidFill>
+                        <a:srgbClr val="555555"/>
+                      </a:solidFill>
+                    </a:lnR>
+                    <a:lnT w="6350">
+                      <a:solidFill>
+                        <a:srgbClr val="555555"/>
+                      </a:solidFill>
+                    </a:lnT>
+                    <a:lnB w="6350">
+                      <a:solidFill>
+                        <a:srgbClr val="555555"/>
+                      </a:solidFill>
+                    </a:lnB>
+                  </a:tcPr>
+                </a:tc>
+                <a:tc>
+                  <a:txBody>
+                    <a:bodyPr/>
+                    <a:lstStyle/>
+                    <a:p>
+                      <a:pPr algn="l">
+                        <a:lnSpc>
+                          <a:spcPct val="100000"/>
+                        </a:lnSpc>
+                        <a:spcAft>
+                          <a:spcPts val="0"/>
+                        </a:spcAft>
+                        <a:defRPr sz="1300" b="0">
+                          <a:solidFill>
+                            <a:srgbClr val="111111"/>
+                          </a:solidFill>
+                          <a:latin typeface="Noto Serif CJK SC"/>
+                        </a:defRPr>
+                      </a:pPr>
+                      <a:r>
+                        <a:t>同量级</a:t>
                       </a:r>
                     </a:p>
                   </a:txBody>
@@ -13032,7 +12557,7 @@
                   </a:tcPr>
                 </a:tc>
               </a:tr>
-              <a:tr h="710619">
+              <a:tr h="495300">
                 <a:tc>
                   <a:txBody>
                     <a:bodyPr/>
@@ -13045,15 +12570,15 @@
                         <a:spcAft>
                           <a:spcPts val="0"/>
                         </a:spcAft>
-                        <a:defRPr sz="1450" b="0">
-                          <a:solidFill>
-                            <a:srgbClr val="111111"/>
-                          </a:solidFill>
-                          <a:latin typeface="Noto Serif CJK SC"/>
-                        </a:defRPr>
-                      </a:pPr>
-                      <a:r>
-                        <a:t>计算参数如何确认</a:t>
+                        <a:defRPr sz="1300" b="0">
+                          <a:solidFill>
+                            <a:srgbClr val="111111"/>
+                          </a:solidFill>
+                          <a:latin typeface="Noto Serif CJK SC"/>
+                        </a:defRPr>
+                      </a:pPr>
+                      <a:r>
+                        <a:t>SCAN / r²SCAN</a:t>
                       </a:r>
                     </a:p>
                   </a:txBody>
@@ -13095,15 +12620,15 @@
                         <a:spcAft>
                           <a:spcPts val="0"/>
                         </a:spcAft>
-                        <a:defRPr sz="1450" b="0">
-                          <a:solidFill>
-                            <a:srgbClr val="111111"/>
-                          </a:solidFill>
-                          <a:latin typeface="Noto Serif CJK SC"/>
-                        </a:defRPr>
-                      </a:pPr>
-                      <a:r>
-                        <a:t>逐类收敛超胞、截断能、k 点与空带</a:t>
+                        <a:defRPr sz="1300" b="0">
+                          <a:solidFill>
+                            <a:srgbClr val="111111"/>
+                          </a:solidFill>
+                          <a:latin typeface="Noto Serif CJK SC"/>
+                        </a:defRPr>
+                      </a:pPr>
+                      <a:r>
+                        <a:t>部分相对能量可改善</a:t>
                       </a:r>
                     </a:p>
                   </a:txBody>
@@ -13145,15 +12670,115 @@
                         <a:spcAft>
                           <a:spcPts val="0"/>
                         </a:spcAft>
-                        <a:defRPr sz="1450" b="0">
-                          <a:solidFill>
-                            <a:srgbClr val="111111"/>
-                          </a:solidFill>
-                          <a:latin typeface="Noto Serif CJK SC"/>
-                        </a:defRPr>
-                      </a:pPr>
-                      <a:r>
-                        <a:t>体相64/216原子可作起点；位错、表面另检边界。随 Tₑ 增加 NBANDS，检查高能端占据和 SCF。</a:t>
+                        <a:defRPr sz="1300" b="0">
+                          <a:solidFill>
+                            <a:srgbClr val="111111"/>
+                          </a:solidFill>
+                          <a:latin typeface="Noto Serif CJK SC"/>
+                        </a:defRPr>
+                      </a:pPr>
+                      <a:r>
+                        <a:t>更贵，需数值收敛</a:t>
+                      </a:r>
+                    </a:p>
+                  </a:txBody>
+                  <a:tcPr marL="64008" marR="54864" marT="22860" marB="22860" anchor="ctr">
+                    <a:solidFill>
+                      <a:srgbClr val="FFFFFF"/>
+                    </a:solidFill>
+                    <a:lnL w="6350">
+                      <a:solidFill>
+                        <a:srgbClr val="555555"/>
+                      </a:solidFill>
+                    </a:lnL>
+                    <a:lnR w="6350">
+                      <a:solidFill>
+                        <a:srgbClr val="555555"/>
+                      </a:solidFill>
+                    </a:lnR>
+                    <a:lnT w="6350">
+                      <a:solidFill>
+                        <a:srgbClr val="555555"/>
+                      </a:solidFill>
+                    </a:lnT>
+                    <a:lnB w="6350">
+                      <a:solidFill>
+                        <a:srgbClr val="555555"/>
+                      </a:solidFill>
+                    </a:lnB>
+                  </a:tcPr>
+                </a:tc>
+                <a:tc>
+                  <a:txBody>
+                    <a:bodyPr/>
+                    <a:lstStyle/>
+                    <a:p>
+                      <a:pPr algn="l">
+                        <a:lnSpc>
+                          <a:spcPct val="100000"/>
+                        </a:lnSpc>
+                        <a:spcAft>
+                          <a:spcPts val="0"/>
+                        </a:spcAft>
+                        <a:defRPr sz="1300" b="0">
+                          <a:solidFill>
+                            <a:srgbClr val="111111"/>
+                          </a:solidFill>
+                          <a:latin typeface="Noto Serif CJK SC"/>
+                        </a:defRPr>
+                      </a:pPr>
+                      <a:r>
+                        <a:t>少量晶相 / 缺陷独立验证</a:t>
+                      </a:r>
+                    </a:p>
+                  </a:txBody>
+                  <a:tcPr marL="64008" marR="54864" marT="22860" marB="22860" anchor="ctr">
+                    <a:solidFill>
+                      <a:srgbClr val="FFFFFF"/>
+                    </a:solidFill>
+                    <a:lnL w="6350">
+                      <a:solidFill>
+                        <a:srgbClr val="555555"/>
+                      </a:solidFill>
+                    </a:lnL>
+                    <a:lnR w="6350">
+                      <a:solidFill>
+                        <a:srgbClr val="555555"/>
+                      </a:solidFill>
+                    </a:lnR>
+                    <a:lnT w="6350">
+                      <a:solidFill>
+                        <a:srgbClr val="555555"/>
+                      </a:solidFill>
+                    </a:lnT>
+                    <a:lnB w="6350">
+                      <a:solidFill>
+                        <a:srgbClr val="555555"/>
+                      </a:solidFill>
+                    </a:lnB>
+                  </a:tcPr>
+                </a:tc>
+                <a:tc>
+                  <a:txBody>
+                    <a:bodyPr/>
+                    <a:lstStyle/>
+                    <a:p>
+                      <a:pPr algn="l">
+                        <a:lnSpc>
+                          <a:spcPct val="100000"/>
+                        </a:lnSpc>
+                        <a:spcAft>
+                          <a:spcPts val="0"/>
+                        </a:spcAft>
+                        <a:defRPr sz="1300" b="0">
+                          <a:solidFill>
+                            <a:srgbClr val="111111"/>
+                          </a:solidFill>
+                          <a:latin typeface="Noto Serif CJK SC"/>
+                        </a:defRPr>
+                      </a:pPr>
+                      <a:r>
+                        <a:t>高于GGA</a:t>
                       </a:r>
                     </a:p>
                   </a:txBody>
@@ -13184,7 +12809,7 @@
                   </a:tcPr>
                 </a:tc>
               </a:tr>
-              <a:tr h="710619">
+              <a:tr h="495300">
                 <a:tc>
                   <a:txBody>
                     <a:bodyPr/>
@@ -13197,15 +12822,15 @@
                         <a:spcAft>
                           <a:spcPts val="0"/>
                         </a:spcAft>
-                        <a:defRPr sz="1450" b="0">
-                          <a:solidFill>
-                            <a:srgbClr val="111111"/>
-                          </a:solidFill>
-                          <a:latin typeface="Noto Serif CJK SC"/>
-                        </a:defRPr>
-                      </a:pPr>
-                      <a:r>
-                        <a:t>如何验证 Tₑ 依赖</a:t>
+                        <a:defRPr sz="1300" b="0">
+                          <a:solidFill>
+                            <a:srgbClr val="111111"/>
+                          </a:solidFill>
+                          <a:latin typeface="Noto Serif CJK SC"/>
+                        </a:defRPr>
+                      </a:pPr>
+                      <a:r>
+                        <a:t>HSE06</a:t>
                       </a:r>
                     </a:p>
                   </a:txBody>
@@ -13247,15 +12872,15 @@
                         <a:spcAft>
                           <a:spcPts val="0"/>
                         </a:spcAft>
-                        <a:defRPr sz="1450" b="0">
-                          <a:solidFill>
-                            <a:srgbClr val="111111"/>
-                          </a:solidFill>
-                          <a:latin typeface="Noto Serif CJK SC"/>
-                        </a:defRPr>
-                      </a:pPr>
-                      <a:r>
-                        <a:t>固定结构对照曲线 + 未见 Tₑ 测试</a:t>
+                        <a:defRPr sz="1300" b="0">
+                          <a:solidFill>
+                            <a:srgbClr val="111111"/>
+                          </a:solidFill>
+                          <a:latin typeface="Noto Serif CJK SC"/>
+                        </a:defRPr>
+                      </a:pPr>
+                      <a:r>
+                        <a:t>带隙、缺陷态校验</a:t>
                       </a:r>
                     </a:p>
                   </a:txBody>
@@ -13297,15 +12922,115 @@
                         <a:spcAft>
                           <a:spcPts val="0"/>
                         </a:spcAft>
-                        <a:defRPr sz="1450" b="0">
-                          <a:solidFill>
-                            <a:srgbClr val="111111"/>
-                          </a:solidFill>
-                          <a:latin typeface="Noto Serif CJK SC"/>
-                        </a:defRPr>
-                      </a:pPr>
-                      <a:r>
-                        <a:t>比较 A(Tₑ)、原子力和应力；可在1 500 / 4 500 K 追加少量插值验证，不计入首轮720。</a:t>
+                        <a:defRPr sz="1300" b="0">
+                          <a:solidFill>
+                            <a:srgbClr val="111111"/>
+                          </a:solidFill>
+                          <a:latin typeface="Noto Serif CJK SC"/>
+                        </a:defRPr>
+                      </a:pPr>
+                      <a:r>
+                        <a:t>昂贵；高Tₑ需谨慎验证</a:t>
+                      </a:r>
+                    </a:p>
+                  </a:txBody>
+                  <a:tcPr marL="64008" marR="54864" marT="22860" marB="22860" anchor="ctr">
+                    <a:solidFill>
+                      <a:srgbClr val="FFFFFF"/>
+                    </a:solidFill>
+                    <a:lnL w="6350">
+                      <a:solidFill>
+                        <a:srgbClr val="555555"/>
+                      </a:solidFill>
+                    </a:lnL>
+                    <a:lnR w="6350">
+                      <a:solidFill>
+                        <a:srgbClr val="555555"/>
+                      </a:solidFill>
+                    </a:lnR>
+                    <a:lnT w="6350">
+                      <a:solidFill>
+                        <a:srgbClr val="555555"/>
+                      </a:solidFill>
+                    </a:lnT>
+                    <a:lnB w="6350">
+                      <a:solidFill>
+                        <a:srgbClr val="555555"/>
+                      </a:solidFill>
+                    </a:lnB>
+                  </a:tcPr>
+                </a:tc>
+                <a:tc>
+                  <a:txBody>
+                    <a:bodyPr/>
+                    <a:lstStyle/>
+                    <a:p>
+                      <a:pPr algn="l">
+                        <a:lnSpc>
+                          <a:spcPct val="100000"/>
+                        </a:lnSpc>
+                        <a:spcAft>
+                          <a:spcPts val="0"/>
+                        </a:spcAft>
+                        <a:defRPr sz="1300" b="0">
+                          <a:solidFill>
+                            <a:srgbClr val="111111"/>
+                          </a:solidFill>
+                          <a:latin typeface="Noto Serif CJK SC"/>
+                        </a:defRPr>
+                      </a:pPr>
+                      <a:r>
+                        <a:t>少量电子态 / 光学校验</a:t>
+                      </a:r>
+                    </a:p>
+                  </a:txBody>
+                  <a:tcPr marL="64008" marR="54864" marT="22860" marB="22860" anchor="ctr">
+                    <a:solidFill>
+                      <a:srgbClr val="FFFFFF"/>
+                    </a:solidFill>
+                    <a:lnL w="6350">
+                      <a:solidFill>
+                        <a:srgbClr val="555555"/>
+                      </a:solidFill>
+                    </a:lnL>
+                    <a:lnR w="6350">
+                      <a:solidFill>
+                        <a:srgbClr val="555555"/>
+                      </a:solidFill>
+                    </a:lnR>
+                    <a:lnT w="6350">
+                      <a:solidFill>
+                        <a:srgbClr val="555555"/>
+                      </a:solidFill>
+                    </a:lnT>
+                    <a:lnB w="6350">
+                      <a:solidFill>
+                        <a:srgbClr val="555555"/>
+                      </a:solidFill>
+                    </a:lnB>
+                  </a:tcPr>
+                </a:tc>
+                <a:tc>
+                  <a:txBody>
+                    <a:bodyPr/>
+                    <a:lstStyle/>
+                    <a:p>
+                      <a:pPr algn="l">
+                        <a:lnSpc>
+                          <a:spcPct val="100000"/>
+                        </a:lnSpc>
+                        <a:spcAft>
+                          <a:spcPts val="0"/>
+                        </a:spcAft>
+                        <a:defRPr sz="1300" b="0">
+                          <a:solidFill>
+                            <a:srgbClr val="111111"/>
+                          </a:solidFill>
+                          <a:latin typeface="Noto Serif CJK SC"/>
+                        </a:defRPr>
+                      </a:pPr>
+                      <a:r>
+                        <a:t>显著较高</a:t>
                       </a:r>
                     </a:p>
                   </a:txBody>
@@ -13336,7 +13061,135 @@
                   </a:tcPr>
                 </a:tc>
               </a:tr>
-              <a:tr h="710622">
+            </a:tbl>
+          </a:graphicData>
+        </a:graphic>
+      </p:graphicFrame>
+      <p:graphicFrame>
+        <p:nvGraphicFramePr>
+          <p:cNvPr id="5" name="Table 4"/>
+          <p:cNvGraphicFramePr>
+            <a:graphicFrameLocks noGrp="1"/>
+          </p:cNvGraphicFramePr>
+          <p:nvPr/>
+        </p:nvGraphicFramePr>
+        <p:xfrm>
+          <a:off x="164592" y="4251960"/>
+          <a:ext cx="11868911" cy="1810512"/>
+        </p:xfrm>
+        <a:graphic>
+          <a:graphicData uri="http://schemas.openxmlformats.org/drawingml/2006/table">
+            <a:tbl>
+              <a:tblPr firstRow="1" bandRow="1">
+                <a:tableStyleId>{5C22544A-7EE6-4342-B048-85BDC9FD1C3A}</a:tableStyleId>
+              </a:tblPr>
+              <a:tblGrid>
+                <a:gridCol w="2255093"/>
+                <a:gridCol w="9613818"/>
+              </a:tblGrid>
+              <a:tr h="452628">
+                <a:tc>
+                  <a:txBody>
+                    <a:bodyPr/>
+                    <a:lstStyle/>
+                    <a:p>
+                      <a:pPr algn="ctr">
+                        <a:lnSpc>
+                          <a:spcPct val="100000"/>
+                        </a:lnSpc>
+                        <a:spcAft>
+                          <a:spcPts val="0"/>
+                        </a:spcAft>
+                        <a:defRPr sz="1260" b="1">
+                          <a:solidFill>
+                            <a:srgbClr val="111111"/>
+                          </a:solidFill>
+                          <a:latin typeface="Noto Serif CJK SC"/>
+                        </a:defRPr>
+                      </a:pPr>
+                      <a:r>
+                        <a:t>项目（以 VASP 为例）</a:t>
+                      </a:r>
+                    </a:p>
+                  </a:txBody>
+                  <a:tcPr marL="64008" marR="54864" marT="22860" marB="22860" anchor="ctr">
+                    <a:solidFill>
+                      <a:srgbClr val="FFFFFF"/>
+                    </a:solidFill>
+                    <a:lnL w="6350">
+                      <a:solidFill>
+                        <a:srgbClr val="555555"/>
+                      </a:solidFill>
+                    </a:lnL>
+                    <a:lnR w="6350">
+                      <a:solidFill>
+                        <a:srgbClr val="555555"/>
+                      </a:solidFill>
+                    </a:lnR>
+                    <a:lnT w="6350">
+                      <a:solidFill>
+                        <a:srgbClr val="555555"/>
+                      </a:solidFill>
+                    </a:lnT>
+                    <a:lnB w="6350">
+                      <a:solidFill>
+                        <a:srgbClr val="555555"/>
+                      </a:solidFill>
+                    </a:lnB>
+                  </a:tcPr>
+                </a:tc>
+                <a:tc>
+                  <a:txBody>
+                    <a:bodyPr/>
+                    <a:lstStyle/>
+                    <a:p>
+                      <a:pPr algn="ctr">
+                        <a:lnSpc>
+                          <a:spcPct val="100000"/>
+                        </a:lnSpc>
+                        <a:spcAft>
+                          <a:spcPts val="0"/>
+                        </a:spcAft>
+                        <a:defRPr sz="1260" b="1">
+                          <a:solidFill>
+                            <a:srgbClr val="111111"/>
+                          </a:solidFill>
+                          <a:latin typeface="Noto Serif CJK SC"/>
+                        </a:defRPr>
+                      </a:pPr>
+                      <a:r>
+                        <a:t>初始设置与验收规则</a:t>
+                      </a:r>
+                    </a:p>
+                  </a:txBody>
+                  <a:tcPr marL="64008" marR="54864" marT="22860" marB="22860" anchor="ctr">
+                    <a:solidFill>
+                      <a:srgbClr val="FFFFFF"/>
+                    </a:solidFill>
+                    <a:lnL w="6350">
+                      <a:solidFill>
+                        <a:srgbClr val="555555"/>
+                      </a:solidFill>
+                    </a:lnL>
+                    <a:lnR w="6350">
+                      <a:solidFill>
+                        <a:srgbClr val="555555"/>
+                      </a:solidFill>
+                    </a:lnR>
+                    <a:lnT w="6350">
+                      <a:solidFill>
+                        <a:srgbClr val="555555"/>
+                      </a:solidFill>
+                    </a:lnT>
+                    <a:lnB w="6350">
+                      <a:solidFill>
+                        <a:srgbClr val="555555"/>
+                      </a:solidFill>
+                    </a:lnB>
+                  </a:tcPr>
+                </a:tc>
+              </a:tr>
+              <a:tr h="452628">
                 <a:tc>
                   <a:txBody>
                     <a:bodyPr/>
@@ -13349,44 +13202,96 @@
                         <a:spcAft>
                           <a:spcPts val="0"/>
                         </a:spcAft>
-                        <a:defRPr sz="1450" b="0">
-                          <a:solidFill>
-                            <a:srgbClr val="111111"/>
-                          </a:solidFill>
-                          <a:latin typeface="Noto Serif CJK SC"/>
-                        </a:defRPr>
-                      </a:pPr>
-                      <a:r>
-                        <a:t>如何划分与扩充</a:t>
-                      </a:r>
-                    </a:p>
-                  </a:txBody>
-                  <a:tcPr marL="64008" marR="54864" marT="22860" marB="22860" anchor="ctr">
-                    <a:solidFill>
-                      <a:srgbClr val="FFFFFF"/>
-                    </a:solidFill>
-                    <a:lnL w="6350">
-                      <a:solidFill>
-                        <a:srgbClr val="555555"/>
-                      </a:solidFill>
-                    </a:lnL>
-                    <a:lnR w="6350">
-                      <a:solidFill>
-                        <a:srgbClr val="555555"/>
-                      </a:solidFill>
-                    </a:lnR>
-                    <a:lnT w="6350">
-                      <a:solidFill>
-                        <a:srgbClr val="555555"/>
-                      </a:solidFill>
-                    </a:lnT>
-                    <a:lnB w="6350">
-                      <a:solidFill>
-                        <a:srgbClr val="555555"/>
-                      </a:solidFill>
-                    </a:lnB>
-                  </a:tcPr>
-                </a:tc>
+                        <a:defRPr sz="1260" b="0">
+                          <a:solidFill>
+                            <a:srgbClr val="111111"/>
+                          </a:solidFill>
+                          <a:latin typeface="Noto Serif CJK SC"/>
+                        </a:defRPr>
+                      </a:pPr>
+                      <a:r>
+                        <a:t>固定R单点</a:t>
+                      </a:r>
+                    </a:p>
+                  </a:txBody>
+                  <a:tcPr marL="64008" marR="54864" marT="22860" marB="22860" anchor="ctr">
+                    <a:solidFill>
+                      <a:srgbClr val="FFFFFF"/>
+                    </a:solidFill>
+                    <a:lnL w="6350">
+                      <a:solidFill>
+                        <a:srgbClr val="555555"/>
+                      </a:solidFill>
+                    </a:lnL>
+                    <a:lnR w="6350">
+                      <a:solidFill>
+                        <a:srgbClr val="555555"/>
+                      </a:solidFill>
+                    </a:lnR>
+                    <a:lnT w="6350">
+                      <a:solidFill>
+                        <a:srgbClr val="555555"/>
+                      </a:solidFill>
+                    </a:lnT>
+                    <a:lnB w="6350">
+                      <a:solidFill>
+                        <a:srgbClr val="555555"/>
+                      </a:solidFill>
+                    </a:lnB>
+                  </a:tcPr>
+                </a:tc>
+                <a:tc>
+                  <a:txBody>
+                    <a:bodyPr/>
+                    <a:lstStyle/>
+                    <a:p>
+                      <a:pPr algn="ctr">
+                        <a:lnSpc>
+                          <a:spcPct val="100000"/>
+                        </a:lnSpc>
+                        <a:spcAft>
+                          <a:spcPts val="0"/>
+                        </a:spcAft>
+                        <a:defRPr sz="1260" b="0">
+                          <a:solidFill>
+                            <a:srgbClr val="111111"/>
+                          </a:solidFill>
+                          <a:latin typeface="Noto Serif CJK SC"/>
+                        </a:defRPr>
+                      </a:pPr>
+                      <a:r>
+                        <a:t>ISMEAR=−1；SIGMA=kBTₑ；IBRION=−1；NSW=0；PSTRESS=0；EDIFF=10⁻⁶ eV；NELM=200。</a:t>
+                      </a:r>
+                    </a:p>
+                  </a:txBody>
+                  <a:tcPr marL="64008" marR="54864" marT="22860" marB="22860" anchor="ctr">
+                    <a:solidFill>
+                      <a:srgbClr val="FFFFFF"/>
+                    </a:solidFill>
+                    <a:lnL w="6350">
+                      <a:solidFill>
+                        <a:srgbClr val="555555"/>
+                      </a:solidFill>
+                    </a:lnL>
+                    <a:lnR w="6350">
+                      <a:solidFill>
+                        <a:srgbClr val="555555"/>
+                      </a:solidFill>
+                    </a:lnR>
+                    <a:lnT w="6350">
+                      <a:solidFill>
+                        <a:srgbClr val="555555"/>
+                      </a:solidFill>
+                    </a:lnT>
+                    <a:lnB w="6350">
+                      <a:solidFill>
+                        <a:srgbClr val="555555"/>
+                      </a:solidFill>
+                    </a:lnB>
+                  </a:tcPr>
+                </a:tc>
+              </a:tr>
+              <a:tr h="452628">
                 <a:tc>
                   <a:txBody>
                     <a:bodyPr/>
@@ -13399,44 +13304,96 @@
                         <a:spcAft>
                           <a:spcPts val="0"/>
                         </a:spcAft>
-                        <a:defRPr sz="1450" b="0">
-                          <a:solidFill>
-                            <a:srgbClr val="111111"/>
-                          </a:solidFill>
-                          <a:latin typeface="Noto Serif CJK SC"/>
-                        </a:defRPr>
-                      </a:pPr>
-                      <a:r>
-                        <a:t>母构型 / 轨迹 / 路径分组；模型偏差补点</a:t>
-                      </a:r>
-                    </a:p>
-                  </a:txBody>
-                  <a:tcPr marL="64008" marR="54864" marT="22860" marB="22860" anchor="ctr">
-                    <a:solidFill>
-                      <a:srgbClr val="FFFFFF"/>
-                    </a:solidFill>
-                    <a:lnL w="6350">
-                      <a:solidFill>
-                        <a:srgbClr val="555555"/>
-                      </a:solidFill>
-                    </a:lnL>
-                    <a:lnR w="6350">
-                      <a:solidFill>
-                        <a:srgbClr val="555555"/>
-                      </a:solidFill>
-                    </a:lnR>
-                    <a:lnT w="6350">
-                      <a:solidFill>
-                        <a:srgbClr val="555555"/>
-                      </a:solidFill>
-                    </a:lnT>
-                    <a:lnB w="6350">
-                      <a:solidFill>
-                        <a:srgbClr val="555555"/>
-                      </a:solidFill>
-                    </a:lnB>
-                  </a:tcPr>
-                </a:tc>
+                        <a:defRPr sz="1260" b="0">
+                          <a:solidFill>
+                            <a:srgbClr val="111111"/>
+                          </a:solidFill>
+                          <a:latin typeface="Noto Serif CJK SC"/>
+                        </a:defRPr>
+                      </a:pPr>
+                      <a:r>
+                        <a:t>数值起点</a:t>
+                      </a:r>
+                    </a:p>
+                  </a:txBody>
+                  <a:tcPr marL="64008" marR="54864" marT="22860" marB="22860" anchor="ctr">
+                    <a:solidFill>
+                      <a:srgbClr val="FFFFFF"/>
+                    </a:solidFill>
+                    <a:lnL w="6350">
+                      <a:solidFill>
+                        <a:srgbClr val="555555"/>
+                      </a:solidFill>
+                    </a:lnL>
+                    <a:lnR w="6350">
+                      <a:solidFill>
+                        <a:srgbClr val="555555"/>
+                      </a:solidFill>
+                    </a:lnR>
+                    <a:lnT w="6350">
+                      <a:solidFill>
+                        <a:srgbClr val="555555"/>
+                      </a:solidFill>
+                    </a:lnT>
+                    <a:lnB w="6350">
+                      <a:solidFill>
+                        <a:srgbClr val="555555"/>
+                      </a:solidFill>
+                    </a:lnB>
+                  </a:tcPr>
+                </a:tc>
+                <a:tc>
+                  <a:txBody>
+                    <a:bodyPr/>
+                    <a:lstStyle/>
+                    <a:p>
+                      <a:pPr algn="ctr">
+                        <a:lnSpc>
+                          <a:spcPct val="100000"/>
+                        </a:lnSpc>
+                        <a:spcAft>
+                          <a:spcPts val="0"/>
+                        </a:spcAft>
+                        <a:defRPr sz="1260" b="0">
+                          <a:solidFill>
+                            <a:srgbClr val="111111"/>
+                          </a:solidFill>
+                          <a:latin typeface="Noto Serif CJK SC"/>
+                        </a:defRPr>
+                      </a:pPr>
+                      <a:r>
+                        <a:t>ENCUT=500 eV，比较400/500/600；64原子试2³/3³ k点，216原子试Γ/2³；高压金属相独立收敛。</a:t>
+                      </a:r>
+                    </a:p>
+                  </a:txBody>
+                  <a:tcPr marL="64008" marR="54864" marT="22860" marB="22860" anchor="ctr">
+                    <a:solidFill>
+                      <a:srgbClr val="FFFFFF"/>
+                    </a:solidFill>
+                    <a:lnL w="6350">
+                      <a:solidFill>
+                        <a:srgbClr val="555555"/>
+                      </a:solidFill>
+                    </a:lnL>
+                    <a:lnR w="6350">
+                      <a:solidFill>
+                        <a:srgbClr val="555555"/>
+                      </a:solidFill>
+                    </a:lnR>
+                    <a:lnT w="6350">
+                      <a:solidFill>
+                        <a:srgbClr val="555555"/>
+                      </a:solidFill>
+                    </a:lnT>
+                    <a:lnB w="6350">
+                      <a:solidFill>
+                        <a:srgbClr val="555555"/>
+                      </a:solidFill>
+                    </a:lnB>
+                  </a:tcPr>
+                </a:tc>
+              </a:tr>
+              <a:tr h="452628">
                 <a:tc>
                   <a:txBody>
                     <a:bodyPr/>
@@ -13449,15 +13406,65 @@
                         <a:spcAft>
                           <a:spcPts val="0"/>
                         </a:spcAft>
-                        <a:defRPr sz="1450" b="0">
-                          <a:solidFill>
-                            <a:srgbClr val="111111"/>
-                          </a:solidFill>
-                          <a:latin typeface="Noto Serif CJK SC"/>
-                        </a:defRPr>
-                      </a:pPr>
-                      <a:r>
-                        <a:t>同 R 的六个 Tₑ 标签不跨结构组；120个仅为种子集。优先补大误差的结构和温区，不盲目加类别。</a:t>
+                        <a:defRPr sz="1260" b="0">
+                          <a:solidFill>
+                            <a:srgbClr val="111111"/>
+                          </a:solidFill>
+                          <a:latin typeface="Noto Serif CJK SC"/>
+                        </a:defRPr>
+                      </a:pPr>
+                      <a:r>
+                        <a:t>高Tₑ与验收</a:t>
+                      </a:r>
+                    </a:p>
+                  </a:txBody>
+                  <a:tcPr marL="64008" marR="54864" marT="22860" marB="22860" anchor="ctr">
+                    <a:solidFill>
+                      <a:srgbClr val="FFFFFF"/>
+                    </a:solidFill>
+                    <a:lnL w="6350">
+                      <a:solidFill>
+                        <a:srgbClr val="555555"/>
+                      </a:solidFill>
+                    </a:lnL>
+                    <a:lnR w="6350">
+                      <a:solidFill>
+                        <a:srgbClr val="555555"/>
+                      </a:solidFill>
+                    </a:lnR>
+                    <a:lnT w="6350">
+                      <a:solidFill>
+                        <a:srgbClr val="555555"/>
+                      </a:solidFill>
+                    </a:lnT>
+                    <a:lnB w="6350">
+                      <a:solidFill>
+                        <a:srgbClr val="555555"/>
+                      </a:solidFill>
+                    </a:lnB>
+                  </a:tcPr>
+                </a:tc>
+                <a:tc>
+                  <a:txBody>
+                    <a:bodyPr/>
+                    <a:lstStyle/>
+                    <a:p>
+                      <a:pPr algn="ctr">
+                        <a:lnSpc>
+                          <a:spcPct val="100000"/>
+                        </a:lnSpc>
+                        <a:spcAft>
+                          <a:spcPts val="0"/>
+                        </a:spcAft>
+                        <a:defRPr sz="1260" b="0">
+                          <a:solidFill>
+                            <a:srgbClr val="111111"/>
+                          </a:solidFill>
+                          <a:latin typeface="Noto Serif CJK SC"/>
+                        </a:defRPr>
+                      </a:pPr>
+                      <a:r>
+                        <a:t>NBANDS从2Nocc起测，按25%加带至最高带占据&lt;10⁻⁵；收敛目标 ΔA&lt;1 meV/atom、ΔF&lt;0.01 eV/Å、Δσ&lt;0.1 GPa。</a:t>
                       </a:r>
                     </a:p>
                   </a:txBody>
@@ -13494,7 +13501,7 @@
       </p:graphicFrame>
       <p:sp>
         <p:nvSpPr>
-          <p:cNvPr id="5" name="TextBox 4"/>
+          <p:cNvPr id="6" name="TextBox 5"/>
           <p:cNvSpPr txBox="1"/>
           <p:nvPr/>
         </p:nvSpPr>
@@ -13529,7 +13536,7 @@
               </a:defRPr>
             </a:pPr>
             <a:r>
-              <a:t>图表：固定 R 的多 Tₑ 数据矩阵 / A(Tₑ) 对照曲线。720 组为首轮预算；Tₑ 与 Tᵢ 独立，缺陷能需统一化学势。</a:t>
+              <a:t>图表：原模板泛函表 + 参数卡。导出自由能 TOTEN（A）、对应原子力 / 应力；保留Tₑ。其他泛函不与PBE标签直接混训。</a:t>
             </a:r>
           </a:p>
         </p:txBody>
